--- a/out/WineBank_FY2027_銀行提出.pptx
+++ b/out/WineBank_FY2027_銀行提出.pptx
@@ -1073,7 +1073,7 @@
           <a:p>
             <a:r>
               <a:rPr lang="en-US" dirty="0"/>
-              <a:t>プランDの月次。通期経常＋120.4百万円。3月にM&amp;A仲介と新規クルーザー事業30百万円が乗る。</a:t>
+              <a:t>プランDの月次。通期経常＋90.4百万円。M&amp;A仲介はFY2026に前倒しのため計上なし。3月と9月にクルーザー各10百万円。</a:t>
             </a:r>
             <a:endParaRPr lang="en-US" dirty="0"/>
           </a:p>
@@ -1161,7 +1161,7 @@
           <a:p>
             <a:r>
               <a:rPr lang="en-US" dirty="0"/>
-              <a:t>プランDでは期中最低40.3百万円、期末187.1百万円。仕入を維持しても在庫が積み上がらないため、資金が固定されないことが効いている。ケースDは差額売上が未達の場合で、その差が本計画の意味。</a:t>
+              <a:t>プランDでは期中最低34.2百万円、期末135.8百万円。仕入を維持しても在庫が積み上がらないため、資金が固定されないことが効いている。ケースDは差額売上が未達の場合で、その差が本計画の意味。</a:t>
             </a:r>
             <a:endParaRPr lang="en-US" dirty="0"/>
           </a:p>
@@ -1249,7 +1249,7 @@
           <a:p>
             <a:r>
               <a:rPr lang="en-US" dirty="0"/>
-              <a:t>プランEは施策を打った場合の上振れ。300百万円はFY2026に私募で巻き返した金額と同水準で、まったくの新規前提ではない。</a:t>
+              <a:t>プランEは施策を打った場合の上振れ。300百万円はFY2026に私募2本（3号5億・4号1億）で実際に組成した規模と同水準で、まったくの新規前提ではない。</a:t>
             </a:r>
             <a:endParaRPr lang="en-US" dirty="0"/>
           </a:p>
@@ -1689,7 +1689,7 @@
           <a:p>
             <a:r>
               <a:rPr lang="en-US" dirty="0"/>
-              <a:t>Dは既存事業を前期・今期の平均730.5百万円に置き、上乗せ案件132.5百万円を外数で加えたメインシナリオ。売上863.0百万円、経常＋120.4百万円。Eはさらに私募＋オークション300百万円を上積みした上振れ。</a:t>
+              <a:t>FY2026は私募2本で営業▲9.8まで回復。Dは既存730.5＋上乗せ102.5で売上833.0、経常＋90.4。Eはさらに私募＋オークション300百万円を上積み。</a:t>
             </a:r>
             <a:endParaRPr lang="en-US" dirty="0"/>
           </a:p>
@@ -1777,7 +1777,7 @@
           <a:p>
             <a:r>
               <a:rPr lang="en-US" dirty="0"/>
-              <a:t>最大の未達要因はSBI証券との公募ファンドの遅延。これだけで粗利200百万円超。次に私募ファンドの期ズレ。飲食3店舗の赤字額は店舗別確定値を反映予定。</a:t>
+              <a:t>私募2本が9月末に間に合ったことで営業損益はほぼ均衡。ただしSBI公募の遅延（粗利200百万円超）は解消していない。前倒し2件はFY2027から落ちる。</a:t>
             </a:r>
             <a:endParaRPr lang="en-US" dirty="0"/>
           </a:p>
@@ -2217,7 +2217,7 @@
           <a:p>
             <a:r>
               <a:rPr lang="en-US" dirty="0"/>
-              <a:t>①の粗利減少は、FY2026の大口スポット案件を来期はゼロと置いた保守性の表れ。③は新規開拓ではなく過去2期平均への復元。</a:t>
+              <a:t>一過性の私募を先に落として見せることが誠実さになる。③は新規開拓ではなく過去2期平均への復元。</a:t>
             </a:r>
             <a:endParaRPr lang="en-US" dirty="0"/>
           </a:p>
@@ -4479,7 +4479,7 @@
                 <a:ea typeface="メイリオ" pitchFamily="34" charset="-122"/>
                 <a:cs typeface="メイリオ" pitchFamily="34" charset="-120"/>
               </a:rPr>
-              <a:t>既存389.1（51.5%）＋差額341.4（30%）＋上乗せ132.5（原価なし）。単位：百万円</a:t>
+              <a:t>既存389.1（51.5%）＋差額341.4（30%）＋上乗せ102.5（原価なし）。単位：百万円</a:t>
             </a:r>
             <a:endParaRPr lang="en-US" sz="1250" dirty="0"/>
           </a:p>
@@ -6861,7 +6861,7 @@
                 <a:ea typeface="メイリオ" pitchFamily="34" charset="-122"/>
                 <a:cs typeface="メイリオ" pitchFamily="34" charset="-120"/>
               </a:rPr>
-              <a:t>7.7</a:t>
+              <a:t>6.9</a:t>
             </a:r>
             <a:endParaRPr lang="en-US" sz="850" dirty="0"/>
           </a:p>
@@ -6900,7 +6900,7 @@
                 <a:ea typeface="メイリオ" pitchFamily="34" charset="-122"/>
                 <a:cs typeface="メイリオ" pitchFamily="34" charset="-120"/>
               </a:rPr>
-              <a:t>7.7</a:t>
+              <a:t>6.9</a:t>
             </a:r>
             <a:endParaRPr lang="en-US" sz="850" dirty="0"/>
           </a:p>
@@ -6939,7 +6939,7 @@
                 <a:ea typeface="メイリオ" pitchFamily="34" charset="-122"/>
                 <a:cs typeface="メイリオ" pitchFamily="34" charset="-120"/>
               </a:rPr>
-              <a:t>7.7</a:t>
+              <a:t>6.9</a:t>
             </a:r>
             <a:endParaRPr lang="en-US" sz="850" dirty="0"/>
           </a:p>
@@ -6978,7 +6978,7 @@
                 <a:ea typeface="メイリオ" pitchFamily="34" charset="-122"/>
                 <a:cs typeface="メイリオ" pitchFamily="34" charset="-120"/>
               </a:rPr>
-              <a:t>7.7</a:t>
+              <a:t>6.9</a:t>
             </a:r>
             <a:endParaRPr lang="en-US" sz="850" dirty="0"/>
           </a:p>
@@ -7017,7 +7017,7 @@
                 <a:ea typeface="メイリオ" pitchFamily="34" charset="-122"/>
                 <a:cs typeface="メイリオ" pitchFamily="34" charset="-120"/>
               </a:rPr>
-              <a:t>7.7</a:t>
+              <a:t>6.9</a:t>
             </a:r>
             <a:endParaRPr lang="en-US" sz="850" dirty="0"/>
           </a:p>
@@ -7056,7 +7056,7 @@
                 <a:ea typeface="メイリオ" pitchFamily="34" charset="-122"/>
                 <a:cs typeface="メイリオ" pitchFamily="34" charset="-120"/>
               </a:rPr>
-              <a:t>7.7</a:t>
+              <a:t>6.9</a:t>
             </a:r>
             <a:endParaRPr lang="en-US" sz="850" dirty="0"/>
           </a:p>
@@ -7095,7 +7095,7 @@
                 <a:ea typeface="メイリオ" pitchFamily="34" charset="-122"/>
                 <a:cs typeface="メイリオ" pitchFamily="34" charset="-120"/>
               </a:rPr>
-              <a:t>7.7</a:t>
+              <a:t>6.9</a:t>
             </a:r>
             <a:endParaRPr lang="en-US" sz="850" dirty="0"/>
           </a:p>
@@ -7134,7 +7134,7 @@
                 <a:ea typeface="メイリオ" pitchFamily="34" charset="-122"/>
                 <a:cs typeface="メイリオ" pitchFamily="34" charset="-120"/>
               </a:rPr>
-              <a:t>7.7</a:t>
+              <a:t>6.9</a:t>
             </a:r>
             <a:endParaRPr lang="en-US" sz="850" dirty="0"/>
           </a:p>
@@ -7173,7 +7173,7 @@
                 <a:ea typeface="メイリオ" pitchFamily="34" charset="-122"/>
                 <a:cs typeface="メイリオ" pitchFamily="34" charset="-120"/>
               </a:rPr>
-              <a:t>7.7</a:t>
+              <a:t>6.9</a:t>
             </a:r>
             <a:endParaRPr lang="en-US" sz="850" dirty="0"/>
           </a:p>
@@ -7212,7 +7212,7 @@
                 <a:ea typeface="メイリオ" pitchFamily="34" charset="-122"/>
                 <a:cs typeface="メイリオ" pitchFamily="34" charset="-120"/>
               </a:rPr>
-              <a:t>7.7</a:t>
+              <a:t>6.9</a:t>
             </a:r>
             <a:endParaRPr lang="en-US" sz="850" dirty="0"/>
           </a:p>
@@ -7251,7 +7251,7 @@
                 <a:ea typeface="メイリオ" pitchFamily="34" charset="-122"/>
                 <a:cs typeface="メイリオ" pitchFamily="34" charset="-120"/>
               </a:rPr>
-              <a:t>7.7</a:t>
+              <a:t>6.9</a:t>
             </a:r>
             <a:endParaRPr lang="en-US" sz="850" dirty="0"/>
           </a:p>
@@ -7290,7 +7290,7 @@
                 <a:ea typeface="メイリオ" pitchFamily="34" charset="-122"/>
                 <a:cs typeface="メイリオ" pitchFamily="34" charset="-120"/>
               </a:rPr>
-              <a:t>7.7</a:t>
+              <a:t>6.9</a:t>
             </a:r>
             <a:endParaRPr lang="en-US" sz="850" dirty="0"/>
           </a:p>
@@ -7329,7 +7329,7 @@
                 <a:ea typeface="メイリオ" pitchFamily="34" charset="-122"/>
                 <a:cs typeface="メイリオ" pitchFamily="34" charset="-120"/>
               </a:rPr>
-              <a:t>92.5</a:t>
+              <a:t>82.5</a:t>
             </a:r>
             <a:endParaRPr lang="en-US" sz="900" dirty="0"/>
           </a:p>
@@ -7393,7 +7393,7 @@
                 <a:ea typeface="メイリオ" pitchFamily="34" charset="-122"/>
                 <a:cs typeface="メイリオ" pitchFamily="34" charset="-120"/>
               </a:rPr>
-              <a:t>＋M&amp;A仲介</a:t>
+              <a:t>＋クルーザー×ワイン事業</a:t>
             </a:r>
             <a:endParaRPr lang="en-US" sz="900" dirty="0"/>
           </a:p>
@@ -7627,7 +7627,7 @@
                 <a:ea typeface="メイリオ" pitchFamily="34" charset="-122"/>
                 <a:cs typeface="メイリオ" pitchFamily="34" charset="-120"/>
               </a:rPr>
-              <a:t>20.0</a:t>
+              <a:t>10.0</a:t>
             </a:r>
             <a:endParaRPr lang="en-US" sz="850" dirty="0"/>
           </a:p>
@@ -7861,7 +7861,7 @@
                 <a:ea typeface="メイリオ" pitchFamily="34" charset="-122"/>
                 <a:cs typeface="メイリオ" pitchFamily="34" charset="-120"/>
               </a:rPr>
-              <a:t>0.0</a:t>
+              <a:t>10.0</a:t>
             </a:r>
             <a:endParaRPr lang="en-US" sz="850" dirty="0"/>
           </a:p>
@@ -7915,577 +7915,6 @@
         <p:spPr>
           <a:xfrm>
             <a:off x="594360" y="3497580"/>
-            <a:ext cx="11658600" cy="333756"/>
-          </a:xfrm>
-          <a:prstGeom prst="rect">
-            <a:avLst/>
-          </a:prstGeom>
-          <a:solidFill>
-            <a:srgbClr val="FBFAF8"/>
-          </a:solidFill>
-          <a:ln w="6350">
-            <a:solidFill>
-              <a:srgbClr val="E2E0DC"/>
-            </a:solidFill>
-            <a:prstDash val="solid"/>
-          </a:ln>
-        </p:spPr>
-      </p:sp>
-      <p:sp>
-        <p:nvSpPr>
-          <p:cNvPr id="95" name="Text 93"/>
-          <p:cNvSpPr/>
-          <p:nvPr/>
-        </p:nvSpPr>
-        <p:spPr>
-          <a:xfrm>
-            <a:off x="704088" y="3497580"/>
-            <a:ext cx="2011680" cy="333756"/>
-          </a:xfrm>
-          <a:prstGeom prst="rect">
-            <a:avLst/>
-          </a:prstGeom>
-          <a:noFill/>
-          <a:ln/>
-        </p:spPr>
-        <p:txBody>
-          <a:bodyPr wrap="square" lIns="0" tIns="0" rIns="0" bIns="0" rtlCol="0" anchor="ctr"/>
-          <a:lstStyle/>
-          <a:p>
-            <a:pPr indent="0" marL="0">
-              <a:buNone/>
-            </a:pPr>
-            <a:r>
-              <a:rPr lang="en-US" sz="900" dirty="0">
-                <a:solidFill>
-                  <a:srgbClr val="1A1A1A"/>
-                </a:solidFill>
-                <a:latin typeface="メイリオ" pitchFamily="34" charset="0"/>
-                <a:ea typeface="メイリオ" pitchFamily="34" charset="-122"/>
-                <a:cs typeface="メイリオ" pitchFamily="34" charset="-120"/>
-              </a:rPr>
-              <a:t>＋クルーザー×ワイン事業</a:t>
-            </a:r>
-            <a:endParaRPr lang="en-US" sz="900" dirty="0"/>
-          </a:p>
-        </p:txBody>
-      </p:sp>
-      <p:sp>
-        <p:nvSpPr>
-          <p:cNvPr id="96" name="Text 94"/>
-          <p:cNvSpPr/>
-          <p:nvPr/>
-        </p:nvSpPr>
-        <p:spPr>
-          <a:xfrm>
-            <a:off x="2606040" y="3497580"/>
-            <a:ext cx="731520" cy="333756"/>
-          </a:xfrm>
-          <a:prstGeom prst="rect">
-            <a:avLst/>
-          </a:prstGeom>
-          <a:noFill/>
-          <a:ln/>
-        </p:spPr>
-        <p:txBody>
-          <a:bodyPr wrap="square" lIns="0" tIns="0" rIns="0" bIns="0" rtlCol="0" anchor="ctr"/>
-          <a:lstStyle/>
-          <a:p>
-            <a:pPr algn="ctr" indent="0" marL="0">
-              <a:buNone/>
-            </a:pPr>
-            <a:r>
-              <a:rPr lang="en-US" sz="850" dirty="0">
-                <a:solidFill>
-                  <a:srgbClr val="1A1A1A"/>
-                </a:solidFill>
-                <a:latin typeface="メイリオ" pitchFamily="34" charset="0"/>
-                <a:ea typeface="メイリオ" pitchFamily="34" charset="-122"/>
-                <a:cs typeface="メイリオ" pitchFamily="34" charset="-120"/>
-              </a:rPr>
-              <a:t>0.0</a:t>
-            </a:r>
-            <a:endParaRPr lang="en-US" sz="850" dirty="0"/>
-          </a:p>
-        </p:txBody>
-      </p:sp>
-      <p:sp>
-        <p:nvSpPr>
-          <p:cNvPr id="97" name="Text 95"/>
-          <p:cNvSpPr/>
-          <p:nvPr/>
-        </p:nvSpPr>
-        <p:spPr>
-          <a:xfrm>
-            <a:off x="3337560" y="3497580"/>
-            <a:ext cx="731520" cy="333756"/>
-          </a:xfrm>
-          <a:prstGeom prst="rect">
-            <a:avLst/>
-          </a:prstGeom>
-          <a:noFill/>
-          <a:ln/>
-        </p:spPr>
-        <p:txBody>
-          <a:bodyPr wrap="square" lIns="0" tIns="0" rIns="0" bIns="0" rtlCol="0" anchor="ctr"/>
-          <a:lstStyle/>
-          <a:p>
-            <a:pPr algn="ctr" indent="0" marL="0">
-              <a:buNone/>
-            </a:pPr>
-            <a:r>
-              <a:rPr lang="en-US" sz="850" dirty="0">
-                <a:solidFill>
-                  <a:srgbClr val="1A1A1A"/>
-                </a:solidFill>
-                <a:latin typeface="メイリオ" pitchFamily="34" charset="0"/>
-                <a:ea typeface="メイリオ" pitchFamily="34" charset="-122"/>
-                <a:cs typeface="メイリオ" pitchFamily="34" charset="-120"/>
-              </a:rPr>
-              <a:t>0.0</a:t>
-            </a:r>
-            <a:endParaRPr lang="en-US" sz="850" dirty="0"/>
-          </a:p>
-        </p:txBody>
-      </p:sp>
-      <p:sp>
-        <p:nvSpPr>
-          <p:cNvPr id="98" name="Text 96"/>
-          <p:cNvSpPr/>
-          <p:nvPr/>
-        </p:nvSpPr>
-        <p:spPr>
-          <a:xfrm>
-            <a:off x="4069080" y="3497580"/>
-            <a:ext cx="731520" cy="333756"/>
-          </a:xfrm>
-          <a:prstGeom prst="rect">
-            <a:avLst/>
-          </a:prstGeom>
-          <a:noFill/>
-          <a:ln/>
-        </p:spPr>
-        <p:txBody>
-          <a:bodyPr wrap="square" lIns="0" tIns="0" rIns="0" bIns="0" rtlCol="0" anchor="ctr"/>
-          <a:lstStyle/>
-          <a:p>
-            <a:pPr algn="ctr" indent="0" marL="0">
-              <a:buNone/>
-            </a:pPr>
-            <a:r>
-              <a:rPr lang="en-US" sz="850" dirty="0">
-                <a:solidFill>
-                  <a:srgbClr val="1A1A1A"/>
-                </a:solidFill>
-                <a:latin typeface="メイリオ" pitchFamily="34" charset="0"/>
-                <a:ea typeface="メイリオ" pitchFamily="34" charset="-122"/>
-                <a:cs typeface="メイリオ" pitchFamily="34" charset="-120"/>
-              </a:rPr>
-              <a:t>0.0</a:t>
-            </a:r>
-            <a:endParaRPr lang="en-US" sz="850" dirty="0"/>
-          </a:p>
-        </p:txBody>
-      </p:sp>
-      <p:sp>
-        <p:nvSpPr>
-          <p:cNvPr id="99" name="Text 97"/>
-          <p:cNvSpPr/>
-          <p:nvPr/>
-        </p:nvSpPr>
-        <p:spPr>
-          <a:xfrm>
-            <a:off x="4800600" y="3497580"/>
-            <a:ext cx="731520" cy="333756"/>
-          </a:xfrm>
-          <a:prstGeom prst="rect">
-            <a:avLst/>
-          </a:prstGeom>
-          <a:noFill/>
-          <a:ln/>
-        </p:spPr>
-        <p:txBody>
-          <a:bodyPr wrap="square" lIns="0" tIns="0" rIns="0" bIns="0" rtlCol="0" anchor="ctr"/>
-          <a:lstStyle/>
-          <a:p>
-            <a:pPr algn="ctr" indent="0" marL="0">
-              <a:buNone/>
-            </a:pPr>
-            <a:r>
-              <a:rPr lang="en-US" sz="850" dirty="0">
-                <a:solidFill>
-                  <a:srgbClr val="1A1A1A"/>
-                </a:solidFill>
-                <a:latin typeface="メイリオ" pitchFamily="34" charset="0"/>
-                <a:ea typeface="メイリオ" pitchFamily="34" charset="-122"/>
-                <a:cs typeface="メイリオ" pitchFamily="34" charset="-120"/>
-              </a:rPr>
-              <a:t>0.0</a:t>
-            </a:r>
-            <a:endParaRPr lang="en-US" sz="850" dirty="0"/>
-          </a:p>
-        </p:txBody>
-      </p:sp>
-      <p:sp>
-        <p:nvSpPr>
-          <p:cNvPr id="100" name="Text 98"/>
-          <p:cNvSpPr/>
-          <p:nvPr/>
-        </p:nvSpPr>
-        <p:spPr>
-          <a:xfrm>
-            <a:off x="5532120" y="3497580"/>
-            <a:ext cx="731520" cy="333756"/>
-          </a:xfrm>
-          <a:prstGeom prst="rect">
-            <a:avLst/>
-          </a:prstGeom>
-          <a:noFill/>
-          <a:ln/>
-        </p:spPr>
-        <p:txBody>
-          <a:bodyPr wrap="square" lIns="0" tIns="0" rIns="0" bIns="0" rtlCol="0" anchor="ctr"/>
-          <a:lstStyle/>
-          <a:p>
-            <a:pPr algn="ctr" indent="0" marL="0">
-              <a:buNone/>
-            </a:pPr>
-            <a:r>
-              <a:rPr lang="en-US" sz="850" dirty="0">
-                <a:solidFill>
-                  <a:srgbClr val="1A1A1A"/>
-                </a:solidFill>
-                <a:latin typeface="メイリオ" pitchFamily="34" charset="0"/>
-                <a:ea typeface="メイリオ" pitchFamily="34" charset="-122"/>
-                <a:cs typeface="メイリオ" pitchFamily="34" charset="-120"/>
-              </a:rPr>
-              <a:t>0.0</a:t>
-            </a:r>
-            <a:endParaRPr lang="en-US" sz="850" dirty="0"/>
-          </a:p>
-        </p:txBody>
-      </p:sp>
-      <p:sp>
-        <p:nvSpPr>
-          <p:cNvPr id="101" name="Text 99"/>
-          <p:cNvSpPr/>
-          <p:nvPr/>
-        </p:nvSpPr>
-        <p:spPr>
-          <a:xfrm>
-            <a:off x="6263640" y="3497580"/>
-            <a:ext cx="731520" cy="333756"/>
-          </a:xfrm>
-          <a:prstGeom prst="rect">
-            <a:avLst/>
-          </a:prstGeom>
-          <a:noFill/>
-          <a:ln/>
-        </p:spPr>
-        <p:txBody>
-          <a:bodyPr wrap="square" lIns="0" tIns="0" rIns="0" bIns="0" rtlCol="0" anchor="ctr"/>
-          <a:lstStyle/>
-          <a:p>
-            <a:pPr algn="ctr" indent="0" marL="0">
-              <a:buNone/>
-            </a:pPr>
-            <a:r>
-              <a:rPr lang="en-US" sz="850" dirty="0">
-                <a:solidFill>
-                  <a:srgbClr val="1A1A1A"/>
-                </a:solidFill>
-                <a:latin typeface="メイリオ" pitchFamily="34" charset="0"/>
-                <a:ea typeface="メイリオ" pitchFamily="34" charset="-122"/>
-                <a:cs typeface="メイリオ" pitchFamily="34" charset="-120"/>
-              </a:rPr>
-              <a:t>10.0</a:t>
-            </a:r>
-            <a:endParaRPr lang="en-US" sz="850" dirty="0"/>
-          </a:p>
-        </p:txBody>
-      </p:sp>
-      <p:sp>
-        <p:nvSpPr>
-          <p:cNvPr id="102" name="Text 100"/>
-          <p:cNvSpPr/>
-          <p:nvPr/>
-        </p:nvSpPr>
-        <p:spPr>
-          <a:xfrm>
-            <a:off x="6995160" y="3497580"/>
-            <a:ext cx="731520" cy="333756"/>
-          </a:xfrm>
-          <a:prstGeom prst="rect">
-            <a:avLst/>
-          </a:prstGeom>
-          <a:noFill/>
-          <a:ln/>
-        </p:spPr>
-        <p:txBody>
-          <a:bodyPr wrap="square" lIns="0" tIns="0" rIns="0" bIns="0" rtlCol="0" anchor="ctr"/>
-          <a:lstStyle/>
-          <a:p>
-            <a:pPr algn="ctr" indent="0" marL="0">
-              <a:buNone/>
-            </a:pPr>
-            <a:r>
-              <a:rPr lang="en-US" sz="850" dirty="0">
-                <a:solidFill>
-                  <a:srgbClr val="1A1A1A"/>
-                </a:solidFill>
-                <a:latin typeface="メイリオ" pitchFamily="34" charset="0"/>
-                <a:ea typeface="メイリオ" pitchFamily="34" charset="-122"/>
-                <a:cs typeface="メイリオ" pitchFamily="34" charset="-120"/>
-              </a:rPr>
-              <a:t>0.0</a:t>
-            </a:r>
-            <a:endParaRPr lang="en-US" sz="850" dirty="0"/>
-          </a:p>
-        </p:txBody>
-      </p:sp>
-      <p:sp>
-        <p:nvSpPr>
-          <p:cNvPr id="103" name="Text 101"/>
-          <p:cNvSpPr/>
-          <p:nvPr/>
-        </p:nvSpPr>
-        <p:spPr>
-          <a:xfrm>
-            <a:off x="7726680" y="3497580"/>
-            <a:ext cx="731520" cy="333756"/>
-          </a:xfrm>
-          <a:prstGeom prst="rect">
-            <a:avLst/>
-          </a:prstGeom>
-          <a:noFill/>
-          <a:ln/>
-        </p:spPr>
-        <p:txBody>
-          <a:bodyPr wrap="square" lIns="0" tIns="0" rIns="0" bIns="0" rtlCol="0" anchor="ctr"/>
-          <a:lstStyle/>
-          <a:p>
-            <a:pPr algn="ctr" indent="0" marL="0">
-              <a:buNone/>
-            </a:pPr>
-            <a:r>
-              <a:rPr lang="en-US" sz="850" dirty="0">
-                <a:solidFill>
-                  <a:srgbClr val="1A1A1A"/>
-                </a:solidFill>
-                <a:latin typeface="メイリオ" pitchFamily="34" charset="0"/>
-                <a:ea typeface="メイリオ" pitchFamily="34" charset="-122"/>
-                <a:cs typeface="メイリオ" pitchFamily="34" charset="-120"/>
-              </a:rPr>
-              <a:t>0.0</a:t>
-            </a:r>
-            <a:endParaRPr lang="en-US" sz="850" dirty="0"/>
-          </a:p>
-        </p:txBody>
-      </p:sp>
-      <p:sp>
-        <p:nvSpPr>
-          <p:cNvPr id="104" name="Text 102"/>
-          <p:cNvSpPr/>
-          <p:nvPr/>
-        </p:nvSpPr>
-        <p:spPr>
-          <a:xfrm>
-            <a:off x="8458200" y="3497580"/>
-            <a:ext cx="731520" cy="333756"/>
-          </a:xfrm>
-          <a:prstGeom prst="rect">
-            <a:avLst/>
-          </a:prstGeom>
-          <a:noFill/>
-          <a:ln/>
-        </p:spPr>
-        <p:txBody>
-          <a:bodyPr wrap="square" lIns="0" tIns="0" rIns="0" bIns="0" rtlCol="0" anchor="ctr"/>
-          <a:lstStyle/>
-          <a:p>
-            <a:pPr algn="ctr" indent="0" marL="0">
-              <a:buNone/>
-            </a:pPr>
-            <a:r>
-              <a:rPr lang="en-US" sz="850" dirty="0">
-                <a:solidFill>
-                  <a:srgbClr val="1A1A1A"/>
-                </a:solidFill>
-                <a:latin typeface="メイリオ" pitchFamily="34" charset="0"/>
-                <a:ea typeface="メイリオ" pitchFamily="34" charset="-122"/>
-                <a:cs typeface="メイリオ" pitchFamily="34" charset="-120"/>
-              </a:rPr>
-              <a:t>0.0</a:t>
-            </a:r>
-            <a:endParaRPr lang="en-US" sz="850" dirty="0"/>
-          </a:p>
-        </p:txBody>
-      </p:sp>
-      <p:sp>
-        <p:nvSpPr>
-          <p:cNvPr id="105" name="Text 103"/>
-          <p:cNvSpPr/>
-          <p:nvPr/>
-        </p:nvSpPr>
-        <p:spPr>
-          <a:xfrm>
-            <a:off x="9189720" y="3497580"/>
-            <a:ext cx="731520" cy="333756"/>
-          </a:xfrm>
-          <a:prstGeom prst="rect">
-            <a:avLst/>
-          </a:prstGeom>
-          <a:noFill/>
-          <a:ln/>
-        </p:spPr>
-        <p:txBody>
-          <a:bodyPr wrap="square" lIns="0" tIns="0" rIns="0" bIns="0" rtlCol="0" anchor="ctr"/>
-          <a:lstStyle/>
-          <a:p>
-            <a:pPr algn="ctr" indent="0" marL="0">
-              <a:buNone/>
-            </a:pPr>
-            <a:r>
-              <a:rPr lang="en-US" sz="850" dirty="0">
-                <a:solidFill>
-                  <a:srgbClr val="1A1A1A"/>
-                </a:solidFill>
-                <a:latin typeface="メイリオ" pitchFamily="34" charset="0"/>
-                <a:ea typeface="メイリオ" pitchFamily="34" charset="-122"/>
-                <a:cs typeface="メイリオ" pitchFamily="34" charset="-120"/>
-              </a:rPr>
-              <a:t>0.0</a:t>
-            </a:r>
-            <a:endParaRPr lang="en-US" sz="850" dirty="0"/>
-          </a:p>
-        </p:txBody>
-      </p:sp>
-      <p:sp>
-        <p:nvSpPr>
-          <p:cNvPr id="106" name="Text 104"/>
-          <p:cNvSpPr/>
-          <p:nvPr/>
-        </p:nvSpPr>
-        <p:spPr>
-          <a:xfrm>
-            <a:off x="9921240" y="3497580"/>
-            <a:ext cx="731520" cy="333756"/>
-          </a:xfrm>
-          <a:prstGeom prst="rect">
-            <a:avLst/>
-          </a:prstGeom>
-          <a:noFill/>
-          <a:ln/>
-        </p:spPr>
-        <p:txBody>
-          <a:bodyPr wrap="square" lIns="0" tIns="0" rIns="0" bIns="0" rtlCol="0" anchor="ctr"/>
-          <a:lstStyle/>
-          <a:p>
-            <a:pPr algn="ctr" indent="0" marL="0">
-              <a:buNone/>
-            </a:pPr>
-            <a:r>
-              <a:rPr lang="en-US" sz="850" dirty="0">
-                <a:solidFill>
-                  <a:srgbClr val="1A1A1A"/>
-                </a:solidFill>
-                <a:latin typeface="メイリオ" pitchFamily="34" charset="0"/>
-                <a:ea typeface="メイリオ" pitchFamily="34" charset="-122"/>
-                <a:cs typeface="メイリオ" pitchFamily="34" charset="-120"/>
-              </a:rPr>
-              <a:t>0.0</a:t>
-            </a:r>
-            <a:endParaRPr lang="en-US" sz="850" dirty="0"/>
-          </a:p>
-        </p:txBody>
-      </p:sp>
-      <p:sp>
-        <p:nvSpPr>
-          <p:cNvPr id="107" name="Text 105"/>
-          <p:cNvSpPr/>
-          <p:nvPr/>
-        </p:nvSpPr>
-        <p:spPr>
-          <a:xfrm>
-            <a:off x="10652760" y="3497580"/>
-            <a:ext cx="731520" cy="333756"/>
-          </a:xfrm>
-          <a:prstGeom prst="rect">
-            <a:avLst/>
-          </a:prstGeom>
-          <a:noFill/>
-          <a:ln/>
-        </p:spPr>
-        <p:txBody>
-          <a:bodyPr wrap="square" lIns="0" tIns="0" rIns="0" bIns="0" rtlCol="0" anchor="ctr"/>
-          <a:lstStyle/>
-          <a:p>
-            <a:pPr algn="ctr" indent="0" marL="0">
-              <a:buNone/>
-            </a:pPr>
-            <a:r>
-              <a:rPr lang="en-US" sz="850" dirty="0">
-                <a:solidFill>
-                  <a:srgbClr val="1A1A1A"/>
-                </a:solidFill>
-                <a:latin typeface="メイリオ" pitchFamily="34" charset="0"/>
-                <a:ea typeface="メイリオ" pitchFamily="34" charset="-122"/>
-                <a:cs typeface="メイリオ" pitchFamily="34" charset="-120"/>
-              </a:rPr>
-              <a:t>10.0</a:t>
-            </a:r>
-            <a:endParaRPr lang="en-US" sz="850" dirty="0"/>
-          </a:p>
-        </p:txBody>
-      </p:sp>
-      <p:sp>
-        <p:nvSpPr>
-          <p:cNvPr id="108" name="Text 106"/>
-          <p:cNvSpPr/>
-          <p:nvPr/>
-        </p:nvSpPr>
-        <p:spPr>
-          <a:xfrm>
-            <a:off x="11384280" y="3497580"/>
-            <a:ext cx="868680" cy="333756"/>
-          </a:xfrm>
-          <a:prstGeom prst="rect">
-            <a:avLst/>
-          </a:prstGeom>
-          <a:noFill/>
-          <a:ln/>
-        </p:spPr>
-        <p:txBody>
-          <a:bodyPr wrap="square" lIns="0" tIns="0" rIns="0" bIns="0" rtlCol="0" anchor="ctr"/>
-          <a:lstStyle/>
-          <a:p>
-            <a:pPr algn="ctr" indent="0" marL="0">
-              <a:buNone/>
-            </a:pPr>
-            <a:r>
-              <a:rPr lang="en-US" sz="900" b="1" dirty="0">
-                <a:solidFill>
-                  <a:srgbClr val="1A1A1A"/>
-                </a:solidFill>
-                <a:latin typeface="メイリオ" pitchFamily="34" charset="0"/>
-                <a:ea typeface="メイリオ" pitchFamily="34" charset="-122"/>
-                <a:cs typeface="メイリオ" pitchFamily="34" charset="-120"/>
-              </a:rPr>
-              <a:t>20.0</a:t>
-            </a:r>
-            <a:endParaRPr lang="en-US" sz="900" dirty="0"/>
-          </a:p>
-        </p:txBody>
-      </p:sp>
-      <p:sp>
-        <p:nvSpPr>
-          <p:cNvPr id="109" name="Shape 107"/>
-          <p:cNvSpPr/>
-          <p:nvPr/>
-        </p:nvSpPr>
-        <p:spPr>
-          <a:xfrm>
-            <a:off x="594360" y="3831336"/>
             <a:ext cx="11658600" cy="333756"/>
           </a:xfrm>
           <a:prstGeom prst="rect">
@@ -8504,13 +7933,13 @@
       </p:sp>
       <p:sp>
         <p:nvSpPr>
-          <p:cNvPr id="110" name="Text 108"/>
-          <p:cNvSpPr/>
-          <p:nvPr/>
-        </p:nvSpPr>
-        <p:spPr>
-          <a:xfrm>
-            <a:off x="704088" y="3831336"/>
+          <p:cNvPr id="95" name="Text 93"/>
+          <p:cNvSpPr/>
+          <p:nvPr/>
+        </p:nvSpPr>
+        <p:spPr>
+          <a:xfrm>
+            <a:off x="704088" y="3497580"/>
             <a:ext cx="2011680" cy="333756"/>
           </a:xfrm>
           <a:prstGeom prst="rect">
@@ -8543,13 +7972,13 @@
       </p:sp>
       <p:sp>
         <p:nvSpPr>
-          <p:cNvPr id="111" name="Text 109"/>
-          <p:cNvSpPr/>
-          <p:nvPr/>
-        </p:nvSpPr>
-        <p:spPr>
-          <a:xfrm>
-            <a:off x="2606040" y="3831336"/>
+          <p:cNvPr id="96" name="Text 94"/>
+          <p:cNvSpPr/>
+          <p:nvPr/>
+        </p:nvSpPr>
+        <p:spPr>
+          <a:xfrm>
+            <a:off x="2606040" y="3497580"/>
             <a:ext cx="731520" cy="333756"/>
           </a:xfrm>
           <a:prstGeom prst="rect">
@@ -8574,7 +8003,7 @@
                 <a:ea typeface="メイリオ" pitchFamily="34" charset="-122"/>
                 <a:cs typeface="メイリオ" pitchFamily="34" charset="-120"/>
               </a:rPr>
-              <a:t>33.0</a:t>
+              <a:t>32.1</a:t>
             </a:r>
             <a:endParaRPr lang="en-US" sz="850" dirty="0"/>
           </a:p>
@@ -8582,13 +8011,13 @@
       </p:sp>
       <p:sp>
         <p:nvSpPr>
-          <p:cNvPr id="112" name="Text 110"/>
-          <p:cNvSpPr/>
-          <p:nvPr/>
-        </p:nvSpPr>
-        <p:spPr>
-          <a:xfrm>
-            <a:off x="3337560" y="3831336"/>
+          <p:cNvPr id="97" name="Text 95"/>
+          <p:cNvSpPr/>
+          <p:nvPr/>
+        </p:nvSpPr>
+        <p:spPr>
+          <a:xfrm>
+            <a:off x="3337560" y="3497580"/>
             <a:ext cx="731520" cy="333756"/>
           </a:xfrm>
           <a:prstGeom prst="rect">
@@ -8613,7 +8042,7 @@
                 <a:ea typeface="メイリオ" pitchFamily="34" charset="-122"/>
                 <a:cs typeface="メイリオ" pitchFamily="34" charset="-120"/>
               </a:rPr>
-              <a:t>33.0</a:t>
+              <a:t>32.1</a:t>
             </a:r>
             <a:endParaRPr lang="en-US" sz="850" dirty="0"/>
           </a:p>
@@ -8621,13 +8050,13 @@
       </p:sp>
       <p:sp>
         <p:nvSpPr>
-          <p:cNvPr id="113" name="Text 111"/>
-          <p:cNvSpPr/>
-          <p:nvPr/>
-        </p:nvSpPr>
-        <p:spPr>
-          <a:xfrm>
-            <a:off x="4069080" y="3831336"/>
+          <p:cNvPr id="98" name="Text 96"/>
+          <p:cNvSpPr/>
+          <p:nvPr/>
+        </p:nvSpPr>
+        <p:spPr>
+          <a:xfrm>
+            <a:off x="4069080" y="3497580"/>
             <a:ext cx="731520" cy="333756"/>
           </a:xfrm>
           <a:prstGeom prst="rect">
@@ -8652,7 +8081,7 @@
                 <a:ea typeface="メイリオ" pitchFamily="34" charset="-122"/>
                 <a:cs typeface="メイリオ" pitchFamily="34" charset="-120"/>
               </a:rPr>
-              <a:t>33.0</a:t>
+              <a:t>32.1</a:t>
             </a:r>
             <a:endParaRPr lang="en-US" sz="850" dirty="0"/>
           </a:p>
@@ -8660,13 +8089,13 @@
       </p:sp>
       <p:sp>
         <p:nvSpPr>
-          <p:cNvPr id="114" name="Text 112"/>
-          <p:cNvSpPr/>
-          <p:nvPr/>
-        </p:nvSpPr>
-        <p:spPr>
-          <a:xfrm>
-            <a:off x="4800600" y="3831336"/>
+          <p:cNvPr id="99" name="Text 97"/>
+          <p:cNvSpPr/>
+          <p:nvPr/>
+        </p:nvSpPr>
+        <p:spPr>
+          <a:xfrm>
+            <a:off x="4800600" y="3497580"/>
             <a:ext cx="731520" cy="333756"/>
           </a:xfrm>
           <a:prstGeom prst="rect">
@@ -8691,7 +8120,7 @@
                 <a:ea typeface="メイリオ" pitchFamily="34" charset="-122"/>
                 <a:cs typeface="メイリオ" pitchFamily="34" charset="-120"/>
               </a:rPr>
-              <a:t>33.0</a:t>
+              <a:t>32.1</a:t>
             </a:r>
             <a:endParaRPr lang="en-US" sz="850" dirty="0"/>
           </a:p>
@@ -8699,13 +8128,13 @@
       </p:sp>
       <p:sp>
         <p:nvSpPr>
-          <p:cNvPr id="115" name="Text 113"/>
-          <p:cNvSpPr/>
-          <p:nvPr/>
-        </p:nvSpPr>
-        <p:spPr>
-          <a:xfrm>
-            <a:off x="5532120" y="3831336"/>
+          <p:cNvPr id="100" name="Text 98"/>
+          <p:cNvSpPr/>
+          <p:nvPr/>
+        </p:nvSpPr>
+        <p:spPr>
+          <a:xfrm>
+            <a:off x="5532120" y="3497580"/>
             <a:ext cx="731520" cy="333756"/>
           </a:xfrm>
           <a:prstGeom prst="rect">
@@ -8730,7 +8159,7 @@
                 <a:ea typeface="メイリオ" pitchFamily="34" charset="-122"/>
                 <a:cs typeface="メイリオ" pitchFamily="34" charset="-120"/>
               </a:rPr>
-              <a:t>33.0</a:t>
+              <a:t>32.1</a:t>
             </a:r>
             <a:endParaRPr lang="en-US" sz="850" dirty="0"/>
           </a:p>
@@ -8738,13 +8167,13 @@
       </p:sp>
       <p:sp>
         <p:nvSpPr>
-          <p:cNvPr id="116" name="Text 114"/>
-          <p:cNvSpPr/>
-          <p:nvPr/>
-        </p:nvSpPr>
-        <p:spPr>
-          <a:xfrm>
-            <a:off x="6263640" y="3831336"/>
+          <p:cNvPr id="101" name="Text 99"/>
+          <p:cNvSpPr/>
+          <p:nvPr/>
+        </p:nvSpPr>
+        <p:spPr>
+          <a:xfrm>
+            <a:off x="6263640" y="3497580"/>
             <a:ext cx="731520" cy="333756"/>
           </a:xfrm>
           <a:prstGeom prst="rect">
@@ -8769,7 +8198,7 @@
                 <a:ea typeface="メイリオ" pitchFamily="34" charset="-122"/>
                 <a:cs typeface="メイリオ" pitchFamily="34" charset="-120"/>
               </a:rPr>
-              <a:t>63.0</a:t>
+              <a:t>42.1</a:t>
             </a:r>
             <a:endParaRPr lang="en-US" sz="850" dirty="0"/>
           </a:p>
@@ -8777,13 +8206,13 @@
       </p:sp>
       <p:sp>
         <p:nvSpPr>
-          <p:cNvPr id="117" name="Text 115"/>
-          <p:cNvSpPr/>
-          <p:nvPr/>
-        </p:nvSpPr>
-        <p:spPr>
-          <a:xfrm>
-            <a:off x="6995160" y="3831336"/>
+          <p:cNvPr id="102" name="Text 100"/>
+          <p:cNvSpPr/>
+          <p:nvPr/>
+        </p:nvSpPr>
+        <p:spPr>
+          <a:xfrm>
+            <a:off x="6995160" y="3497580"/>
             <a:ext cx="731520" cy="333756"/>
           </a:xfrm>
           <a:prstGeom prst="rect">
@@ -8808,7 +8237,7 @@
                 <a:ea typeface="メイリオ" pitchFamily="34" charset="-122"/>
                 <a:cs typeface="メイリオ" pitchFamily="34" charset="-120"/>
               </a:rPr>
-              <a:t>33.0</a:t>
+              <a:t>32.1</a:t>
             </a:r>
             <a:endParaRPr lang="en-US" sz="850" dirty="0"/>
           </a:p>
@@ -8816,13 +8245,13 @@
       </p:sp>
       <p:sp>
         <p:nvSpPr>
-          <p:cNvPr id="118" name="Text 116"/>
-          <p:cNvSpPr/>
-          <p:nvPr/>
-        </p:nvSpPr>
-        <p:spPr>
-          <a:xfrm>
-            <a:off x="7726680" y="3831336"/>
+          <p:cNvPr id="103" name="Text 101"/>
+          <p:cNvSpPr/>
+          <p:nvPr/>
+        </p:nvSpPr>
+        <p:spPr>
+          <a:xfrm>
+            <a:off x="7726680" y="3497580"/>
             <a:ext cx="731520" cy="333756"/>
           </a:xfrm>
           <a:prstGeom prst="rect">
@@ -8847,7 +8276,7 @@
                 <a:ea typeface="メイリオ" pitchFamily="34" charset="-122"/>
                 <a:cs typeface="メイリオ" pitchFamily="34" charset="-120"/>
               </a:rPr>
-              <a:t>33.0</a:t>
+              <a:t>32.1</a:t>
             </a:r>
             <a:endParaRPr lang="en-US" sz="850" dirty="0"/>
           </a:p>
@@ -8855,13 +8284,13 @@
       </p:sp>
       <p:sp>
         <p:nvSpPr>
-          <p:cNvPr id="119" name="Text 117"/>
-          <p:cNvSpPr/>
-          <p:nvPr/>
-        </p:nvSpPr>
-        <p:spPr>
-          <a:xfrm>
-            <a:off x="8458200" y="3831336"/>
+          <p:cNvPr id="104" name="Text 102"/>
+          <p:cNvSpPr/>
+          <p:nvPr/>
+        </p:nvSpPr>
+        <p:spPr>
+          <a:xfrm>
+            <a:off x="8458200" y="3497580"/>
             <a:ext cx="731520" cy="333756"/>
           </a:xfrm>
           <a:prstGeom prst="rect">
@@ -8886,7 +8315,7 @@
                 <a:ea typeface="メイリオ" pitchFamily="34" charset="-122"/>
                 <a:cs typeface="メイリオ" pitchFamily="34" charset="-120"/>
               </a:rPr>
-              <a:t>33.0</a:t>
+              <a:t>32.1</a:t>
             </a:r>
             <a:endParaRPr lang="en-US" sz="850" dirty="0"/>
           </a:p>
@@ -8894,13 +8323,13 @@
       </p:sp>
       <p:sp>
         <p:nvSpPr>
-          <p:cNvPr id="120" name="Text 118"/>
-          <p:cNvSpPr/>
-          <p:nvPr/>
-        </p:nvSpPr>
-        <p:spPr>
-          <a:xfrm>
-            <a:off x="9189720" y="3831336"/>
+          <p:cNvPr id="105" name="Text 103"/>
+          <p:cNvSpPr/>
+          <p:nvPr/>
+        </p:nvSpPr>
+        <p:spPr>
+          <a:xfrm>
+            <a:off x="9189720" y="3497580"/>
             <a:ext cx="731520" cy="333756"/>
           </a:xfrm>
           <a:prstGeom prst="rect">
@@ -8925,7 +8354,7 @@
                 <a:ea typeface="メイリオ" pitchFamily="34" charset="-122"/>
                 <a:cs typeface="メイリオ" pitchFamily="34" charset="-120"/>
               </a:rPr>
-              <a:t>33.0</a:t>
+              <a:t>32.1</a:t>
             </a:r>
             <a:endParaRPr lang="en-US" sz="850" dirty="0"/>
           </a:p>
@@ -8933,13 +8362,13 @@
       </p:sp>
       <p:sp>
         <p:nvSpPr>
-          <p:cNvPr id="121" name="Text 119"/>
-          <p:cNvSpPr/>
-          <p:nvPr/>
-        </p:nvSpPr>
-        <p:spPr>
-          <a:xfrm>
-            <a:off x="9921240" y="3831336"/>
+          <p:cNvPr id="106" name="Text 104"/>
+          <p:cNvSpPr/>
+          <p:nvPr/>
+        </p:nvSpPr>
+        <p:spPr>
+          <a:xfrm>
+            <a:off x="9921240" y="3497580"/>
             <a:ext cx="731520" cy="333756"/>
           </a:xfrm>
           <a:prstGeom prst="rect">
@@ -8964,7 +8393,7 @@
                 <a:ea typeface="メイリオ" pitchFamily="34" charset="-122"/>
                 <a:cs typeface="メイリオ" pitchFamily="34" charset="-120"/>
               </a:rPr>
-              <a:t>33.0</a:t>
+              <a:t>32.1</a:t>
             </a:r>
             <a:endParaRPr lang="en-US" sz="850" dirty="0"/>
           </a:p>
@@ -8972,13 +8401,13 @@
       </p:sp>
       <p:sp>
         <p:nvSpPr>
-          <p:cNvPr id="122" name="Text 120"/>
-          <p:cNvSpPr/>
-          <p:nvPr/>
-        </p:nvSpPr>
-        <p:spPr>
-          <a:xfrm>
-            <a:off x="10652760" y="3831336"/>
+          <p:cNvPr id="107" name="Text 105"/>
+          <p:cNvSpPr/>
+          <p:nvPr/>
+        </p:nvSpPr>
+        <p:spPr>
+          <a:xfrm>
+            <a:off x="10652760" y="3497580"/>
             <a:ext cx="731520" cy="333756"/>
           </a:xfrm>
           <a:prstGeom prst="rect">
@@ -9003,7 +8432,7 @@
                 <a:ea typeface="メイリオ" pitchFamily="34" charset="-122"/>
                 <a:cs typeface="メイリオ" pitchFamily="34" charset="-120"/>
               </a:rPr>
-              <a:t>43.0</a:t>
+              <a:t>42.1</a:t>
             </a:r>
             <a:endParaRPr lang="en-US" sz="850" dirty="0"/>
           </a:p>
@@ -9011,13 +8440,13 @@
       </p:sp>
       <p:sp>
         <p:nvSpPr>
-          <p:cNvPr id="123" name="Text 121"/>
-          <p:cNvSpPr/>
-          <p:nvPr/>
-        </p:nvSpPr>
-        <p:spPr>
-          <a:xfrm>
-            <a:off x="11384280" y="3831336"/>
+          <p:cNvPr id="108" name="Text 106"/>
+          <p:cNvSpPr/>
+          <p:nvPr/>
+        </p:nvSpPr>
+        <p:spPr>
+          <a:xfrm>
+            <a:off x="11384280" y="3497580"/>
             <a:ext cx="868680" cy="333756"/>
           </a:xfrm>
           <a:prstGeom prst="rect">
@@ -9042,7 +8471,7 @@
                 <a:ea typeface="メイリオ" pitchFamily="34" charset="-122"/>
                 <a:cs typeface="メイリオ" pitchFamily="34" charset="-120"/>
               </a:rPr>
-              <a:t>435.5</a:t>
+              <a:t>405.5</a:t>
             </a:r>
             <a:endParaRPr lang="en-US" sz="900" dirty="0"/>
           </a:p>
@@ -9050,20 +8479,20 @@
       </p:sp>
       <p:sp>
         <p:nvSpPr>
-          <p:cNvPr id="124" name="Shape 122"/>
-          <p:cNvSpPr/>
-          <p:nvPr/>
-        </p:nvSpPr>
-        <p:spPr>
-          <a:xfrm>
-            <a:off x="594360" y="4165092"/>
+          <p:cNvPr id="109" name="Shape 107"/>
+          <p:cNvSpPr/>
+          <p:nvPr/>
+        </p:nvSpPr>
+        <p:spPr>
+          <a:xfrm>
+            <a:off x="594360" y="3831336"/>
             <a:ext cx="11658600" cy="333756"/>
           </a:xfrm>
           <a:prstGeom prst="rect">
             <a:avLst/>
           </a:prstGeom>
           <a:solidFill>
-            <a:srgbClr val="FBFAF8"/>
+            <a:srgbClr val="FFFFFF"/>
           </a:solidFill>
           <a:ln w="6350">
             <a:solidFill>
@@ -9075,13 +8504,13 @@
       </p:sp>
       <p:sp>
         <p:nvSpPr>
-          <p:cNvPr id="125" name="Text 123"/>
-          <p:cNvSpPr/>
-          <p:nvPr/>
-        </p:nvSpPr>
-        <p:spPr>
-          <a:xfrm>
-            <a:off x="704088" y="4165092"/>
+          <p:cNvPr id="110" name="Text 108"/>
+          <p:cNvSpPr/>
+          <p:nvPr/>
+        </p:nvSpPr>
+        <p:spPr>
+          <a:xfrm>
+            <a:off x="704088" y="3831336"/>
             <a:ext cx="2011680" cy="333756"/>
           </a:xfrm>
           <a:prstGeom prst="rect">
@@ -9114,13 +8543,13 @@
       </p:sp>
       <p:sp>
         <p:nvSpPr>
-          <p:cNvPr id="126" name="Text 124"/>
-          <p:cNvSpPr/>
-          <p:nvPr/>
-        </p:nvSpPr>
-        <p:spPr>
-          <a:xfrm>
-            <a:off x="2606040" y="4165092"/>
+          <p:cNvPr id="111" name="Text 109"/>
+          <p:cNvSpPr/>
+          <p:nvPr/>
+        </p:nvSpPr>
+        <p:spPr>
+          <a:xfrm>
+            <a:off x="2606040" y="3831336"/>
             <a:ext cx="731520" cy="333756"/>
           </a:xfrm>
           <a:prstGeom prst="rect">
@@ -9153,13 +8582,13 @@
       </p:sp>
       <p:sp>
         <p:nvSpPr>
-          <p:cNvPr id="127" name="Text 125"/>
-          <p:cNvSpPr/>
-          <p:nvPr/>
-        </p:nvSpPr>
-        <p:spPr>
-          <a:xfrm>
-            <a:off x="3337560" y="4165092"/>
+          <p:cNvPr id="112" name="Text 110"/>
+          <p:cNvSpPr/>
+          <p:nvPr/>
+        </p:nvSpPr>
+        <p:spPr>
+          <a:xfrm>
+            <a:off x="3337560" y="3831336"/>
             <a:ext cx="731520" cy="333756"/>
           </a:xfrm>
           <a:prstGeom prst="rect">
@@ -9192,13 +8621,13 @@
       </p:sp>
       <p:sp>
         <p:nvSpPr>
-          <p:cNvPr id="128" name="Text 126"/>
-          <p:cNvSpPr/>
-          <p:nvPr/>
-        </p:nvSpPr>
-        <p:spPr>
-          <a:xfrm>
-            <a:off x="4069080" y="4165092"/>
+          <p:cNvPr id="113" name="Text 111"/>
+          <p:cNvSpPr/>
+          <p:nvPr/>
+        </p:nvSpPr>
+        <p:spPr>
+          <a:xfrm>
+            <a:off x="4069080" y="3831336"/>
             <a:ext cx="731520" cy="333756"/>
           </a:xfrm>
           <a:prstGeom prst="rect">
@@ -9231,13 +8660,13 @@
       </p:sp>
       <p:sp>
         <p:nvSpPr>
-          <p:cNvPr id="129" name="Text 127"/>
-          <p:cNvSpPr/>
-          <p:nvPr/>
-        </p:nvSpPr>
-        <p:spPr>
-          <a:xfrm>
-            <a:off x="4800600" y="4165092"/>
+          <p:cNvPr id="114" name="Text 112"/>
+          <p:cNvSpPr/>
+          <p:nvPr/>
+        </p:nvSpPr>
+        <p:spPr>
+          <a:xfrm>
+            <a:off x="4800600" y="3831336"/>
             <a:ext cx="731520" cy="333756"/>
           </a:xfrm>
           <a:prstGeom prst="rect">
@@ -9270,13 +8699,13 @@
       </p:sp>
       <p:sp>
         <p:nvSpPr>
-          <p:cNvPr id="130" name="Text 128"/>
-          <p:cNvSpPr/>
-          <p:nvPr/>
-        </p:nvSpPr>
-        <p:spPr>
-          <a:xfrm>
-            <a:off x="5532120" y="4165092"/>
+          <p:cNvPr id="115" name="Text 113"/>
+          <p:cNvSpPr/>
+          <p:nvPr/>
+        </p:nvSpPr>
+        <p:spPr>
+          <a:xfrm>
+            <a:off x="5532120" y="3831336"/>
             <a:ext cx="731520" cy="333756"/>
           </a:xfrm>
           <a:prstGeom prst="rect">
@@ -9309,13 +8738,13 @@
       </p:sp>
       <p:sp>
         <p:nvSpPr>
-          <p:cNvPr id="131" name="Text 129"/>
-          <p:cNvSpPr/>
-          <p:nvPr/>
-        </p:nvSpPr>
-        <p:spPr>
-          <a:xfrm>
-            <a:off x="6263640" y="4165092"/>
+          <p:cNvPr id="116" name="Text 114"/>
+          <p:cNvSpPr/>
+          <p:nvPr/>
+        </p:nvSpPr>
+        <p:spPr>
+          <a:xfrm>
+            <a:off x="6263640" y="3831336"/>
             <a:ext cx="731520" cy="333756"/>
           </a:xfrm>
           <a:prstGeom prst="rect">
@@ -9348,13 +8777,13 @@
       </p:sp>
       <p:sp>
         <p:nvSpPr>
-          <p:cNvPr id="132" name="Text 130"/>
-          <p:cNvSpPr/>
-          <p:nvPr/>
-        </p:nvSpPr>
-        <p:spPr>
-          <a:xfrm>
-            <a:off x="6995160" y="4165092"/>
+          <p:cNvPr id="117" name="Text 115"/>
+          <p:cNvSpPr/>
+          <p:nvPr/>
+        </p:nvSpPr>
+        <p:spPr>
+          <a:xfrm>
+            <a:off x="6995160" y="3831336"/>
             <a:ext cx="731520" cy="333756"/>
           </a:xfrm>
           <a:prstGeom prst="rect">
@@ -9387,13 +8816,13 @@
       </p:sp>
       <p:sp>
         <p:nvSpPr>
-          <p:cNvPr id="133" name="Text 131"/>
-          <p:cNvSpPr/>
-          <p:nvPr/>
-        </p:nvSpPr>
-        <p:spPr>
-          <a:xfrm>
-            <a:off x="7726680" y="4165092"/>
+          <p:cNvPr id="118" name="Text 116"/>
+          <p:cNvSpPr/>
+          <p:nvPr/>
+        </p:nvSpPr>
+        <p:spPr>
+          <a:xfrm>
+            <a:off x="7726680" y="3831336"/>
             <a:ext cx="731520" cy="333756"/>
           </a:xfrm>
           <a:prstGeom prst="rect">
@@ -9426,13 +8855,13 @@
       </p:sp>
       <p:sp>
         <p:nvSpPr>
-          <p:cNvPr id="134" name="Text 132"/>
-          <p:cNvSpPr/>
-          <p:nvPr/>
-        </p:nvSpPr>
-        <p:spPr>
-          <a:xfrm>
-            <a:off x="8458200" y="4165092"/>
+          <p:cNvPr id="119" name="Text 117"/>
+          <p:cNvSpPr/>
+          <p:nvPr/>
+        </p:nvSpPr>
+        <p:spPr>
+          <a:xfrm>
+            <a:off x="8458200" y="3831336"/>
             <a:ext cx="731520" cy="333756"/>
           </a:xfrm>
           <a:prstGeom prst="rect">
@@ -9465,13 +8894,13 @@
       </p:sp>
       <p:sp>
         <p:nvSpPr>
-          <p:cNvPr id="135" name="Text 133"/>
-          <p:cNvSpPr/>
-          <p:nvPr/>
-        </p:nvSpPr>
-        <p:spPr>
-          <a:xfrm>
-            <a:off x="9189720" y="4165092"/>
+          <p:cNvPr id="120" name="Text 118"/>
+          <p:cNvSpPr/>
+          <p:nvPr/>
+        </p:nvSpPr>
+        <p:spPr>
+          <a:xfrm>
+            <a:off x="9189720" y="3831336"/>
             <a:ext cx="731520" cy="333756"/>
           </a:xfrm>
           <a:prstGeom prst="rect">
@@ -9504,13 +8933,13 @@
       </p:sp>
       <p:sp>
         <p:nvSpPr>
-          <p:cNvPr id="136" name="Text 134"/>
-          <p:cNvSpPr/>
-          <p:nvPr/>
-        </p:nvSpPr>
-        <p:spPr>
-          <a:xfrm>
-            <a:off x="9921240" y="4165092"/>
+          <p:cNvPr id="121" name="Text 119"/>
+          <p:cNvSpPr/>
+          <p:nvPr/>
+        </p:nvSpPr>
+        <p:spPr>
+          <a:xfrm>
+            <a:off x="9921240" y="3831336"/>
             <a:ext cx="731520" cy="333756"/>
           </a:xfrm>
           <a:prstGeom prst="rect">
@@ -9543,13 +8972,13 @@
       </p:sp>
       <p:sp>
         <p:nvSpPr>
-          <p:cNvPr id="137" name="Text 135"/>
-          <p:cNvSpPr/>
-          <p:nvPr/>
-        </p:nvSpPr>
-        <p:spPr>
-          <a:xfrm>
-            <a:off x="10652760" y="4165092"/>
+          <p:cNvPr id="122" name="Text 120"/>
+          <p:cNvSpPr/>
+          <p:nvPr/>
+        </p:nvSpPr>
+        <p:spPr>
+          <a:xfrm>
+            <a:off x="10652760" y="3831336"/>
             <a:ext cx="731520" cy="333756"/>
           </a:xfrm>
           <a:prstGeom prst="rect">
@@ -9582,13 +9011,13 @@
       </p:sp>
       <p:sp>
         <p:nvSpPr>
-          <p:cNvPr id="138" name="Text 136"/>
-          <p:cNvSpPr/>
-          <p:nvPr/>
-        </p:nvSpPr>
-        <p:spPr>
-          <a:xfrm>
-            <a:off x="11384280" y="4165092"/>
+          <p:cNvPr id="123" name="Text 121"/>
+          <p:cNvSpPr/>
+          <p:nvPr/>
+        </p:nvSpPr>
+        <p:spPr>
+          <a:xfrm>
+            <a:off x="11384280" y="3831336"/>
             <a:ext cx="868680" cy="333756"/>
           </a:xfrm>
           <a:prstGeom prst="rect">
@@ -9621,13 +9050,13 @@
       </p:sp>
       <p:sp>
         <p:nvSpPr>
-          <p:cNvPr id="139" name="Shape 137"/>
-          <p:cNvSpPr/>
-          <p:nvPr/>
-        </p:nvSpPr>
-        <p:spPr>
-          <a:xfrm>
-            <a:off x="594360" y="4498848"/>
+          <p:cNvPr id="124" name="Shape 122"/>
+          <p:cNvSpPr/>
+          <p:nvPr/>
+        </p:nvSpPr>
+        <p:spPr>
+          <a:xfrm>
+            <a:off x="594360" y="4165092"/>
             <a:ext cx="11658600" cy="333756"/>
           </a:xfrm>
           <a:prstGeom prst="rect">
@@ -9646,13 +9075,13 @@
       </p:sp>
       <p:sp>
         <p:nvSpPr>
-          <p:cNvPr id="140" name="Text 138"/>
-          <p:cNvSpPr/>
-          <p:nvPr/>
-        </p:nvSpPr>
-        <p:spPr>
-          <a:xfrm>
-            <a:off x="704088" y="4498848"/>
+          <p:cNvPr id="125" name="Text 123"/>
+          <p:cNvSpPr/>
+          <p:nvPr/>
+        </p:nvSpPr>
+        <p:spPr>
+          <a:xfrm>
+            <a:off x="704088" y="4165092"/>
             <a:ext cx="2011680" cy="333756"/>
           </a:xfrm>
           <a:prstGeom prst="rect">
@@ -9685,13 +9114,13 @@
       </p:sp>
       <p:sp>
         <p:nvSpPr>
-          <p:cNvPr id="141" name="Text 139"/>
-          <p:cNvSpPr/>
-          <p:nvPr/>
-        </p:nvSpPr>
-        <p:spPr>
-          <a:xfrm>
-            <a:off x="2606040" y="4498848"/>
+          <p:cNvPr id="126" name="Text 124"/>
+          <p:cNvSpPr/>
+          <p:nvPr/>
+        </p:nvSpPr>
+        <p:spPr>
+          <a:xfrm>
+            <a:off x="2606040" y="4165092"/>
             <a:ext cx="731520" cy="333756"/>
           </a:xfrm>
           <a:prstGeom prst="rect">
@@ -9716,7 +9145,7 @@
                 <a:ea typeface="メイリオ" pitchFamily="34" charset="-122"/>
                 <a:cs typeface="メイリオ" pitchFamily="34" charset="-120"/>
               </a:rPr>
-              <a:t>7.9</a:t>
+              <a:t>7.1</a:t>
             </a:r>
             <a:endParaRPr lang="en-US" sz="850" dirty="0"/>
           </a:p>
@@ -9724,13 +9153,13 @@
       </p:sp>
       <p:sp>
         <p:nvSpPr>
-          <p:cNvPr id="142" name="Text 140"/>
-          <p:cNvSpPr/>
-          <p:nvPr/>
-        </p:nvSpPr>
-        <p:spPr>
-          <a:xfrm>
-            <a:off x="3337560" y="4498848"/>
+          <p:cNvPr id="127" name="Text 125"/>
+          <p:cNvSpPr/>
+          <p:nvPr/>
+        </p:nvSpPr>
+        <p:spPr>
+          <a:xfrm>
+            <a:off x="3337560" y="4165092"/>
             <a:ext cx="731520" cy="333756"/>
           </a:xfrm>
           <a:prstGeom prst="rect">
@@ -9755,7 +9184,7 @@
                 <a:ea typeface="メイリオ" pitchFamily="34" charset="-122"/>
                 <a:cs typeface="メイリオ" pitchFamily="34" charset="-120"/>
               </a:rPr>
-              <a:t>7.9</a:t>
+              <a:t>7.1</a:t>
             </a:r>
             <a:endParaRPr lang="en-US" sz="850" dirty="0"/>
           </a:p>
@@ -9763,13 +9192,13 @@
       </p:sp>
       <p:sp>
         <p:nvSpPr>
-          <p:cNvPr id="143" name="Text 141"/>
-          <p:cNvSpPr/>
-          <p:nvPr/>
-        </p:nvSpPr>
-        <p:spPr>
-          <a:xfrm>
-            <a:off x="4069080" y="4498848"/>
+          <p:cNvPr id="128" name="Text 126"/>
+          <p:cNvSpPr/>
+          <p:nvPr/>
+        </p:nvSpPr>
+        <p:spPr>
+          <a:xfrm>
+            <a:off x="4069080" y="4165092"/>
             <a:ext cx="731520" cy="333756"/>
           </a:xfrm>
           <a:prstGeom prst="rect">
@@ -9794,7 +9223,7 @@
                 <a:ea typeface="メイリオ" pitchFamily="34" charset="-122"/>
                 <a:cs typeface="メイリオ" pitchFamily="34" charset="-120"/>
               </a:rPr>
-              <a:t>7.9</a:t>
+              <a:t>7.1</a:t>
             </a:r>
             <a:endParaRPr lang="en-US" sz="850" dirty="0"/>
           </a:p>
@@ -9802,13 +9231,13 @@
       </p:sp>
       <p:sp>
         <p:nvSpPr>
-          <p:cNvPr id="144" name="Text 142"/>
-          <p:cNvSpPr/>
-          <p:nvPr/>
-        </p:nvSpPr>
-        <p:spPr>
-          <a:xfrm>
-            <a:off x="4800600" y="4498848"/>
+          <p:cNvPr id="129" name="Text 127"/>
+          <p:cNvSpPr/>
+          <p:nvPr/>
+        </p:nvSpPr>
+        <p:spPr>
+          <a:xfrm>
+            <a:off x="4800600" y="4165092"/>
             <a:ext cx="731520" cy="333756"/>
           </a:xfrm>
           <a:prstGeom prst="rect">
@@ -9833,7 +9262,7 @@
                 <a:ea typeface="メイリオ" pitchFamily="34" charset="-122"/>
                 <a:cs typeface="メイリオ" pitchFamily="34" charset="-120"/>
               </a:rPr>
-              <a:t>7.9</a:t>
+              <a:t>7.1</a:t>
             </a:r>
             <a:endParaRPr lang="en-US" sz="850" dirty="0"/>
           </a:p>
@@ -9841,13 +9270,13 @@
       </p:sp>
       <p:sp>
         <p:nvSpPr>
-          <p:cNvPr id="145" name="Text 143"/>
-          <p:cNvSpPr/>
-          <p:nvPr/>
-        </p:nvSpPr>
-        <p:spPr>
-          <a:xfrm>
-            <a:off x="5532120" y="4498848"/>
+          <p:cNvPr id="130" name="Text 128"/>
+          <p:cNvSpPr/>
+          <p:nvPr/>
+        </p:nvSpPr>
+        <p:spPr>
+          <a:xfrm>
+            <a:off x="5532120" y="4165092"/>
             <a:ext cx="731520" cy="333756"/>
           </a:xfrm>
           <a:prstGeom prst="rect">
@@ -9872,7 +9301,7 @@
                 <a:ea typeface="メイリオ" pitchFamily="34" charset="-122"/>
                 <a:cs typeface="メイリオ" pitchFamily="34" charset="-120"/>
               </a:rPr>
-              <a:t>7.9</a:t>
+              <a:t>7.1</a:t>
             </a:r>
             <a:endParaRPr lang="en-US" sz="850" dirty="0"/>
           </a:p>
@@ -9880,13 +9309,13 @@
       </p:sp>
       <p:sp>
         <p:nvSpPr>
-          <p:cNvPr id="146" name="Text 144"/>
-          <p:cNvSpPr/>
-          <p:nvPr/>
-        </p:nvSpPr>
-        <p:spPr>
-          <a:xfrm>
-            <a:off x="6263640" y="4498848"/>
+          <p:cNvPr id="131" name="Text 129"/>
+          <p:cNvSpPr/>
+          <p:nvPr/>
+        </p:nvSpPr>
+        <p:spPr>
+          <a:xfrm>
+            <a:off x="6263640" y="4165092"/>
             <a:ext cx="731520" cy="333756"/>
           </a:xfrm>
           <a:prstGeom prst="rect">
@@ -9911,7 +9340,7 @@
                 <a:ea typeface="メイリオ" pitchFamily="34" charset="-122"/>
                 <a:cs typeface="メイリオ" pitchFamily="34" charset="-120"/>
               </a:rPr>
-              <a:t>37.9</a:t>
+              <a:t>17.1</a:t>
             </a:r>
             <a:endParaRPr lang="en-US" sz="850" dirty="0"/>
           </a:p>
@@ -9919,13 +9348,13 @@
       </p:sp>
       <p:sp>
         <p:nvSpPr>
-          <p:cNvPr id="147" name="Text 145"/>
-          <p:cNvSpPr/>
-          <p:nvPr/>
-        </p:nvSpPr>
-        <p:spPr>
-          <a:xfrm>
-            <a:off x="6995160" y="4498848"/>
+          <p:cNvPr id="132" name="Text 130"/>
+          <p:cNvSpPr/>
+          <p:nvPr/>
+        </p:nvSpPr>
+        <p:spPr>
+          <a:xfrm>
+            <a:off x="6995160" y="4165092"/>
             <a:ext cx="731520" cy="333756"/>
           </a:xfrm>
           <a:prstGeom prst="rect">
@@ -9950,7 +9379,7 @@
                 <a:ea typeface="メイリオ" pitchFamily="34" charset="-122"/>
                 <a:cs typeface="メイリオ" pitchFamily="34" charset="-120"/>
               </a:rPr>
-              <a:t>7.9</a:t>
+              <a:t>7.1</a:t>
             </a:r>
             <a:endParaRPr lang="en-US" sz="850" dirty="0"/>
           </a:p>
@@ -9958,13 +9387,13 @@
       </p:sp>
       <p:sp>
         <p:nvSpPr>
-          <p:cNvPr id="148" name="Text 146"/>
-          <p:cNvSpPr/>
-          <p:nvPr/>
-        </p:nvSpPr>
-        <p:spPr>
-          <a:xfrm>
-            <a:off x="7726680" y="4498848"/>
+          <p:cNvPr id="133" name="Text 131"/>
+          <p:cNvSpPr/>
+          <p:nvPr/>
+        </p:nvSpPr>
+        <p:spPr>
+          <a:xfrm>
+            <a:off x="7726680" y="4165092"/>
             <a:ext cx="731520" cy="333756"/>
           </a:xfrm>
           <a:prstGeom prst="rect">
@@ -9989,7 +9418,7 @@
                 <a:ea typeface="メイリオ" pitchFamily="34" charset="-122"/>
                 <a:cs typeface="メイリオ" pitchFamily="34" charset="-120"/>
               </a:rPr>
-              <a:t>7.9</a:t>
+              <a:t>7.1</a:t>
             </a:r>
             <a:endParaRPr lang="en-US" sz="850" dirty="0"/>
           </a:p>
@@ -9997,13 +9426,13 @@
       </p:sp>
       <p:sp>
         <p:nvSpPr>
-          <p:cNvPr id="149" name="Text 147"/>
-          <p:cNvSpPr/>
-          <p:nvPr/>
-        </p:nvSpPr>
-        <p:spPr>
-          <a:xfrm>
-            <a:off x="8458200" y="4498848"/>
+          <p:cNvPr id="134" name="Text 132"/>
+          <p:cNvSpPr/>
+          <p:nvPr/>
+        </p:nvSpPr>
+        <p:spPr>
+          <a:xfrm>
+            <a:off x="8458200" y="4165092"/>
             <a:ext cx="731520" cy="333756"/>
           </a:xfrm>
           <a:prstGeom prst="rect">
@@ -10028,7 +9457,7 @@
                 <a:ea typeface="メイリオ" pitchFamily="34" charset="-122"/>
                 <a:cs typeface="メイリオ" pitchFamily="34" charset="-120"/>
               </a:rPr>
-              <a:t>7.9</a:t>
+              <a:t>7.1</a:t>
             </a:r>
             <a:endParaRPr lang="en-US" sz="850" dirty="0"/>
           </a:p>
@@ -10036,13 +9465,13 @@
       </p:sp>
       <p:sp>
         <p:nvSpPr>
-          <p:cNvPr id="150" name="Text 148"/>
-          <p:cNvSpPr/>
-          <p:nvPr/>
-        </p:nvSpPr>
-        <p:spPr>
-          <a:xfrm>
-            <a:off x="9189720" y="4498848"/>
+          <p:cNvPr id="135" name="Text 133"/>
+          <p:cNvSpPr/>
+          <p:nvPr/>
+        </p:nvSpPr>
+        <p:spPr>
+          <a:xfrm>
+            <a:off x="9189720" y="4165092"/>
             <a:ext cx="731520" cy="333756"/>
           </a:xfrm>
           <a:prstGeom prst="rect">
@@ -10067,7 +9496,7 @@
                 <a:ea typeface="メイリオ" pitchFamily="34" charset="-122"/>
                 <a:cs typeface="メイリオ" pitchFamily="34" charset="-120"/>
               </a:rPr>
-              <a:t>7.9</a:t>
+              <a:t>7.1</a:t>
             </a:r>
             <a:endParaRPr lang="en-US" sz="850" dirty="0"/>
           </a:p>
@@ -10075,13 +9504,13 @@
       </p:sp>
       <p:sp>
         <p:nvSpPr>
-          <p:cNvPr id="151" name="Text 149"/>
-          <p:cNvSpPr/>
-          <p:nvPr/>
-        </p:nvSpPr>
-        <p:spPr>
-          <a:xfrm>
-            <a:off x="9921240" y="4498848"/>
+          <p:cNvPr id="136" name="Text 134"/>
+          <p:cNvSpPr/>
+          <p:nvPr/>
+        </p:nvSpPr>
+        <p:spPr>
+          <a:xfrm>
+            <a:off x="9921240" y="4165092"/>
             <a:ext cx="731520" cy="333756"/>
           </a:xfrm>
           <a:prstGeom prst="rect">
@@ -10106,7 +9535,7 @@
                 <a:ea typeface="メイリオ" pitchFamily="34" charset="-122"/>
                 <a:cs typeface="メイリオ" pitchFamily="34" charset="-120"/>
               </a:rPr>
-              <a:t>7.9</a:t>
+              <a:t>7.1</a:t>
             </a:r>
             <a:endParaRPr lang="en-US" sz="850" dirty="0"/>
           </a:p>
@@ -10114,13 +9543,13 @@
       </p:sp>
       <p:sp>
         <p:nvSpPr>
-          <p:cNvPr id="152" name="Text 150"/>
-          <p:cNvSpPr/>
-          <p:nvPr/>
-        </p:nvSpPr>
-        <p:spPr>
-          <a:xfrm>
-            <a:off x="10652760" y="4498848"/>
+          <p:cNvPr id="137" name="Text 135"/>
+          <p:cNvSpPr/>
+          <p:nvPr/>
+        </p:nvSpPr>
+        <p:spPr>
+          <a:xfrm>
+            <a:off x="10652760" y="4165092"/>
             <a:ext cx="731520" cy="333756"/>
           </a:xfrm>
           <a:prstGeom prst="rect">
@@ -10145,7 +9574,7 @@
                 <a:ea typeface="メイリオ" pitchFamily="34" charset="-122"/>
                 <a:cs typeface="メイリオ" pitchFamily="34" charset="-120"/>
               </a:rPr>
-              <a:t>17.9</a:t>
+              <a:t>17.1</a:t>
             </a:r>
             <a:endParaRPr lang="en-US" sz="850" dirty="0"/>
           </a:p>
@@ -10153,13 +9582,13 @@
       </p:sp>
       <p:sp>
         <p:nvSpPr>
-          <p:cNvPr id="153" name="Text 151"/>
-          <p:cNvSpPr/>
-          <p:nvPr/>
-        </p:nvSpPr>
-        <p:spPr>
-          <a:xfrm>
-            <a:off x="11384280" y="4498848"/>
+          <p:cNvPr id="138" name="Text 136"/>
+          <p:cNvSpPr/>
+          <p:nvPr/>
+        </p:nvSpPr>
+        <p:spPr>
+          <a:xfrm>
+            <a:off x="11384280" y="4165092"/>
             <a:ext cx="868680" cy="333756"/>
           </a:xfrm>
           <a:prstGeom prst="rect">
@@ -10184,7 +9613,7 @@
                 <a:ea typeface="メイリオ" pitchFamily="34" charset="-122"/>
                 <a:cs typeface="メイリオ" pitchFamily="34" charset="-120"/>
               </a:rPr>
-              <a:t>135.4</a:t>
+              <a:t>105.4</a:t>
             </a:r>
             <a:endParaRPr lang="en-US" sz="900" dirty="0"/>
           </a:p>
@@ -10192,20 +9621,20 @@
       </p:sp>
       <p:sp>
         <p:nvSpPr>
-          <p:cNvPr id="154" name="Shape 152"/>
-          <p:cNvSpPr/>
-          <p:nvPr/>
-        </p:nvSpPr>
-        <p:spPr>
-          <a:xfrm>
-            <a:off x="594360" y="4832604"/>
+          <p:cNvPr id="139" name="Shape 137"/>
+          <p:cNvSpPr/>
+          <p:nvPr/>
+        </p:nvSpPr>
+        <p:spPr>
+          <a:xfrm>
+            <a:off x="594360" y="4498848"/>
             <a:ext cx="11658600" cy="333756"/>
           </a:xfrm>
           <a:prstGeom prst="rect">
             <a:avLst/>
           </a:prstGeom>
           <a:solidFill>
-            <a:srgbClr val="FBFAF8"/>
+            <a:srgbClr val="FFFFFF"/>
           </a:solidFill>
           <a:ln w="6350">
             <a:solidFill>
@@ -10217,13 +9646,13 @@
       </p:sp>
       <p:sp>
         <p:nvSpPr>
-          <p:cNvPr id="155" name="Text 153"/>
-          <p:cNvSpPr/>
-          <p:nvPr/>
-        </p:nvSpPr>
-        <p:spPr>
-          <a:xfrm>
-            <a:off x="704088" y="4832604"/>
+          <p:cNvPr id="140" name="Text 138"/>
+          <p:cNvSpPr/>
+          <p:nvPr/>
+        </p:nvSpPr>
+        <p:spPr>
+          <a:xfrm>
+            <a:off x="704088" y="4498848"/>
             <a:ext cx="2011680" cy="333756"/>
           </a:xfrm>
           <a:prstGeom prst="rect">
@@ -10256,13 +9685,13 @@
       </p:sp>
       <p:sp>
         <p:nvSpPr>
-          <p:cNvPr id="156" name="Text 154"/>
-          <p:cNvSpPr/>
-          <p:nvPr/>
-        </p:nvSpPr>
-        <p:spPr>
-          <a:xfrm>
-            <a:off x="2606040" y="4832604"/>
+          <p:cNvPr id="141" name="Text 139"/>
+          <p:cNvSpPr/>
+          <p:nvPr/>
+        </p:nvSpPr>
+        <p:spPr>
+          <a:xfrm>
+            <a:off x="2606040" y="4498848"/>
             <a:ext cx="731520" cy="333756"/>
           </a:xfrm>
           <a:prstGeom prst="rect">
@@ -10295,13 +9724,13 @@
       </p:sp>
       <p:sp>
         <p:nvSpPr>
-          <p:cNvPr id="157" name="Text 155"/>
-          <p:cNvSpPr/>
-          <p:nvPr/>
-        </p:nvSpPr>
-        <p:spPr>
-          <a:xfrm>
-            <a:off x="3337560" y="4832604"/>
+          <p:cNvPr id="142" name="Text 140"/>
+          <p:cNvSpPr/>
+          <p:nvPr/>
+        </p:nvSpPr>
+        <p:spPr>
+          <a:xfrm>
+            <a:off x="3337560" y="4498848"/>
             <a:ext cx="731520" cy="333756"/>
           </a:xfrm>
           <a:prstGeom prst="rect">
@@ -10334,13 +9763,13 @@
       </p:sp>
       <p:sp>
         <p:nvSpPr>
-          <p:cNvPr id="158" name="Text 156"/>
-          <p:cNvSpPr/>
-          <p:nvPr/>
-        </p:nvSpPr>
-        <p:spPr>
-          <a:xfrm>
-            <a:off x="4069080" y="4832604"/>
+          <p:cNvPr id="143" name="Text 141"/>
+          <p:cNvSpPr/>
+          <p:nvPr/>
+        </p:nvSpPr>
+        <p:spPr>
+          <a:xfrm>
+            <a:off x="4069080" y="4498848"/>
             <a:ext cx="731520" cy="333756"/>
           </a:xfrm>
           <a:prstGeom prst="rect">
@@ -10373,13 +9802,13 @@
       </p:sp>
       <p:sp>
         <p:nvSpPr>
-          <p:cNvPr id="159" name="Text 157"/>
-          <p:cNvSpPr/>
-          <p:nvPr/>
-        </p:nvSpPr>
-        <p:spPr>
-          <a:xfrm>
-            <a:off x="4800600" y="4832604"/>
+          <p:cNvPr id="144" name="Text 142"/>
+          <p:cNvSpPr/>
+          <p:nvPr/>
+        </p:nvSpPr>
+        <p:spPr>
+          <a:xfrm>
+            <a:off x="4800600" y="4498848"/>
             <a:ext cx="731520" cy="333756"/>
           </a:xfrm>
           <a:prstGeom prst="rect">
@@ -10412,13 +9841,13 @@
       </p:sp>
       <p:sp>
         <p:nvSpPr>
-          <p:cNvPr id="160" name="Text 158"/>
-          <p:cNvSpPr/>
-          <p:nvPr/>
-        </p:nvSpPr>
-        <p:spPr>
-          <a:xfrm>
-            <a:off x="5532120" y="4832604"/>
+          <p:cNvPr id="145" name="Text 143"/>
+          <p:cNvSpPr/>
+          <p:nvPr/>
+        </p:nvSpPr>
+        <p:spPr>
+          <a:xfrm>
+            <a:off x="5532120" y="4498848"/>
             <a:ext cx="731520" cy="333756"/>
           </a:xfrm>
           <a:prstGeom prst="rect">
@@ -10451,13 +9880,13 @@
       </p:sp>
       <p:sp>
         <p:nvSpPr>
-          <p:cNvPr id="161" name="Text 159"/>
-          <p:cNvSpPr/>
-          <p:nvPr/>
-        </p:nvSpPr>
-        <p:spPr>
-          <a:xfrm>
-            <a:off x="6263640" y="4832604"/>
+          <p:cNvPr id="146" name="Text 144"/>
+          <p:cNvSpPr/>
+          <p:nvPr/>
+        </p:nvSpPr>
+        <p:spPr>
+          <a:xfrm>
+            <a:off x="6263640" y="4498848"/>
             <a:ext cx="731520" cy="333756"/>
           </a:xfrm>
           <a:prstGeom prst="rect">
@@ -10490,13 +9919,13 @@
       </p:sp>
       <p:sp>
         <p:nvSpPr>
-          <p:cNvPr id="162" name="Text 160"/>
-          <p:cNvSpPr/>
-          <p:nvPr/>
-        </p:nvSpPr>
-        <p:spPr>
-          <a:xfrm>
-            <a:off x="6995160" y="4832604"/>
+          <p:cNvPr id="147" name="Text 145"/>
+          <p:cNvSpPr/>
+          <p:nvPr/>
+        </p:nvSpPr>
+        <p:spPr>
+          <a:xfrm>
+            <a:off x="6995160" y="4498848"/>
             <a:ext cx="731520" cy="333756"/>
           </a:xfrm>
           <a:prstGeom prst="rect">
@@ -10529,13 +9958,13 @@
       </p:sp>
       <p:sp>
         <p:nvSpPr>
-          <p:cNvPr id="163" name="Text 161"/>
-          <p:cNvSpPr/>
-          <p:nvPr/>
-        </p:nvSpPr>
-        <p:spPr>
-          <a:xfrm>
-            <a:off x="7726680" y="4832604"/>
+          <p:cNvPr id="148" name="Text 146"/>
+          <p:cNvSpPr/>
+          <p:nvPr/>
+        </p:nvSpPr>
+        <p:spPr>
+          <a:xfrm>
+            <a:off x="7726680" y="4498848"/>
             <a:ext cx="731520" cy="333756"/>
           </a:xfrm>
           <a:prstGeom prst="rect">
@@ -10568,13 +9997,13 @@
       </p:sp>
       <p:sp>
         <p:nvSpPr>
-          <p:cNvPr id="164" name="Text 162"/>
-          <p:cNvSpPr/>
-          <p:nvPr/>
-        </p:nvSpPr>
-        <p:spPr>
-          <a:xfrm>
-            <a:off x="8458200" y="4832604"/>
+          <p:cNvPr id="149" name="Text 147"/>
+          <p:cNvSpPr/>
+          <p:nvPr/>
+        </p:nvSpPr>
+        <p:spPr>
+          <a:xfrm>
+            <a:off x="8458200" y="4498848"/>
             <a:ext cx="731520" cy="333756"/>
           </a:xfrm>
           <a:prstGeom prst="rect">
@@ -10607,13 +10036,13 @@
       </p:sp>
       <p:sp>
         <p:nvSpPr>
-          <p:cNvPr id="165" name="Text 163"/>
-          <p:cNvSpPr/>
-          <p:nvPr/>
-        </p:nvSpPr>
-        <p:spPr>
-          <a:xfrm>
-            <a:off x="9189720" y="4832604"/>
+          <p:cNvPr id="150" name="Text 148"/>
+          <p:cNvSpPr/>
+          <p:nvPr/>
+        </p:nvSpPr>
+        <p:spPr>
+          <a:xfrm>
+            <a:off x="9189720" y="4498848"/>
             <a:ext cx="731520" cy="333756"/>
           </a:xfrm>
           <a:prstGeom prst="rect">
@@ -10646,13 +10075,13 @@
       </p:sp>
       <p:sp>
         <p:nvSpPr>
-          <p:cNvPr id="166" name="Text 164"/>
-          <p:cNvSpPr/>
-          <p:nvPr/>
-        </p:nvSpPr>
-        <p:spPr>
-          <a:xfrm>
-            <a:off x="9921240" y="4832604"/>
+          <p:cNvPr id="151" name="Text 149"/>
+          <p:cNvSpPr/>
+          <p:nvPr/>
+        </p:nvSpPr>
+        <p:spPr>
+          <a:xfrm>
+            <a:off x="9921240" y="4498848"/>
             <a:ext cx="731520" cy="333756"/>
           </a:xfrm>
           <a:prstGeom prst="rect">
@@ -10685,13 +10114,13 @@
       </p:sp>
       <p:sp>
         <p:nvSpPr>
-          <p:cNvPr id="167" name="Text 165"/>
-          <p:cNvSpPr/>
-          <p:nvPr/>
-        </p:nvSpPr>
-        <p:spPr>
-          <a:xfrm>
-            <a:off x="10652760" y="4832604"/>
+          <p:cNvPr id="152" name="Text 150"/>
+          <p:cNvSpPr/>
+          <p:nvPr/>
+        </p:nvSpPr>
+        <p:spPr>
+          <a:xfrm>
+            <a:off x="10652760" y="4498848"/>
             <a:ext cx="731520" cy="333756"/>
           </a:xfrm>
           <a:prstGeom prst="rect">
@@ -10724,13 +10153,13 @@
       </p:sp>
       <p:sp>
         <p:nvSpPr>
-          <p:cNvPr id="168" name="Text 166"/>
-          <p:cNvSpPr/>
-          <p:nvPr/>
-        </p:nvSpPr>
-        <p:spPr>
-          <a:xfrm>
-            <a:off x="11384280" y="4832604"/>
+          <p:cNvPr id="153" name="Text 151"/>
+          <p:cNvSpPr/>
+          <p:nvPr/>
+        </p:nvSpPr>
+        <p:spPr>
+          <a:xfrm>
+            <a:off x="11384280" y="4498848"/>
             <a:ext cx="868680" cy="333756"/>
           </a:xfrm>
           <a:prstGeom prst="rect">
@@ -10763,13 +10192,13 @@
       </p:sp>
       <p:sp>
         <p:nvSpPr>
-          <p:cNvPr id="169" name="Shape 167"/>
-          <p:cNvSpPr/>
-          <p:nvPr/>
-        </p:nvSpPr>
-        <p:spPr>
-          <a:xfrm>
-            <a:off x="594360" y="5166360"/>
+          <p:cNvPr id="154" name="Shape 152"/>
+          <p:cNvSpPr/>
+          <p:nvPr/>
+        </p:nvSpPr>
+        <p:spPr>
+          <a:xfrm>
+            <a:off x="594360" y="4832604"/>
             <a:ext cx="11658600" cy="333756"/>
           </a:xfrm>
           <a:prstGeom prst="rect">
@@ -10788,13 +10217,13 @@
       </p:sp>
       <p:sp>
         <p:nvSpPr>
-          <p:cNvPr id="170" name="Text 168"/>
-          <p:cNvSpPr/>
-          <p:nvPr/>
-        </p:nvSpPr>
-        <p:spPr>
-          <a:xfrm>
-            <a:off x="704088" y="5166360"/>
+          <p:cNvPr id="155" name="Text 153"/>
+          <p:cNvSpPr/>
+          <p:nvPr/>
+        </p:nvSpPr>
+        <p:spPr>
+          <a:xfrm>
+            <a:off x="704088" y="4832604"/>
             <a:ext cx="2011680" cy="333756"/>
           </a:xfrm>
           <a:prstGeom prst="rect">
@@ -10827,13 +10256,13 @@
       </p:sp>
       <p:sp>
         <p:nvSpPr>
-          <p:cNvPr id="171" name="Text 169"/>
-          <p:cNvSpPr/>
-          <p:nvPr/>
-        </p:nvSpPr>
-        <p:spPr>
-          <a:xfrm>
-            <a:off x="2606040" y="5166360"/>
+          <p:cNvPr id="156" name="Text 154"/>
+          <p:cNvSpPr/>
+          <p:nvPr/>
+        </p:nvSpPr>
+        <p:spPr>
+          <a:xfrm>
+            <a:off x="2606040" y="4832604"/>
             <a:ext cx="731520" cy="333756"/>
           </a:xfrm>
           <a:prstGeom prst="rect">
@@ -10858,7 +10287,7 @@
                 <a:ea typeface="メイリオ" pitchFamily="34" charset="-122"/>
                 <a:cs typeface="メイリオ" pitchFamily="34" charset="-120"/>
               </a:rPr>
-              <a:t>6.7</a:t>
+              <a:t>5.9</a:t>
             </a:r>
             <a:endParaRPr lang="en-US" sz="850" dirty="0"/>
           </a:p>
@@ -10866,13 +10295,13 @@
       </p:sp>
       <p:sp>
         <p:nvSpPr>
-          <p:cNvPr id="172" name="Text 170"/>
-          <p:cNvSpPr/>
-          <p:nvPr/>
-        </p:nvSpPr>
-        <p:spPr>
-          <a:xfrm>
-            <a:off x="3337560" y="5166360"/>
+          <p:cNvPr id="157" name="Text 155"/>
+          <p:cNvSpPr/>
+          <p:nvPr/>
+        </p:nvSpPr>
+        <p:spPr>
+          <a:xfrm>
+            <a:off x="3337560" y="4832604"/>
             <a:ext cx="731520" cy="333756"/>
           </a:xfrm>
           <a:prstGeom prst="rect">
@@ -10897,7 +10326,7 @@
                 <a:ea typeface="メイリオ" pitchFamily="34" charset="-122"/>
                 <a:cs typeface="メイリオ" pitchFamily="34" charset="-120"/>
               </a:rPr>
-              <a:t>6.7</a:t>
+              <a:t>5.9</a:t>
             </a:r>
             <a:endParaRPr lang="en-US" sz="850" dirty="0"/>
           </a:p>
@@ -10905,13 +10334,13 @@
       </p:sp>
       <p:sp>
         <p:nvSpPr>
-          <p:cNvPr id="173" name="Text 171"/>
-          <p:cNvSpPr/>
-          <p:nvPr/>
-        </p:nvSpPr>
-        <p:spPr>
-          <a:xfrm>
-            <a:off x="4069080" y="5166360"/>
+          <p:cNvPr id="158" name="Text 156"/>
+          <p:cNvSpPr/>
+          <p:nvPr/>
+        </p:nvSpPr>
+        <p:spPr>
+          <a:xfrm>
+            <a:off x="4069080" y="4832604"/>
             <a:ext cx="731520" cy="333756"/>
           </a:xfrm>
           <a:prstGeom prst="rect">
@@ -10936,7 +10365,7 @@
                 <a:ea typeface="メイリオ" pitchFamily="34" charset="-122"/>
                 <a:cs typeface="メイリオ" pitchFamily="34" charset="-120"/>
               </a:rPr>
-              <a:t>6.7</a:t>
+              <a:t>5.9</a:t>
             </a:r>
             <a:endParaRPr lang="en-US" sz="850" dirty="0"/>
           </a:p>
@@ -10944,13 +10373,13 @@
       </p:sp>
       <p:sp>
         <p:nvSpPr>
-          <p:cNvPr id="174" name="Text 172"/>
-          <p:cNvSpPr/>
-          <p:nvPr/>
-        </p:nvSpPr>
-        <p:spPr>
-          <a:xfrm>
-            <a:off x="4800600" y="5166360"/>
+          <p:cNvPr id="159" name="Text 157"/>
+          <p:cNvSpPr/>
+          <p:nvPr/>
+        </p:nvSpPr>
+        <p:spPr>
+          <a:xfrm>
+            <a:off x="4800600" y="4832604"/>
             <a:ext cx="731520" cy="333756"/>
           </a:xfrm>
           <a:prstGeom prst="rect">
@@ -10975,7 +10404,7 @@
                 <a:ea typeface="メイリオ" pitchFamily="34" charset="-122"/>
                 <a:cs typeface="メイリオ" pitchFamily="34" charset="-120"/>
               </a:rPr>
-              <a:t>6.7</a:t>
+              <a:t>5.9</a:t>
             </a:r>
             <a:endParaRPr lang="en-US" sz="850" dirty="0"/>
           </a:p>
@@ -10983,13 +10412,13 @@
       </p:sp>
       <p:sp>
         <p:nvSpPr>
-          <p:cNvPr id="175" name="Text 173"/>
-          <p:cNvSpPr/>
-          <p:nvPr/>
-        </p:nvSpPr>
-        <p:spPr>
-          <a:xfrm>
-            <a:off x="5532120" y="5166360"/>
+          <p:cNvPr id="160" name="Text 158"/>
+          <p:cNvSpPr/>
+          <p:nvPr/>
+        </p:nvSpPr>
+        <p:spPr>
+          <a:xfrm>
+            <a:off x="5532120" y="4832604"/>
             <a:ext cx="731520" cy="333756"/>
           </a:xfrm>
           <a:prstGeom prst="rect">
@@ -11014,7 +10443,7 @@
                 <a:ea typeface="メイリオ" pitchFamily="34" charset="-122"/>
                 <a:cs typeface="メイリオ" pitchFamily="34" charset="-120"/>
               </a:rPr>
-              <a:t>6.7</a:t>
+              <a:t>5.9</a:t>
             </a:r>
             <a:endParaRPr lang="en-US" sz="850" dirty="0"/>
           </a:p>
@@ -11022,13 +10451,13 @@
       </p:sp>
       <p:sp>
         <p:nvSpPr>
-          <p:cNvPr id="176" name="Text 174"/>
-          <p:cNvSpPr/>
-          <p:nvPr/>
-        </p:nvSpPr>
-        <p:spPr>
-          <a:xfrm>
-            <a:off x="6263640" y="5166360"/>
+          <p:cNvPr id="161" name="Text 159"/>
+          <p:cNvSpPr/>
+          <p:nvPr/>
+        </p:nvSpPr>
+        <p:spPr>
+          <a:xfrm>
+            <a:off x="6263640" y="4832604"/>
             <a:ext cx="731520" cy="333756"/>
           </a:xfrm>
           <a:prstGeom prst="rect">
@@ -11053,7 +10482,7 @@
                 <a:ea typeface="メイリオ" pitchFamily="34" charset="-122"/>
                 <a:cs typeface="メイリオ" pitchFamily="34" charset="-120"/>
               </a:rPr>
-              <a:t>36.7</a:t>
+              <a:t>15.9</a:t>
             </a:r>
             <a:endParaRPr lang="en-US" sz="850" dirty="0"/>
           </a:p>
@@ -11061,13 +10490,13 @@
       </p:sp>
       <p:sp>
         <p:nvSpPr>
-          <p:cNvPr id="177" name="Text 175"/>
-          <p:cNvSpPr/>
-          <p:nvPr/>
-        </p:nvSpPr>
-        <p:spPr>
-          <a:xfrm>
-            <a:off x="6995160" y="5166360"/>
+          <p:cNvPr id="162" name="Text 160"/>
+          <p:cNvSpPr/>
+          <p:nvPr/>
+        </p:nvSpPr>
+        <p:spPr>
+          <a:xfrm>
+            <a:off x="6995160" y="4832604"/>
             <a:ext cx="731520" cy="333756"/>
           </a:xfrm>
           <a:prstGeom prst="rect">
@@ -11092,7 +10521,7 @@
                 <a:ea typeface="メイリオ" pitchFamily="34" charset="-122"/>
                 <a:cs typeface="メイリオ" pitchFamily="34" charset="-120"/>
               </a:rPr>
-              <a:t>6.7</a:t>
+              <a:t>5.9</a:t>
             </a:r>
             <a:endParaRPr lang="en-US" sz="850" dirty="0"/>
           </a:p>
@@ -11100,13 +10529,13 @@
       </p:sp>
       <p:sp>
         <p:nvSpPr>
-          <p:cNvPr id="178" name="Text 176"/>
-          <p:cNvSpPr/>
-          <p:nvPr/>
-        </p:nvSpPr>
-        <p:spPr>
-          <a:xfrm>
-            <a:off x="7726680" y="5166360"/>
+          <p:cNvPr id="163" name="Text 161"/>
+          <p:cNvSpPr/>
+          <p:nvPr/>
+        </p:nvSpPr>
+        <p:spPr>
+          <a:xfrm>
+            <a:off x="7726680" y="4832604"/>
             <a:ext cx="731520" cy="333756"/>
           </a:xfrm>
           <a:prstGeom prst="rect">
@@ -11131,7 +10560,7 @@
                 <a:ea typeface="メイリオ" pitchFamily="34" charset="-122"/>
                 <a:cs typeface="メイリオ" pitchFamily="34" charset="-120"/>
               </a:rPr>
-              <a:t>6.7</a:t>
+              <a:t>5.9</a:t>
             </a:r>
             <a:endParaRPr lang="en-US" sz="850" dirty="0"/>
           </a:p>
@@ -11139,13 +10568,13 @@
       </p:sp>
       <p:sp>
         <p:nvSpPr>
-          <p:cNvPr id="179" name="Text 177"/>
-          <p:cNvSpPr/>
-          <p:nvPr/>
-        </p:nvSpPr>
-        <p:spPr>
-          <a:xfrm>
-            <a:off x="8458200" y="5166360"/>
+          <p:cNvPr id="164" name="Text 162"/>
+          <p:cNvSpPr/>
+          <p:nvPr/>
+        </p:nvSpPr>
+        <p:spPr>
+          <a:xfrm>
+            <a:off x="8458200" y="4832604"/>
             <a:ext cx="731520" cy="333756"/>
           </a:xfrm>
           <a:prstGeom prst="rect">
@@ -11170,7 +10599,7 @@
                 <a:ea typeface="メイリオ" pitchFamily="34" charset="-122"/>
                 <a:cs typeface="メイリオ" pitchFamily="34" charset="-120"/>
               </a:rPr>
-              <a:t>6.7</a:t>
+              <a:t>5.9</a:t>
             </a:r>
             <a:endParaRPr lang="en-US" sz="850" dirty="0"/>
           </a:p>
@@ -11178,13 +10607,13 @@
       </p:sp>
       <p:sp>
         <p:nvSpPr>
-          <p:cNvPr id="180" name="Text 178"/>
-          <p:cNvSpPr/>
-          <p:nvPr/>
-        </p:nvSpPr>
-        <p:spPr>
-          <a:xfrm>
-            <a:off x="9189720" y="5166360"/>
+          <p:cNvPr id="165" name="Text 163"/>
+          <p:cNvSpPr/>
+          <p:nvPr/>
+        </p:nvSpPr>
+        <p:spPr>
+          <a:xfrm>
+            <a:off x="9189720" y="4832604"/>
             <a:ext cx="731520" cy="333756"/>
           </a:xfrm>
           <a:prstGeom prst="rect">
@@ -11209,7 +10638,7 @@
                 <a:ea typeface="メイリオ" pitchFamily="34" charset="-122"/>
                 <a:cs typeface="メイリオ" pitchFamily="34" charset="-120"/>
               </a:rPr>
-              <a:t>6.7</a:t>
+              <a:t>5.9</a:t>
             </a:r>
             <a:endParaRPr lang="en-US" sz="850" dirty="0"/>
           </a:p>
@@ -11217,13 +10646,13 @@
       </p:sp>
       <p:sp>
         <p:nvSpPr>
-          <p:cNvPr id="181" name="Text 179"/>
-          <p:cNvSpPr/>
-          <p:nvPr/>
-        </p:nvSpPr>
-        <p:spPr>
-          <a:xfrm>
-            <a:off x="9921240" y="5166360"/>
+          <p:cNvPr id="166" name="Text 164"/>
+          <p:cNvSpPr/>
+          <p:nvPr/>
+        </p:nvSpPr>
+        <p:spPr>
+          <a:xfrm>
+            <a:off x="9921240" y="4832604"/>
             <a:ext cx="731520" cy="333756"/>
           </a:xfrm>
           <a:prstGeom prst="rect">
@@ -11248,7 +10677,7 @@
                 <a:ea typeface="メイリオ" pitchFamily="34" charset="-122"/>
                 <a:cs typeface="メイリオ" pitchFamily="34" charset="-120"/>
               </a:rPr>
-              <a:t>6.7</a:t>
+              <a:t>5.9</a:t>
             </a:r>
             <a:endParaRPr lang="en-US" sz="850" dirty="0"/>
           </a:p>
@@ -11256,13 +10685,13 @@
       </p:sp>
       <p:sp>
         <p:nvSpPr>
-          <p:cNvPr id="182" name="Text 180"/>
-          <p:cNvSpPr/>
-          <p:nvPr/>
-        </p:nvSpPr>
-        <p:spPr>
-          <a:xfrm>
-            <a:off x="10652760" y="5166360"/>
+          <p:cNvPr id="167" name="Text 165"/>
+          <p:cNvSpPr/>
+          <p:nvPr/>
+        </p:nvSpPr>
+        <p:spPr>
+          <a:xfrm>
+            <a:off x="10652760" y="4832604"/>
             <a:ext cx="731520" cy="333756"/>
           </a:xfrm>
           <a:prstGeom prst="rect">
@@ -11287,7 +10716,7 @@
                 <a:ea typeface="メイリオ" pitchFamily="34" charset="-122"/>
                 <a:cs typeface="メイリオ" pitchFamily="34" charset="-120"/>
               </a:rPr>
-              <a:t>16.7</a:t>
+              <a:t>15.9</a:t>
             </a:r>
             <a:endParaRPr lang="en-US" sz="850" dirty="0"/>
           </a:p>
@@ -11295,13 +10724,13 @@
       </p:sp>
       <p:sp>
         <p:nvSpPr>
-          <p:cNvPr id="183" name="Text 181"/>
-          <p:cNvSpPr/>
-          <p:nvPr/>
-        </p:nvSpPr>
-        <p:spPr>
-          <a:xfrm>
-            <a:off x="11384280" y="5166360"/>
+          <p:cNvPr id="168" name="Text 166"/>
+          <p:cNvSpPr/>
+          <p:nvPr/>
+        </p:nvSpPr>
+        <p:spPr>
+          <a:xfrm>
+            <a:off x="11384280" y="4832604"/>
             <a:ext cx="868680" cy="333756"/>
           </a:xfrm>
           <a:prstGeom prst="rect">
@@ -11326,7 +10755,7 @@
                 <a:ea typeface="メイリオ" pitchFamily="34" charset="-122"/>
                 <a:cs typeface="メイリオ" pitchFamily="34" charset="-120"/>
               </a:rPr>
-              <a:t>120.4</a:t>
+              <a:t>90.4</a:t>
             </a:r>
             <a:endParaRPr lang="en-US" sz="900" dirty="0"/>
           </a:p>
@@ -11334,13 +10763,13 @@
       </p:sp>
       <p:sp>
         <p:nvSpPr>
-          <p:cNvPr id="184" name="Shape 182"/>
-          <p:cNvSpPr/>
-          <p:nvPr/>
-        </p:nvSpPr>
-        <p:spPr>
-          <a:xfrm>
-            <a:off x="594360" y="5682996"/>
+          <p:cNvPr id="169" name="Shape 167"/>
+          <p:cNvSpPr/>
+          <p:nvPr/>
+        </p:nvSpPr>
+        <p:spPr>
+          <a:xfrm>
+            <a:off x="594360" y="5349240"/>
             <a:ext cx="10963656" cy="841248"/>
           </a:xfrm>
           <a:prstGeom prst="roundRect">
@@ -11368,13 +10797,13 @@
       </p:sp>
       <p:sp>
         <p:nvSpPr>
-          <p:cNvPr id="185" name="Text 183"/>
-          <p:cNvSpPr/>
-          <p:nvPr/>
-        </p:nvSpPr>
-        <p:spPr>
-          <a:xfrm>
-            <a:off x="914400" y="5756148"/>
+          <p:cNvPr id="170" name="Text 168"/>
+          <p:cNvSpPr/>
+          <p:nvPr/>
+        </p:nvSpPr>
+        <p:spPr>
+          <a:xfrm>
+            <a:off x="914400" y="5422392"/>
             <a:ext cx="3291840" cy="237744"/>
           </a:xfrm>
           <a:prstGeom prst="rect">
@@ -11407,13 +10836,13 @@
       </p:sp>
       <p:sp>
         <p:nvSpPr>
-          <p:cNvPr id="186" name="Text 184"/>
-          <p:cNvSpPr/>
-          <p:nvPr/>
-        </p:nvSpPr>
-        <p:spPr>
-          <a:xfrm>
-            <a:off x="914400" y="5957316"/>
+          <p:cNvPr id="171" name="Text 169"/>
+          <p:cNvSpPr/>
+          <p:nvPr/>
+        </p:nvSpPr>
+        <p:spPr>
+          <a:xfrm>
+            <a:off x="914400" y="5623560"/>
             <a:ext cx="3291840" cy="310896"/>
           </a:xfrm>
           <a:prstGeom prst="rect">
@@ -11438,7 +10867,7 @@
                 <a:ea typeface="メイリオ" pitchFamily="34" charset="-122"/>
                 <a:cs typeface="メイリオ" pitchFamily="34" charset="-120"/>
               </a:rPr>
-              <a:t>863.0百万円</a:t>
+              <a:t>833.0百万円</a:t>
             </a:r>
             <a:endParaRPr lang="en-US" sz="1600" dirty="0"/>
           </a:p>
@@ -11446,13 +10875,13 @@
       </p:sp>
       <p:sp>
         <p:nvSpPr>
-          <p:cNvPr id="187" name="Text 185"/>
-          <p:cNvSpPr/>
-          <p:nvPr/>
-        </p:nvSpPr>
-        <p:spPr>
-          <a:xfrm>
-            <a:off x="4526280" y="5756148"/>
+          <p:cNvPr id="172" name="Text 170"/>
+          <p:cNvSpPr/>
+          <p:nvPr/>
+        </p:nvSpPr>
+        <p:spPr>
+          <a:xfrm>
+            <a:off x="4526280" y="5422392"/>
             <a:ext cx="3291840" cy="237744"/>
           </a:xfrm>
           <a:prstGeom prst="rect">
@@ -11485,13 +10914,13 @@
       </p:sp>
       <p:sp>
         <p:nvSpPr>
-          <p:cNvPr id="188" name="Text 186"/>
-          <p:cNvSpPr/>
-          <p:nvPr/>
-        </p:nvSpPr>
-        <p:spPr>
-          <a:xfrm>
-            <a:off x="4526280" y="5957316"/>
+          <p:cNvPr id="173" name="Text 171"/>
+          <p:cNvSpPr/>
+          <p:nvPr/>
+        </p:nvSpPr>
+        <p:spPr>
+          <a:xfrm>
+            <a:off x="4526280" y="5623560"/>
             <a:ext cx="3291840" cy="310896"/>
           </a:xfrm>
           <a:prstGeom prst="rect">
@@ -11516,7 +10945,7 @@
                 <a:ea typeface="メイリオ" pitchFamily="34" charset="-122"/>
                 <a:cs typeface="メイリオ" pitchFamily="34" charset="-120"/>
               </a:rPr>
-              <a:t>＋135.4百万円</a:t>
+              <a:t>＋105.4百万円</a:t>
             </a:r>
             <a:endParaRPr lang="en-US" sz="1600" dirty="0"/>
           </a:p>
@@ -11524,13 +10953,13 @@
       </p:sp>
       <p:sp>
         <p:nvSpPr>
-          <p:cNvPr id="189" name="Text 187"/>
-          <p:cNvSpPr/>
-          <p:nvPr/>
-        </p:nvSpPr>
-        <p:spPr>
-          <a:xfrm>
-            <a:off x="8138160" y="5756148"/>
+          <p:cNvPr id="174" name="Text 172"/>
+          <p:cNvSpPr/>
+          <p:nvPr/>
+        </p:nvSpPr>
+        <p:spPr>
+          <a:xfrm>
+            <a:off x="8138160" y="5422392"/>
             <a:ext cx="3291840" cy="237744"/>
           </a:xfrm>
           <a:prstGeom prst="rect">
@@ -11563,13 +10992,13 @@
       </p:sp>
       <p:sp>
         <p:nvSpPr>
-          <p:cNvPr id="190" name="Text 188"/>
-          <p:cNvSpPr/>
-          <p:nvPr/>
-        </p:nvSpPr>
-        <p:spPr>
-          <a:xfrm>
-            <a:off x="8138160" y="5957316"/>
+          <p:cNvPr id="175" name="Text 173"/>
+          <p:cNvSpPr/>
+          <p:nvPr/>
+        </p:nvSpPr>
+        <p:spPr>
+          <a:xfrm>
+            <a:off x="8138160" y="5623560"/>
             <a:ext cx="3291840" cy="310896"/>
           </a:xfrm>
           <a:prstGeom prst="rect">
@@ -11594,7 +11023,7 @@
                 <a:ea typeface="メイリオ" pitchFamily="34" charset="-122"/>
                 <a:cs typeface="メイリオ" pitchFamily="34" charset="-120"/>
               </a:rPr>
-              <a:t>＋120.4百万円</a:t>
+              <a:t>＋90.4百万円</a:t>
             </a:r>
             <a:endParaRPr lang="en-US" sz="1600" dirty="0"/>
           </a:p>
@@ -11602,13 +11031,13 @@
       </p:sp>
       <p:sp>
         <p:nvSpPr>
-          <p:cNvPr id="191" name="Text 189"/>
-          <p:cNvSpPr/>
-          <p:nvPr/>
-        </p:nvSpPr>
-        <p:spPr>
-          <a:xfrm>
-            <a:off x="914400" y="6268212"/>
+          <p:cNvPr id="176" name="Text 174"/>
+          <p:cNvSpPr/>
+          <p:nvPr/>
+        </p:nvSpPr>
+        <p:spPr>
+          <a:xfrm>
+            <a:off x="914400" y="5934456"/>
             <a:ext cx="10332720" cy="219456"/>
           </a:xfrm>
           <a:prstGeom prst="rect">
@@ -11633,7 +11062,7 @@
                 <a:ea typeface="メイリオ" pitchFamily="34" charset="-122"/>
                 <a:cs typeface="メイリオ" pitchFamily="34" charset="-120"/>
               </a:rPr>
-              <a:t>コンサルティング料は12か月按分。M&amp;A仲介は2027/03、クルーザー×ワイン事業は2027/03と2027/09に各10百万円を計上。</a:t>
+              <a:t>コンサルティング料82.5百万円は12か月按分。クルーザー×ワイン事業は2027/03と2027/09に各10百万円を計上。</a:t>
             </a:r>
             <a:endParaRPr lang="en-US" sz="850" dirty="0"/>
           </a:p>
@@ -12373,7 +11802,7 @@
                 <a:ea typeface="メイリオ" pitchFamily="34" charset="-122"/>
                 <a:cs typeface="メイリオ" pitchFamily="34" charset="-120"/>
               </a:rPr>
-              <a:t>75.4</a:t>
+              <a:t>74.5</a:t>
             </a:r>
             <a:endParaRPr lang="en-US" sz="900" dirty="0"/>
           </a:p>
@@ -12412,7 +11841,7 @@
                 <a:ea typeface="メイリオ" pitchFamily="34" charset="-122"/>
                 <a:cs typeface="メイリオ" pitchFamily="34" charset="-120"/>
               </a:rPr>
-              <a:t>75.4</a:t>
+              <a:t>74.5</a:t>
             </a:r>
             <a:endParaRPr lang="en-US" sz="900" dirty="0"/>
           </a:p>
@@ -12451,7 +11880,7 @@
                 <a:ea typeface="メイリオ" pitchFamily="34" charset="-122"/>
                 <a:cs typeface="メイリオ" pitchFamily="34" charset="-120"/>
               </a:rPr>
-              <a:t>75.4</a:t>
+              <a:t>74.5</a:t>
             </a:r>
             <a:endParaRPr lang="en-US" sz="900" dirty="0"/>
           </a:p>
@@ -12490,7 +11919,7 @@
                 <a:ea typeface="メイリオ" pitchFamily="34" charset="-122"/>
                 <a:cs typeface="メイリオ" pitchFamily="34" charset="-120"/>
               </a:rPr>
-              <a:t>75.4</a:t>
+              <a:t>74.5</a:t>
             </a:r>
             <a:endParaRPr lang="en-US" sz="900" dirty="0"/>
           </a:p>
@@ -12529,7 +11958,7 @@
                 <a:ea typeface="メイリオ" pitchFamily="34" charset="-122"/>
                 <a:cs typeface="メイリオ" pitchFamily="34" charset="-120"/>
               </a:rPr>
-              <a:t>75.4</a:t>
+              <a:t>74.5</a:t>
             </a:r>
             <a:endParaRPr lang="en-US" sz="900" dirty="0"/>
           </a:p>
@@ -12568,7 +11997,7 @@
                 <a:ea typeface="メイリオ" pitchFamily="34" charset="-122"/>
                 <a:cs typeface="メイリオ" pitchFamily="34" charset="-120"/>
               </a:rPr>
-              <a:t>108.4</a:t>
+              <a:t>85.5</a:t>
             </a:r>
             <a:endParaRPr lang="en-US" sz="900" dirty="0"/>
           </a:p>
@@ -12607,7 +12036,7 @@
                 <a:ea typeface="メイリオ" pitchFamily="34" charset="-122"/>
                 <a:cs typeface="メイリオ" pitchFamily="34" charset="-120"/>
               </a:rPr>
-              <a:t>75.4</a:t>
+              <a:t>74.5</a:t>
             </a:r>
             <a:endParaRPr lang="en-US" sz="900" dirty="0"/>
           </a:p>
@@ -12646,7 +12075,7 @@
                 <a:ea typeface="メイリオ" pitchFamily="34" charset="-122"/>
                 <a:cs typeface="メイリオ" pitchFamily="34" charset="-120"/>
               </a:rPr>
-              <a:t>75.4</a:t>
+              <a:t>74.5</a:t>
             </a:r>
             <a:endParaRPr lang="en-US" sz="900" dirty="0"/>
           </a:p>
@@ -12685,7 +12114,7 @@
                 <a:ea typeface="メイリオ" pitchFamily="34" charset="-122"/>
                 <a:cs typeface="メイリオ" pitchFamily="34" charset="-120"/>
               </a:rPr>
-              <a:t>75.4</a:t>
+              <a:t>74.5</a:t>
             </a:r>
             <a:endParaRPr lang="en-US" sz="900" dirty="0"/>
           </a:p>
@@ -12724,7 +12153,7 @@
                 <a:ea typeface="メイリオ" pitchFamily="34" charset="-122"/>
                 <a:cs typeface="メイリオ" pitchFamily="34" charset="-120"/>
               </a:rPr>
-              <a:t>75.4</a:t>
+              <a:t>74.5</a:t>
             </a:r>
             <a:endParaRPr lang="en-US" sz="900" dirty="0"/>
           </a:p>
@@ -12763,7 +12192,7 @@
                 <a:ea typeface="メイリオ" pitchFamily="34" charset="-122"/>
                 <a:cs typeface="メイリオ" pitchFamily="34" charset="-120"/>
               </a:rPr>
-              <a:t>75.4</a:t>
+              <a:t>74.5</a:t>
             </a:r>
             <a:endParaRPr lang="en-US" sz="900" dirty="0"/>
           </a:p>
@@ -12802,7 +12231,7 @@
                 <a:ea typeface="メイリオ" pitchFamily="34" charset="-122"/>
                 <a:cs typeface="メイリオ" pitchFamily="34" charset="-120"/>
               </a:rPr>
-              <a:t>86.4</a:t>
+              <a:t>85.5</a:t>
             </a:r>
             <a:endParaRPr lang="en-US" sz="900" dirty="0"/>
           </a:p>
@@ -12944,7 +12373,7 @@
                 <a:ea typeface="メイリオ" pitchFamily="34" charset="-122"/>
                 <a:cs typeface="メイリオ" pitchFamily="34" charset="-120"/>
               </a:rPr>
-              <a:t>66.5</a:t>
+              <a:t>77.0</a:t>
             </a:r>
             <a:endParaRPr lang="en-US" sz="900" dirty="0"/>
           </a:p>
@@ -13061,7 +12490,7 @@
                 <a:ea typeface="メイリオ" pitchFamily="34" charset="-122"/>
                 <a:cs typeface="メイリオ" pitchFamily="34" charset="-120"/>
               </a:rPr>
-              <a:t>64.5</a:t>
+              <a:t>67.2</a:t>
             </a:r>
             <a:endParaRPr lang="en-US" sz="900" dirty="0"/>
           </a:p>
@@ -13178,7 +12607,7 @@
                 <a:ea typeface="メイリオ" pitchFamily="34" charset="-122"/>
                 <a:cs typeface="メイリオ" pitchFamily="34" charset="-120"/>
               </a:rPr>
-              <a:t>64.5</a:t>
+              <a:t>67.2</a:t>
             </a:r>
             <a:endParaRPr lang="en-US" sz="900" dirty="0"/>
           </a:p>
@@ -13295,7 +12724,7 @@
                 <a:ea typeface="メイリオ" pitchFamily="34" charset="-122"/>
                 <a:cs typeface="メイリオ" pitchFamily="34" charset="-120"/>
               </a:rPr>
-              <a:t>64.5</a:t>
+              <a:t>67.2</a:t>
             </a:r>
             <a:endParaRPr lang="en-US" sz="900" dirty="0"/>
           </a:p>
@@ -13437,7 +12866,7 @@
                 <a:ea typeface="メイリオ" pitchFamily="34" charset="-122"/>
                 <a:cs typeface="メイリオ" pitchFamily="34" charset="-120"/>
               </a:rPr>
-              <a:t>12.9</a:t>
+              <a:t>12.0</a:t>
             </a:r>
             <a:endParaRPr lang="en-US" sz="900" dirty="0"/>
           </a:p>
@@ -13470,13 +12899,13 @@
             <a:r>
               <a:rPr lang="en-US" sz="900" b="1" dirty="0">
                 <a:solidFill>
-                  <a:srgbClr val="1A1A1A"/>
-                </a:solidFill>
-                <a:latin typeface="メイリオ" pitchFamily="34" charset="0"/>
-                <a:ea typeface="メイリオ" pitchFamily="34" charset="-122"/>
-                <a:cs typeface="メイリオ" pitchFamily="34" charset="-120"/>
-              </a:rPr>
-              <a:t>8.9</a:t>
+                  <a:srgbClr val="6E6E6E"/>
+                </a:solidFill>
+                <a:latin typeface="メイリオ" pitchFamily="34" charset="0"/>
+                <a:ea typeface="メイリオ" pitchFamily="34" charset="-122"/>
+                <a:cs typeface="メイリオ" pitchFamily="34" charset="-120"/>
+              </a:rPr>
+              <a:t>▲2.5</a:t>
             </a:r>
             <a:endParaRPr lang="en-US" sz="900" dirty="0"/>
           </a:p>
@@ -13515,7 +12944,7 @@
                 <a:ea typeface="メイリオ" pitchFamily="34" charset="-122"/>
                 <a:cs typeface="メイリオ" pitchFamily="34" charset="-120"/>
               </a:rPr>
-              <a:t>12.9</a:t>
+              <a:t>12.0</a:t>
             </a:r>
             <a:endParaRPr lang="en-US" sz="900" dirty="0"/>
           </a:p>
@@ -13554,7 +12983,7 @@
                 <a:ea typeface="メイリオ" pitchFamily="34" charset="-122"/>
                 <a:cs typeface="メイリオ" pitchFamily="34" charset="-120"/>
               </a:rPr>
-              <a:t>12.9</a:t>
+              <a:t>12.0</a:t>
             </a:r>
             <a:endParaRPr lang="en-US" sz="900" dirty="0"/>
           </a:p>
@@ -13593,7 +13022,7 @@
                 <a:ea typeface="メイリオ" pitchFamily="34" charset="-122"/>
                 <a:cs typeface="メイリオ" pitchFamily="34" charset="-120"/>
               </a:rPr>
-              <a:t>10.9</a:t>
+              <a:t>7.4</a:t>
             </a:r>
             <a:endParaRPr lang="en-US" sz="900" dirty="0"/>
           </a:p>
@@ -13632,7 +13061,7 @@
                 <a:ea typeface="メイリオ" pitchFamily="34" charset="-122"/>
                 <a:cs typeface="メイリオ" pitchFamily="34" charset="-120"/>
               </a:rPr>
-              <a:t>45.9</a:t>
+              <a:t>23.0</a:t>
             </a:r>
             <a:endParaRPr lang="en-US" sz="900" dirty="0"/>
           </a:p>
@@ -13671,7 +13100,7 @@
                 <a:ea typeface="メイリオ" pitchFamily="34" charset="-122"/>
                 <a:cs typeface="メイリオ" pitchFamily="34" charset="-120"/>
               </a:rPr>
-              <a:t>12.9</a:t>
+              <a:t>12.0</a:t>
             </a:r>
             <a:endParaRPr lang="en-US" sz="900" dirty="0"/>
           </a:p>
@@ -13710,7 +13139,7 @@
                 <a:ea typeface="メイリオ" pitchFamily="34" charset="-122"/>
                 <a:cs typeface="メイリオ" pitchFamily="34" charset="-120"/>
               </a:rPr>
-              <a:t>10.9</a:t>
+              <a:t>7.4</a:t>
             </a:r>
             <a:endParaRPr lang="en-US" sz="900" dirty="0"/>
           </a:p>
@@ -13749,7 +13178,7 @@
                 <a:ea typeface="メイリオ" pitchFamily="34" charset="-122"/>
                 <a:cs typeface="メイリオ" pitchFamily="34" charset="-120"/>
               </a:rPr>
-              <a:t>12.9</a:t>
+              <a:t>12.0</a:t>
             </a:r>
             <a:endParaRPr lang="en-US" sz="900" dirty="0"/>
           </a:p>
@@ -13788,7 +13217,7 @@
                 <a:ea typeface="メイリオ" pitchFamily="34" charset="-122"/>
                 <a:cs typeface="メイリオ" pitchFamily="34" charset="-120"/>
               </a:rPr>
-              <a:t>12.9</a:t>
+              <a:t>12.0</a:t>
             </a:r>
             <a:endParaRPr lang="en-US" sz="900" dirty="0"/>
           </a:p>
@@ -13827,7 +13256,7 @@
                 <a:ea typeface="メイリオ" pitchFamily="34" charset="-122"/>
                 <a:cs typeface="メイリオ" pitchFamily="34" charset="-120"/>
               </a:rPr>
-              <a:t>10.9</a:t>
+              <a:t>7.4</a:t>
             </a:r>
             <a:endParaRPr lang="en-US" sz="900" dirty="0"/>
           </a:p>
@@ -13866,7 +13295,7 @@
                 <a:ea typeface="メイリオ" pitchFamily="34" charset="-122"/>
                 <a:cs typeface="メイリオ" pitchFamily="34" charset="-120"/>
               </a:rPr>
-              <a:t>23.9</a:t>
+              <a:t>23.0</a:t>
             </a:r>
             <a:endParaRPr lang="en-US" sz="900" dirty="0"/>
           </a:p>
@@ -14501,7 +13930,7 @@
                 <a:ea typeface="メイリオ" pitchFamily="34" charset="-122"/>
                 <a:cs typeface="メイリオ" pitchFamily="34" charset="-120"/>
               </a:rPr>
-              <a:t>10.3</a:t>
+              <a:t>9.3</a:t>
             </a:r>
             <a:endParaRPr lang="en-US" sz="900" dirty="0"/>
           </a:p>
@@ -14534,13 +13963,13 @@
             <a:r>
               <a:rPr lang="en-US" sz="900" b="1" dirty="0">
                 <a:solidFill>
-                  <a:srgbClr val="1A1A1A"/>
-                </a:solidFill>
-                <a:latin typeface="メイリオ" pitchFamily="34" charset="0"/>
-                <a:ea typeface="メイリオ" pitchFamily="34" charset="-122"/>
-                <a:cs typeface="メイリオ" pitchFamily="34" charset="-120"/>
-              </a:rPr>
-              <a:t>6.2</a:t>
+                  <a:srgbClr val="6E6E6E"/>
+                </a:solidFill>
+                <a:latin typeface="メイリオ" pitchFamily="34" charset="0"/>
+                <a:ea typeface="メイリオ" pitchFamily="34" charset="-122"/>
+                <a:cs typeface="メイリオ" pitchFamily="34" charset="-120"/>
+              </a:rPr>
+              <a:t>▲5.2</a:t>
             </a:r>
             <a:endParaRPr lang="en-US" sz="900" dirty="0"/>
           </a:p>
@@ -14579,7 +14008,7 @@
                 <a:ea typeface="メイリオ" pitchFamily="34" charset="-122"/>
                 <a:cs typeface="メイリオ" pitchFamily="34" charset="-120"/>
               </a:rPr>
-              <a:t>10.3</a:t>
+              <a:t>9.3</a:t>
             </a:r>
             <a:endParaRPr lang="en-US" sz="900" dirty="0"/>
           </a:p>
@@ -14618,7 +14047,7 @@
                 <a:ea typeface="メイリオ" pitchFamily="34" charset="-122"/>
                 <a:cs typeface="メイリオ" pitchFamily="34" charset="-120"/>
               </a:rPr>
-              <a:t>10.3</a:t>
+              <a:t>9.3</a:t>
             </a:r>
             <a:endParaRPr lang="en-US" sz="900" dirty="0"/>
           </a:p>
@@ -14657,7 +14086,7 @@
                 <a:ea typeface="メイリオ" pitchFamily="34" charset="-122"/>
                 <a:cs typeface="メイリオ" pitchFamily="34" charset="-120"/>
               </a:rPr>
-              <a:t>8.3</a:t>
+              <a:t>4.7</a:t>
             </a:r>
             <a:endParaRPr lang="en-US" sz="900" dirty="0"/>
           </a:p>
@@ -14696,7 +14125,7 @@
                 <a:ea typeface="メイリオ" pitchFamily="34" charset="-122"/>
                 <a:cs typeface="メイリオ" pitchFamily="34" charset="-120"/>
               </a:rPr>
-              <a:t>43.3</a:t>
+              <a:t>20.3</a:t>
             </a:r>
             <a:endParaRPr lang="en-US" sz="900" dirty="0"/>
           </a:p>
@@ -14735,7 +14164,7 @@
                 <a:ea typeface="メイリオ" pitchFamily="34" charset="-122"/>
                 <a:cs typeface="メイリオ" pitchFamily="34" charset="-120"/>
               </a:rPr>
-              <a:t>10.3</a:t>
+              <a:t>9.3</a:t>
             </a:r>
             <a:endParaRPr lang="en-US" sz="900" dirty="0"/>
           </a:p>
@@ -14774,7 +14203,7 @@
                 <a:ea typeface="メイリオ" pitchFamily="34" charset="-122"/>
                 <a:cs typeface="メイリオ" pitchFamily="34" charset="-120"/>
               </a:rPr>
-              <a:t>8.3</a:t>
+              <a:t>4.7</a:t>
             </a:r>
             <a:endParaRPr lang="en-US" sz="900" dirty="0"/>
           </a:p>
@@ -14813,7 +14242,7 @@
                 <a:ea typeface="メイリオ" pitchFamily="34" charset="-122"/>
                 <a:cs typeface="メイリオ" pitchFamily="34" charset="-120"/>
               </a:rPr>
-              <a:t>10.3</a:t>
+              <a:t>9.3</a:t>
             </a:r>
             <a:endParaRPr lang="en-US" sz="900" dirty="0"/>
           </a:p>
@@ -14852,7 +14281,7 @@
                 <a:ea typeface="メイリオ" pitchFamily="34" charset="-122"/>
                 <a:cs typeface="メイリオ" pitchFamily="34" charset="-120"/>
               </a:rPr>
-              <a:t>10.3</a:t>
+              <a:t>9.3</a:t>
             </a:r>
             <a:endParaRPr lang="en-US" sz="900" dirty="0"/>
           </a:p>
@@ -14891,7 +14320,7 @@
                 <a:ea typeface="メイリオ" pitchFamily="34" charset="-122"/>
                 <a:cs typeface="メイリオ" pitchFamily="34" charset="-120"/>
               </a:rPr>
-              <a:t>8.3</a:t>
+              <a:t>4.7</a:t>
             </a:r>
             <a:endParaRPr lang="en-US" sz="900" dirty="0"/>
           </a:p>
@@ -14930,7 +14359,7 @@
                 <a:ea typeface="メイリオ" pitchFamily="34" charset="-122"/>
                 <a:cs typeface="メイリオ" pitchFamily="34" charset="-120"/>
               </a:rPr>
-              <a:t>21.3</a:t>
+              <a:t>20.3</a:t>
             </a:r>
             <a:endParaRPr lang="en-US" sz="900" dirty="0"/>
           </a:p>
@@ -15033,7 +14462,7 @@
                 <a:ea typeface="メイリオ" pitchFamily="34" charset="-122"/>
                 <a:cs typeface="メイリオ" pitchFamily="34" charset="-120"/>
               </a:rPr>
-              <a:t>40.3</a:t>
+              <a:t>39.3</a:t>
             </a:r>
             <a:endParaRPr lang="en-US" sz="900" dirty="0"/>
           </a:p>
@@ -15072,7 +14501,7 @@
                 <a:ea typeface="メイリオ" pitchFamily="34" charset="-122"/>
                 <a:cs typeface="メイリオ" pitchFamily="34" charset="-120"/>
               </a:rPr>
-              <a:t>46.5</a:t>
+              <a:t>34.2</a:t>
             </a:r>
             <a:endParaRPr lang="en-US" sz="900" dirty="0"/>
           </a:p>
@@ -15111,7 +14540,7 @@
                 <a:ea typeface="メイリオ" pitchFamily="34" charset="-122"/>
                 <a:cs typeface="メイリオ" pitchFamily="34" charset="-120"/>
               </a:rPr>
-              <a:t>56.8</a:t>
+              <a:t>43.5</a:t>
             </a:r>
             <a:endParaRPr lang="en-US" sz="900" dirty="0"/>
           </a:p>
@@ -15150,7 +14579,7 @@
                 <a:ea typeface="メイリオ" pitchFamily="34" charset="-122"/>
                 <a:cs typeface="メイリオ" pitchFamily="34" charset="-120"/>
               </a:rPr>
-              <a:t>67.0</a:t>
+              <a:t>52.9</a:t>
             </a:r>
             <a:endParaRPr lang="en-US" sz="900" dirty="0"/>
           </a:p>
@@ -15189,7 +14618,7 @@
                 <a:ea typeface="メイリオ" pitchFamily="34" charset="-122"/>
                 <a:cs typeface="メイリオ" pitchFamily="34" charset="-120"/>
               </a:rPr>
-              <a:t>75.3</a:t>
+              <a:t>57.6</a:t>
             </a:r>
             <a:endParaRPr lang="en-US" sz="900" dirty="0"/>
           </a:p>
@@ -15228,7 +14657,7 @@
                 <a:ea typeface="メイリオ" pitchFamily="34" charset="-122"/>
                 <a:cs typeface="メイリオ" pitchFamily="34" charset="-120"/>
               </a:rPr>
-              <a:t>118.6</a:t>
+              <a:t>77.9</a:t>
             </a:r>
             <a:endParaRPr lang="en-US" sz="900" dirty="0"/>
           </a:p>
@@ -15267,7 +14696,7 @@
                 <a:ea typeface="メイリオ" pitchFamily="34" charset="-122"/>
                 <a:cs typeface="メイリオ" pitchFamily="34" charset="-120"/>
               </a:rPr>
-              <a:t>128.8</a:t>
+              <a:t>87.3</a:t>
             </a:r>
             <a:endParaRPr lang="en-US" sz="900" dirty="0"/>
           </a:p>
@@ -15306,7 +14735,7 @@
                 <a:ea typeface="メイリオ" pitchFamily="34" charset="-122"/>
                 <a:cs typeface="メイリオ" pitchFamily="34" charset="-120"/>
               </a:rPr>
-              <a:t>137.1</a:t>
+              <a:t>92.0</a:t>
             </a:r>
             <a:endParaRPr lang="en-US" sz="900" dirty="0"/>
           </a:p>
@@ -15345,7 +14774,7 @@
                 <a:ea typeface="メイリオ" pitchFamily="34" charset="-122"/>
                 <a:cs typeface="メイリオ" pitchFamily="34" charset="-120"/>
               </a:rPr>
-              <a:t>147.3</a:t>
+              <a:t>101.3</a:t>
             </a:r>
             <a:endParaRPr lang="en-US" sz="900" dirty="0"/>
           </a:p>
@@ -15384,7 +14813,7 @@
                 <a:ea typeface="メイリオ" pitchFamily="34" charset="-122"/>
                 <a:cs typeface="メイリオ" pitchFamily="34" charset="-120"/>
               </a:rPr>
-              <a:t>157.6</a:t>
+              <a:t>110.7</a:t>
             </a:r>
             <a:endParaRPr lang="en-US" sz="900" dirty="0"/>
           </a:p>
@@ -15423,7 +14852,7 @@
                 <a:ea typeface="メイリオ" pitchFamily="34" charset="-122"/>
                 <a:cs typeface="メイリオ" pitchFamily="34" charset="-120"/>
               </a:rPr>
-              <a:t>165.9</a:t>
+              <a:t>115.4</a:t>
             </a:r>
             <a:endParaRPr lang="en-US" sz="900" dirty="0"/>
           </a:p>
@@ -15462,7 +14891,7 @@
                 <a:ea typeface="メイリオ" pitchFamily="34" charset="-122"/>
                 <a:cs typeface="メイリオ" pitchFamily="34" charset="-120"/>
               </a:rPr>
-              <a:t>187.1</a:t>
+              <a:t>135.8</a:t>
             </a:r>
             <a:endParaRPr lang="en-US" sz="900" dirty="0"/>
           </a:p>
@@ -15535,7 +14964,7 @@
                 <a:ea typeface="メイリオ" pitchFamily="34" charset="-122"/>
                 <a:cs typeface="メイリオ" pitchFamily="34" charset="-120"/>
               </a:rPr>
-              <a:t>最も薄いのは期首直後</a:t>
+              <a:t>最も薄いのは2026年11月</a:t>
             </a:r>
             <a:endParaRPr lang="en-US" sz="1200" dirty="0"/>
           </a:p>
@@ -15574,7 +15003,7 @@
                 <a:ea typeface="メイリオ" pitchFamily="34" charset="-122"/>
                 <a:cs typeface="メイリオ" pitchFamily="34" charset="-120"/>
               </a:rPr>
-              <a:t>期首30.0百万円に対し、期中最低は2026/10末の40.3百万円。11月にFY2026分の消費税確定納付3.6百万円、2・5・8月に中間納付2.0百万円を織り込んでも、以降は毎月プラスで積み上がり期末187.1百万円。</a:t>
+              <a:t>期首30.0百万円に対し、期中最低は2026/11末の34.2百万円。私募ファンドで課税売上が増えたため、FY2026分の確定納付は14.1百万円、中間納付も1回4.6百万円に増えます。それでも以降は毎月プラスで積み上がり、期末135.8百万円。</a:t>
             </a:r>
             <a:endParaRPr lang="en-US" sz="1050" dirty="0"/>
           </a:p>
@@ -15814,7 +15243,7 @@
                 <a:ea typeface="メイリオ" pitchFamily="34" charset="-122"/>
                 <a:cs typeface="メイリオ" pitchFamily="34" charset="-120"/>
               </a:rPr>
-              <a:t>＋187.1</a:t>
+              <a:t>＋135.8</a:t>
             </a:r>
             <a:endParaRPr lang="en-US" sz="850" dirty="0"/>
           </a:p>
@@ -15853,7 +15282,7 @@
                 <a:ea typeface="メイリオ" pitchFamily="34" charset="-122"/>
                 <a:cs typeface="メイリオ" pitchFamily="34" charset="-120"/>
               </a:rPr>
-              <a:t>＋40.3</a:t>
+              <a:t>＋34.2</a:t>
             </a:r>
             <a:endParaRPr lang="en-US" sz="850" dirty="0"/>
           </a:p>
@@ -15956,7 +15385,7 @@
                 <a:ea typeface="メイリオ" pitchFamily="34" charset="-122"/>
                 <a:cs typeface="メイリオ" pitchFamily="34" charset="-120"/>
               </a:rPr>
-              <a:t>＋177.8</a:t>
+              <a:t>＋126.5</a:t>
             </a:r>
             <a:endParaRPr lang="en-US" sz="850" dirty="0"/>
           </a:p>
@@ -15995,7 +15424,7 @@
                 <a:ea typeface="メイリオ" pitchFamily="34" charset="-122"/>
                 <a:cs typeface="メイリオ" pitchFamily="34" charset="-120"/>
               </a:rPr>
-              <a:t>＋31.0</a:t>
+              <a:t>＋24.9</a:t>
             </a:r>
             <a:endParaRPr lang="en-US" sz="850" dirty="0"/>
           </a:p>
@@ -16059,7 +15488,7 @@
                 <a:ea typeface="メイリオ" pitchFamily="34" charset="-122"/>
                 <a:cs typeface="メイリオ" pitchFamily="34" charset="-120"/>
               </a:rPr>
-              <a:t>C. 一時収益44百万円が未入金</a:t>
+              <a:t>C. 一時収益22百万円が未入金</a:t>
             </a:r>
             <a:endParaRPr lang="en-US" sz="850" dirty="0"/>
           </a:p>
@@ -16098,7 +15527,7 @@
                 <a:ea typeface="メイリオ" pitchFamily="34" charset="-122"/>
                 <a:cs typeface="メイリオ" pitchFamily="34" charset="-120"/>
               </a:rPr>
-              <a:t>＋143.1</a:t>
+              <a:t>＋113.8</a:t>
             </a:r>
             <a:endParaRPr lang="en-US" sz="850" dirty="0"/>
           </a:p>
@@ -16131,13 +15560,13 @@
             <a:r>
               <a:rPr lang="en-US" sz="850" dirty="0">
                 <a:solidFill>
-                  <a:srgbClr val="6E6E6E"/>
-                </a:solidFill>
-                <a:latin typeface="メイリオ" pitchFamily="34" charset="0"/>
-                <a:ea typeface="メイリオ" pitchFamily="34" charset="-122"/>
-                <a:cs typeface="メイリオ" pitchFamily="34" charset="-120"/>
-              </a:rPr>
-              <a:t>▲3.7</a:t>
+                  <a:srgbClr val="1A1A1A"/>
+                </a:solidFill>
+                <a:latin typeface="メイリオ" pitchFamily="34" charset="0"/>
+                <a:ea typeface="メイリオ" pitchFamily="34" charset="-122"/>
+                <a:cs typeface="メイリオ" pitchFamily="34" charset="-120"/>
+              </a:rPr>
+              <a:t>＋12.2</a:t>
             </a:r>
             <a:endParaRPr lang="en-US" sz="850" dirty="0"/>
           </a:p>
@@ -16240,7 +15669,7 @@
                 <a:ea typeface="メイリオ" pitchFamily="34" charset="-122"/>
                 <a:cs typeface="メイリオ" pitchFamily="34" charset="-120"/>
               </a:rPr>
-              <a:t>▲188.4</a:t>
+              <a:t>▲239.8</a:t>
             </a:r>
             <a:endParaRPr lang="en-US" sz="850" dirty="0"/>
           </a:p>
@@ -16279,7 +15708,7 @@
                 <a:ea typeface="メイリオ" pitchFamily="34" charset="-122"/>
                 <a:cs typeface="メイリオ" pitchFamily="34" charset="-120"/>
               </a:rPr>
-              <a:t>▲335.3</a:t>
+              <a:t>▲341.4</a:t>
             </a:r>
             <a:endParaRPr lang="en-US" sz="850" dirty="0"/>
           </a:p>
@@ -16382,7 +15811,7 @@
                 <a:ea typeface="メイリオ" pitchFamily="34" charset="-122"/>
                 <a:cs typeface="メイリオ" pitchFamily="34" charset="-120"/>
               </a:rPr>
-              <a:t>＋517.1</a:t>
+              <a:t>＋465.8</a:t>
             </a:r>
             <a:endParaRPr lang="en-US" sz="850" dirty="0"/>
           </a:p>
@@ -16421,7 +15850,7 @@
                 <a:ea typeface="メイリオ" pitchFamily="34" charset="-122"/>
                 <a:cs typeface="メイリオ" pitchFamily="34" charset="-120"/>
               </a:rPr>
-              <a:t>＋370.3</a:t>
+              <a:t>＋364.2</a:t>
             </a:r>
             <a:endParaRPr lang="en-US" sz="850" dirty="0"/>
           </a:p>
@@ -16460,7 +15889,7 @@
                 <a:ea typeface="メイリオ" pitchFamily="34" charset="-122"/>
                 <a:cs typeface="メイリオ" pitchFamily="34" charset="-120"/>
               </a:rPr>
-              <a:t>期首現預金30百万円（2026/09末にみずほ銀行へ200百万円返済後）。消費税はFY2026実績から算定（確定3.6＋中間2.0×3回＝年9.6百万円）。</a:t>
+              <a:t>期首現預金30百万円（2026/09末にみずほ銀行へ200百万円返済後）。消費税はFY2026の修正後実績から算定（確定14.1＋中間4.6×3回＝年28.0百万円）。</a:t>
             </a:r>
             <a:endParaRPr lang="en-US" sz="850" dirty="0"/>
           </a:p>
@@ -17409,7 +16838,7 @@
                 <a:ea typeface="メイリオ" pitchFamily="34" charset="-122"/>
                 <a:cs typeface="メイリオ" pitchFamily="34" charset="-120"/>
               </a:rPr>
-              <a:t>＋210.4</a:t>
+              <a:t>＋180.4</a:t>
             </a:r>
             <a:endParaRPr lang="en-US" sz="4200" dirty="0"/>
           </a:p>
@@ -17549,7 +16978,7 @@
                 <a:ea typeface="メイリオ" pitchFamily="34" charset="-122"/>
                 <a:cs typeface="メイリオ" pitchFamily="34" charset="-120"/>
               </a:rPr>
-              <a:t>1,163.0</a:t>
+              <a:t>1,133.0</a:t>
             </a:r>
             <a:endParaRPr lang="en-US" sz="1150" dirty="0"/>
           </a:p>
@@ -17627,7 +17056,7 @@
                 <a:ea typeface="メイリオ" pitchFamily="34" charset="-122"/>
                 <a:cs typeface="メイリオ" pitchFamily="34" charset="-120"/>
               </a:rPr>
-              <a:t>525.5</a:t>
+              <a:t>495.5</a:t>
             </a:r>
             <a:endParaRPr lang="en-US" sz="1150" dirty="0"/>
           </a:p>
@@ -17705,7 +17134,7 @@
                 <a:ea typeface="メイリオ" pitchFamily="34" charset="-122"/>
                 <a:cs typeface="メイリオ" pitchFamily="34" charset="-120"/>
               </a:rPr>
-              <a:t>＋225.4</a:t>
+              <a:t>＋195.4</a:t>
             </a:r>
             <a:endParaRPr lang="en-US" sz="1150" dirty="0"/>
           </a:p>
@@ -17783,7 +17212,7 @@
                 <a:ea typeface="メイリオ" pitchFamily="34" charset="-122"/>
                 <a:cs typeface="メイリオ" pitchFamily="34" charset="-120"/>
               </a:rPr>
-              <a:t>＋370.3</a:t>
+              <a:t>＋364.2</a:t>
             </a:r>
             <a:endParaRPr lang="en-US" sz="1150" dirty="0"/>
           </a:p>
@@ -17861,7 +17290,7 @@
                 <a:ea typeface="メイリオ" pitchFamily="34" charset="-122"/>
                 <a:cs typeface="メイリオ" pitchFamily="34" charset="-120"/>
               </a:rPr>
-              <a:t>粗利率30%はFY2025 26.8%・FY2026 32.4%の実績水準。販管費はプランDと同額で据置き、既存人員で対応可能な範囲としています。</a:t>
+              <a:t>粗利率30%はFY2025 26.8%・FY2026 32.4%の実績水準。販管費はプランDと同額で据置き。繰越欠損金147.2百万円を超える所得に法人税11.3百万円が生じ、当期純利益は169.1百万円です。</a:t>
             </a:r>
             <a:endParaRPr lang="en-US" sz="850" dirty="0"/>
           </a:p>
@@ -18529,7 +17958,7 @@
                 <a:ea typeface="メイリオ" pitchFamily="34" charset="-122"/>
                 <a:cs typeface="メイリオ" pitchFamily="34" charset="-120"/>
               </a:rPr>
-              <a:t>約252百万円</a:t>
+              <a:t>約147百万円</a:t>
             </a:r>
             <a:endParaRPr lang="en-US" sz="2000" dirty="0"/>
           </a:p>
@@ -18568,7 +17997,7 @@
                 <a:ea typeface="メイリオ" pitchFamily="34" charset="-122"/>
                 <a:cs typeface="メイリオ" pitchFamily="34" charset="-120"/>
               </a:rPr>
-              <a:t>FY2025 ▲127.4 ＋ FY2026 ▲124.8。資本金1,000万円の中小法人は所得の100%控除が可能。FY2027の黒字に法人税は実質発生せず、税引前＝税引後でキャッシュに残ります。</a:t>
+              <a:t>FY2025 ▲127.4 ＋ FY2026 ▲19.8。私募ファンドの計上で今期の欠損が縮小しました。プランDは実質非課税ですが、プランEでは超過分に法人税11.3百万円が生じます。</a:t>
             </a:r>
             <a:endParaRPr lang="en-US" sz="950" dirty="0"/>
           </a:p>
@@ -19151,7 +18580,7 @@
                 <a:ea typeface="メイリオ" pitchFamily="34" charset="-122"/>
                 <a:cs typeface="メイリオ" pitchFamily="34" charset="-120"/>
               </a:rPr>
-              <a:t>グループ内取引 92.5百万円</a:t>
+              <a:t>グループ内取引 82.5百万円</a:t>
             </a:r>
             <a:endParaRPr lang="en-US" sz="1250" dirty="0"/>
           </a:p>
@@ -19190,7 +18619,7 @@
                 <a:ea typeface="メイリオ" pitchFamily="34" charset="-122"/>
                 <a:cs typeface="メイリオ" pitchFamily="34" charset="-120"/>
               </a:rPr>
-              <a:t>上乗せ案件132.5百万円のうち92.5百万円はグループ会社からのコンサルティング料。</a:t>
+              <a:t>上乗せ案件102.5百万円のうち82.5百万円はグループ会社からのコンサルティング料。</a:t>
             </a:r>
             <a:endParaRPr lang="en-US" sz="1000" dirty="0"/>
           </a:p>
@@ -19654,7 +19083,7 @@
                 <a:ea typeface="メイリオ" pitchFamily="34" charset="-122"/>
                 <a:cs typeface="メイリオ" pitchFamily="34" charset="-120"/>
               </a:rPr>
-              <a:t>2026/09末のみずほ銀行200百万円返済後の手元は薄く、期首直後が最も緊張します。</a:t>
+              <a:t>2026/09末のみずほ銀行200百万円返済後の手元は薄く、消費税の確定納付が重なる2026年11月が最も緊張します。</a:t>
             </a:r>
             <a:endParaRPr lang="en-US" sz="1000" dirty="0"/>
           </a:p>
@@ -19715,7 +19144,7 @@
                 <a:ea typeface="メイリオ" pitchFamily="34" charset="-122"/>
                 <a:cs typeface="メイリオ" pitchFamily="34" charset="-120"/>
               </a:rPr>
-              <a:t>短期借入162百万円の借換継続をお願いできれば、期中最低40.3百万円で通期の資金繰りは成立します。</a:t>
+              <a:t>短期借入162百万円の借換継続をお願いできれば、期中最低34.2百万円で通期の資金繰りは成立します。</a:t>
             </a:r>
             <a:endParaRPr lang="en-US" sz="1000" dirty="0"/>
           </a:p>
@@ -20804,7 +20233,7 @@
                 <a:ea typeface="メイリオ" pitchFamily="34" charset="-122"/>
                 <a:cs typeface="メイリオ" pitchFamily="34" charset="-120"/>
               </a:rPr>
-              <a:t>FY2026 見込</a:t>
+              <a:t>FY2026 見込（実力値）</a:t>
             </a:r>
             <a:endParaRPr lang="en-US" sz="1050" dirty="0"/>
           </a:p>
@@ -21063,7 +20492,7 @@
                 <a:ea typeface="メイリオ" pitchFamily="34" charset="-122"/>
                 <a:cs typeface="メイリオ" pitchFamily="34" charset="-120"/>
               </a:rPr>
-              <a:t>863.0</a:t>
+              <a:t>833.0</a:t>
             </a:r>
             <a:endParaRPr lang="en-US" sz="1050" dirty="0"/>
           </a:p>
@@ -21102,7 +20531,7 @@
                 <a:ea typeface="メイリオ" pitchFamily="34" charset="-122"/>
                 <a:cs typeface="メイリオ" pitchFamily="34" charset="-120"/>
               </a:rPr>
-              <a:t>435.5</a:t>
+              <a:t>405.5</a:t>
             </a:r>
             <a:endParaRPr lang="en-US" sz="1050" dirty="0"/>
           </a:p>
@@ -21141,7 +20570,7 @@
                 <a:ea typeface="メイリオ" pitchFamily="34" charset="-122"/>
                 <a:cs typeface="メイリオ" pitchFamily="34" charset="-120"/>
               </a:rPr>
-              <a:t>50.5%</a:t>
+              <a:t>48.7%</a:t>
             </a:r>
             <a:endParaRPr lang="en-US" sz="1050" dirty="0"/>
           </a:p>
@@ -21283,7 +20712,7 @@
                 <a:ea typeface="メイリオ" pitchFamily="34" charset="-122"/>
                 <a:cs typeface="メイリオ" pitchFamily="34" charset="-120"/>
               </a:rPr>
-              <a:t>1,163.0</a:t>
+              <a:t>1,133.0</a:t>
             </a:r>
             <a:endParaRPr lang="en-US" sz="1050" dirty="0"/>
           </a:p>
@@ -21322,7 +20751,7 @@
                 <a:ea typeface="メイリオ" pitchFamily="34" charset="-122"/>
                 <a:cs typeface="メイリオ" pitchFamily="34" charset="-120"/>
               </a:rPr>
-              <a:t>525.5</a:t>
+              <a:t>495.5</a:t>
             </a:r>
             <a:endParaRPr lang="en-US" sz="1050" dirty="0"/>
           </a:p>
@@ -21361,7 +20790,7 @@
                 <a:ea typeface="メイリオ" pitchFamily="34" charset="-122"/>
                 <a:cs typeface="メイリオ" pitchFamily="34" charset="-120"/>
               </a:rPr>
-              <a:t>45.2%</a:t>
+              <a:t>43.7%</a:t>
             </a:r>
             <a:endParaRPr lang="en-US" sz="1050" dirty="0"/>
           </a:p>
@@ -21697,7 +21126,7 @@
                 <a:ea typeface="メイリオ" pitchFamily="34" charset="-122"/>
                 <a:cs typeface="メイリオ" pitchFamily="34" charset="-120"/>
               </a:rPr>
-              <a:t>プランD（経常＋120.4百万円）は過去実績の範囲内で届く水準。Dを本線とし、私募とオークションを回してE（＋210.4）を目指します。</a:t>
+              <a:t>プランD（経常＋90.4百万円）は過去実績の範囲内で届く水準。Dを本線とし、私募とオークションを回してE（＋180.4）を目指します。</a:t>
             </a:r>
             <a:endParaRPr lang="en-US" sz="1150" dirty="0"/>
           </a:p>
@@ -21736,7 +21165,7 @@
                 <a:ea typeface="メイリオ" pitchFamily="34" charset="-122"/>
                 <a:cs typeface="メイリオ" pitchFamily="34" charset="-120"/>
               </a:rPr>
-              <a:t>「既存事業／2期平均」＝各期・各プランの既存事業売上が過去2期平均730.5百万円に占める比率。差額売上の粗利率は30%（FY2025 26.8%・FY2026 32.4%の水準）。</a:t>
+              <a:t>FY2026は私募ファンド600百万円と前倒し30百万円を除いた実力値。これらを含む修正後の売上高は1,338.2百万円ですが、いずれも一過性のため2期平均からは除外しています。</a:t>
             </a:r>
             <a:endParaRPr lang="en-US" sz="850" dirty="0"/>
           </a:p>
@@ -21925,7 +21354,7 @@
                 <a:ea typeface="メイリオ" pitchFamily="34" charset="-122"/>
                 <a:cs typeface="メイリオ" pitchFamily="34" charset="-120"/>
               </a:rPr>
-              <a:t>FY2026の未達は一過性と期ズレ</a:t>
+              <a:t>FY2026は営業損益がほぼ均衡まで回復</a:t>
             </a:r>
             <a:endParaRPr lang="en-US" sz="1550" dirty="0"/>
           </a:p>
@@ -21964,7 +21393,7 @@
                 <a:ea typeface="メイリオ" pitchFamily="34" charset="-122"/>
                 <a:cs typeface="メイリオ" pitchFamily="34" charset="-120"/>
               </a:rPr>
-              <a:t>最大要因はSBI証券との公募ファンドの大幅遅延（粗利200百万円超）。飲食3店舗の撤退は2026年3月に完了済み。</a:t>
+              <a:t>9月末の私募ファンド3号・4号の組成による。最大の未達要因である公募ファンドの遅延は解消していません。</a:t>
             </a:r>
             <a:endParaRPr lang="en-US" sz="1100" dirty="0"/>
           </a:p>
@@ -22375,7 +21804,7 @@
                 <a:ea typeface="メイリオ" pitchFamily="34" charset="-122"/>
                 <a:cs typeface="メイリオ" pitchFamily="34" charset="-120"/>
               </a:rPr>
-              <a:t>Dは売上863.0百万円・経常＋120.4百万円で過去2期平均そのもの。Eは＋210.4百万円。</a:t>
+              <a:t>Dは売上833.0百万円・経常＋90.4百万円で過去2期平均そのもの。Eは＋180.4百万円。</a:t>
             </a:r>
             <a:endParaRPr lang="en-US" sz="1100" dirty="0"/>
           </a:p>
@@ -22703,7 +22132,7 @@
                 <a:ea typeface="メイリオ" pitchFamily="34" charset="-122"/>
                 <a:cs typeface="メイリオ" pitchFamily="34" charset="-120"/>
               </a:rPr>
-              <a:t>FY2026の未達は公募ファンドの遅延と構造改革の費用。改革は実行済みで、効果は2026年4月以降の実績に表れています。</a:t>
+              <a:t>FY2026は9月末の私募ファンド組成で営業損益がほぼ均衡まで回復。FY2027はそこからの積み上げです。</a:t>
             </a:r>
             <a:endParaRPr lang="en-US" sz="1250" dirty="0"/>
           </a:p>
@@ -22835,7 +22264,7 @@
                 <a:ea typeface="メイリオ" pitchFamily="34" charset="-122"/>
                 <a:cs typeface="メイリオ" pitchFamily="34" charset="-120"/>
               </a:rPr>
-              <a:t>未達の最大要因は公募ファンドの遅延</a:t>
+              <a:t>FY2026は営業損益がほぼ均衡まで回復</a:t>
             </a:r>
             <a:endParaRPr lang="en-US" sz="1450" dirty="0"/>
           </a:p>
@@ -22874,7 +22303,7 @@
                 <a:ea typeface="メイリオ" pitchFamily="34" charset="-122"/>
                 <a:cs typeface="メイリオ" pitchFamily="34" charset="-120"/>
               </a:rPr>
-              <a:t>SBI証券との公募が大幅に遅延し、粗利200百万円超が当期に立ちませんでした。</a:t>
+              <a:t>9月末に私募ファンド3号（5億）・4号（1億）の組成が完了。粗利75百万円を計上します。</a:t>
             </a:r>
             <a:endParaRPr lang="en-US" sz="1100" dirty="0"/>
           </a:p>
@@ -23006,7 +22435,7 @@
                 <a:ea typeface="メイリオ" pitchFamily="34" charset="-122"/>
                 <a:cs typeface="メイリオ" pitchFamily="34" charset="-120"/>
               </a:rPr>
-              <a:t>不採算3店舗の撤退は完了</a:t>
+              <a:t>未達の最大要因は公募ファンドの遅延</a:t>
             </a:r>
             <a:endParaRPr lang="en-US" sz="1450" dirty="0"/>
           </a:p>
@@ -23045,7 +22474,7 @@
                 <a:ea typeface="メイリオ" pitchFamily="34" charset="-122"/>
                 <a:cs typeface="メイリオ" pitchFamily="34" charset="-120"/>
               </a:rPr>
-              <a:t>2026年3月で完了。固定費は年103百万円削減済み。1店舗はフラッグシップ店として継続。</a:t>
+              <a:t>SBI証券との公募が大幅に遅延し、粗利200百万円超が当期に立ちませんでした。</a:t>
             </a:r>
             <a:endParaRPr lang="en-US" sz="1100" dirty="0"/>
           </a:p>
@@ -23177,7 +22606,7 @@
                 <a:ea typeface="メイリオ" pitchFamily="34" charset="-122"/>
                 <a:cs typeface="メイリオ" pitchFamily="34" charset="-120"/>
               </a:rPr>
-              <a:t>来期は私募とオークションを主軸に</a:t>
+              <a:t>不採算3店舗の撤退は完了</a:t>
             </a:r>
             <a:endParaRPr lang="en-US" sz="1450" dirty="0"/>
           </a:p>
@@ -23216,7 +22645,7 @@
                 <a:ea typeface="メイリオ" pitchFamily="34" charset="-122"/>
                 <a:cs typeface="メイリオ" pitchFamily="34" charset="-120"/>
               </a:rPr>
-              <a:t>外部要因で動く公募を計画の柱から外します。</a:t>
+              <a:t>2026年3月で完了。固定費は年103百万円削減済み。1店舗はフラッグシップ店として継続。</a:t>
             </a:r>
             <a:endParaRPr lang="en-US" sz="1100" dirty="0"/>
           </a:p>
@@ -23387,7 +22816,7 @@
                 <a:ea typeface="メイリオ" pitchFamily="34" charset="-122"/>
                 <a:cs typeface="メイリオ" pitchFamily="34" charset="-120"/>
               </a:rPr>
-              <a:t>Dの既存事業730.5百万円は過去2期の売上平均そのものです。</a:t>
+              <a:t>Dの既存事業730.5百万円は過去2期の売上平均そのもの。上乗せ案件は102.5百万円。</a:t>
             </a:r>
             <a:endParaRPr lang="en-US" sz="1100" dirty="0"/>
           </a:p>
@@ -23499,7 +22928,7 @@
                 <a:ea typeface="メイリオ" pitchFamily="34" charset="-122"/>
                 <a:cs typeface="メイリオ" pitchFamily="34" charset="-120"/>
               </a:rPr>
-              <a:t>＋135.4</a:t>
+              <a:t>＋105.4</a:t>
             </a:r>
             <a:endParaRPr lang="en-US" sz="4200" dirty="0"/>
           </a:p>
@@ -23577,7 +23006,7 @@
                 <a:ea typeface="メイリオ" pitchFamily="34" charset="-122"/>
                 <a:cs typeface="メイリオ" pitchFamily="34" charset="-120"/>
               </a:rPr>
-              <a:t>経常利益は＋120.4百万円</a:t>
+              <a:t>経常利益は＋90.4百万円</a:t>
             </a:r>
             <a:endParaRPr lang="en-US" sz="1150" dirty="0"/>
           </a:p>
@@ -23695,7 +23124,7 @@
                 <a:ea typeface="メイリオ" pitchFamily="34" charset="-122"/>
                 <a:cs typeface="メイリオ" pitchFamily="34" charset="-120"/>
               </a:rPr>
-              <a:t>863.0百万円</a:t>
+              <a:t>833.0百万円</a:t>
             </a:r>
             <a:endParaRPr lang="en-US" sz="2600" dirty="0"/>
           </a:p>
@@ -23751,7 +23180,7 @@
                 <a:ea typeface="メイリオ" pitchFamily="34" charset="-122"/>
                 <a:cs typeface="メイリオ" pitchFamily="34" charset="-120"/>
               </a:rPr>
-              <a:t>＋上乗せ案件132.5百万円</a:t>
+              <a:t>＋上乗せ案件102.5百万円</a:t>
             </a:r>
             <a:endParaRPr lang="en-US" sz="1100" dirty="0"/>
           </a:p>
@@ -23861,7 +23290,7 @@
                 <a:ea typeface="メイリオ" pitchFamily="34" charset="-122"/>
                 <a:cs typeface="メイリオ" pitchFamily="34" charset="-120"/>
               </a:rPr>
-              <a:t>FY2026が計画に届かなかった理由</a:t>
+              <a:t>FY2026 着地見込みの修正</a:t>
             </a:r>
             <a:endParaRPr lang="en-US" sz="2900" dirty="0"/>
           </a:p>
@@ -23900,7 +23329,7 @@
                 <a:ea typeface="メイリオ" pitchFamily="34" charset="-122"/>
                 <a:cs typeface="メイリオ" pitchFamily="34" charset="-120"/>
               </a:rPr>
-              <a:t>いずれも一過性または期ズレの要因で、既存事業の収益力そのものの毀損ではありません。</a:t>
+              <a:t>2026年9月末に私募ファンド3号・4号の組成が間に合い、営業損益はほぼ均衡まで回復します。</a:t>
             </a:r>
             <a:endParaRPr lang="en-US" sz="1250" dirty="0"/>
           </a:p>
@@ -23915,11 +23344,11 @@
         <p:spPr>
           <a:xfrm>
             <a:off x="594360" y="1463040"/>
-            <a:ext cx="7086600" cy="1298448"/>
+            <a:ext cx="7086600" cy="950976"/>
           </a:xfrm>
           <a:prstGeom prst="roundRect">
             <a:avLst>
-              <a:gd name="adj" fmla="val 3521"/>
+              <a:gd name="adj" fmla="val 4808"/>
             </a:avLst>
           </a:prstGeom>
           <a:solidFill>
@@ -23948,7 +23377,7 @@
         </p:nvSpPr>
         <p:spPr>
           <a:xfrm>
-            <a:off x="868680" y="1938528"/>
+            <a:off x="868680" y="1783080"/>
             <a:ext cx="310896" cy="310896"/>
           </a:xfrm>
           <a:prstGeom prst="ellipse">
@@ -23968,7 +23397,7 @@
         </p:nvSpPr>
         <p:spPr>
           <a:xfrm>
-            <a:off x="868680" y="1938528"/>
+            <a:off x="868680" y="1783080"/>
             <a:ext cx="310896" cy="310896"/>
           </a:xfrm>
           <a:prstGeom prst="rect">
@@ -24007,8 +23436,8 @@
         </p:nvSpPr>
         <p:spPr>
           <a:xfrm>
-            <a:off x="1325880" y="1627632"/>
-            <a:ext cx="4572000" cy="384048"/>
+            <a:off x="1325880" y="1591056"/>
+            <a:ext cx="4572000" cy="329184"/>
           </a:xfrm>
           <a:prstGeom prst="rect">
             <a:avLst/>
@@ -24024,17 +23453,17 @@
               <a:buNone/>
             </a:pPr>
             <a:r>
-              <a:rPr lang="en-US" sz="1300" b="1" dirty="0">
-                <a:solidFill>
-                  <a:srgbClr val="1A1A1A"/>
-                </a:solidFill>
-                <a:latin typeface="メイリオ" pitchFamily="34" charset="0"/>
-                <a:ea typeface="メイリオ" pitchFamily="34" charset="-122"/>
-                <a:cs typeface="メイリオ" pitchFamily="34" charset="-120"/>
-              </a:rPr>
-              <a:t>SBI証券との公募ファンドが大幅に遅延</a:t>
-            </a:r>
-            <a:endParaRPr lang="en-US" sz="1300" dirty="0"/>
+              <a:rPr lang="en-US" sz="1250" b="1" dirty="0">
+                <a:solidFill>
+                  <a:srgbClr val="1A1A1A"/>
+                </a:solidFill>
+                <a:latin typeface="メイリオ" pitchFamily="34" charset="0"/>
+                <a:ea typeface="メイリオ" pitchFamily="34" charset="-122"/>
+                <a:cs typeface="メイリオ" pitchFamily="34" charset="-120"/>
+              </a:rPr>
+              <a:t>私募ファンド3号（売上5億円）</a:t>
+            </a:r>
+            <a:endParaRPr lang="en-US" sz="1250" dirty="0"/>
           </a:p>
         </p:txBody>
       </p:sp>
@@ -24046,8 +23475,8 @@
         </p:nvSpPr>
         <p:spPr>
           <a:xfrm>
-            <a:off x="1325880" y="2029968"/>
-            <a:ext cx="4572000" cy="640080"/>
+            <a:off x="1325880" y="1920240"/>
+            <a:ext cx="4572000" cy="420624"/>
           </a:xfrm>
           <a:prstGeom prst="rect">
             <a:avLst/>
@@ -24071,7 +23500,7 @@
                 <a:ea typeface="メイリオ" pitchFamily="34" charset="-122"/>
                 <a:cs typeface="メイリオ" pitchFamily="34" charset="-120"/>
               </a:rPr>
-              <a:t>計画では売上約700百万円・粗利200百万円超を見込んでいましたが、審査・制度対応の長期化により当期中の組成に至りませんでした。組成時期の主導権が当社側にありません。</a:t>
+              <a:t>9月末に組成完了。粗利60百万円＋販売手数料10百万円。</a:t>
             </a:r>
             <a:endParaRPr lang="en-US" sz="950" dirty="0"/>
           </a:p>
@@ -24085,8 +23514,8 @@
         </p:nvSpPr>
         <p:spPr>
           <a:xfrm>
-            <a:off x="5989320" y="1847088"/>
-            <a:ext cx="1554480" cy="502920"/>
+            <a:off x="5989320" y="1709928"/>
+            <a:ext cx="1554480" cy="457200"/>
           </a:xfrm>
           <a:prstGeom prst="rect">
             <a:avLst/>
@@ -24102,7 +23531,7 @@
               <a:buNone/>
             </a:pPr>
             <a:r>
-              <a:rPr lang="en-US" sz="2100" b="1" dirty="0">
+              <a:rPr lang="en-US" sz="2000" b="1" dirty="0">
                 <a:solidFill>
                   <a:srgbClr val="A98442"/>
                 </a:solidFill>
@@ -24110,9 +23539,9 @@
                 <a:ea typeface="メイリオ" pitchFamily="34" charset="-122"/>
                 <a:cs typeface="メイリオ" pitchFamily="34" charset="-120"/>
               </a:rPr>
-              <a:t>＋200.0</a:t>
-            </a:r>
-            <a:endParaRPr lang="en-US" sz="2100" dirty="0"/>
+              <a:t>＋70.0</a:t>
+            </a:r>
+            <a:endParaRPr lang="en-US" sz="2000" dirty="0"/>
           </a:p>
         </p:txBody>
       </p:sp>
@@ -24124,12 +23553,12 @@
         </p:nvSpPr>
         <p:spPr>
           <a:xfrm>
-            <a:off x="594360" y="2889504"/>
-            <a:ext cx="7086600" cy="1298448"/>
+            <a:off x="594360" y="2542032"/>
+            <a:ext cx="7086600" cy="950976"/>
           </a:xfrm>
           <a:prstGeom prst="roundRect">
             <a:avLst>
-              <a:gd name="adj" fmla="val 3521"/>
+              <a:gd name="adj" fmla="val 4808"/>
             </a:avLst>
           </a:prstGeom>
           <a:solidFill>
@@ -24158,7 +23587,7 @@
         </p:nvSpPr>
         <p:spPr>
           <a:xfrm>
-            <a:off x="868680" y="3364992"/>
+            <a:off x="868680" y="2862072"/>
             <a:ext cx="310896" cy="310896"/>
           </a:xfrm>
           <a:prstGeom prst="ellipse">
@@ -24178,7 +23607,7 @@
         </p:nvSpPr>
         <p:spPr>
           <a:xfrm>
-            <a:off x="868680" y="3364992"/>
+            <a:off x="868680" y="2862072"/>
             <a:ext cx="310896" cy="310896"/>
           </a:xfrm>
           <a:prstGeom prst="rect">
@@ -24217,8 +23646,8 @@
         </p:nvSpPr>
         <p:spPr>
           <a:xfrm>
-            <a:off x="1325880" y="3054096"/>
-            <a:ext cx="4572000" cy="384048"/>
+            <a:off x="1325880" y="2670048"/>
+            <a:ext cx="4572000" cy="329184"/>
           </a:xfrm>
           <a:prstGeom prst="rect">
             <a:avLst/>
@@ -24234,17 +23663,17 @@
               <a:buNone/>
             </a:pPr>
             <a:r>
-              <a:rPr lang="en-US" sz="1300" b="1" dirty="0">
-                <a:solidFill>
-                  <a:srgbClr val="1A1A1A"/>
-                </a:solidFill>
-                <a:latin typeface="メイリオ" pitchFamily="34" charset="0"/>
-                <a:ea typeface="メイリオ" pitchFamily="34" charset="-122"/>
-                <a:cs typeface="メイリオ" pitchFamily="34" charset="-120"/>
-              </a:rPr>
-              <a:t>私募ファンドの期ズレ（原価先行）</a:t>
-            </a:r>
-            <a:endParaRPr lang="en-US" sz="1300" dirty="0"/>
+              <a:rPr lang="en-US" sz="1250" b="1" dirty="0">
+                <a:solidFill>
+                  <a:srgbClr val="1A1A1A"/>
+                </a:solidFill>
+                <a:latin typeface="メイリオ" pitchFamily="34" charset="0"/>
+                <a:ea typeface="メイリオ" pitchFamily="34" charset="-122"/>
+                <a:cs typeface="メイリオ" pitchFamily="34" charset="-120"/>
+              </a:rPr>
+              <a:t>私募ファンド4号（売上1億円）</a:t>
+            </a:r>
+            <a:endParaRPr lang="en-US" sz="1250" dirty="0"/>
           </a:p>
         </p:txBody>
       </p:sp>
@@ -24256,8 +23685,8 @@
         </p:nvSpPr>
         <p:spPr>
           <a:xfrm>
-            <a:off x="1325880" y="3456432"/>
-            <a:ext cx="4572000" cy="640080"/>
+            <a:off x="1325880" y="2999232"/>
+            <a:ext cx="4572000" cy="420624"/>
           </a:xfrm>
           <a:prstGeom prst="rect">
             <a:avLst/>
@@ -24281,7 +23710,7 @@
                 <a:ea typeface="メイリオ" pitchFamily="34" charset="-122"/>
                 <a:cs typeface="メイリオ" pitchFamily="34" charset="-120"/>
               </a:rPr>
-              <a:t>特殊な契約形態のため当期は原価が先に立ち、粗利率は約5%にとどまります。来期の販売実績に応じ、販売手数料を含め30百万円前後の粗利を来期計上します。</a:t>
+              <a:t>同上。粗利率5%。</a:t>
             </a:r>
             <a:endParaRPr lang="en-US" sz="950" dirty="0"/>
           </a:p>
@@ -24295,8 +23724,8 @@
         </p:nvSpPr>
         <p:spPr>
           <a:xfrm>
-            <a:off x="5989320" y="3273552"/>
-            <a:ext cx="1554480" cy="502920"/>
+            <a:off x="5989320" y="2788920"/>
+            <a:ext cx="1554480" cy="457200"/>
           </a:xfrm>
           <a:prstGeom prst="rect">
             <a:avLst/>
@@ -24312,7 +23741,7 @@
               <a:buNone/>
             </a:pPr>
             <a:r>
-              <a:rPr lang="en-US" sz="2100" b="1" dirty="0">
+              <a:rPr lang="en-US" sz="2000" b="1" dirty="0">
                 <a:solidFill>
                   <a:srgbClr val="A98442"/>
                 </a:solidFill>
@@ -24320,9 +23749,9 @@
                 <a:ea typeface="メイリオ" pitchFamily="34" charset="-122"/>
                 <a:cs typeface="メイリオ" pitchFamily="34" charset="-120"/>
               </a:rPr>
-              <a:t>＋30.0</a:t>
-            </a:r>
-            <a:endParaRPr lang="en-US" sz="2100" dirty="0"/>
+              <a:t>＋5.0</a:t>
+            </a:r>
+            <a:endParaRPr lang="en-US" sz="2000" dirty="0"/>
           </a:p>
         </p:txBody>
       </p:sp>
@@ -24334,12 +23763,12 @@
         </p:nvSpPr>
         <p:spPr>
           <a:xfrm>
-            <a:off x="594360" y="4315968"/>
-            <a:ext cx="7086600" cy="1298448"/>
+            <a:off x="594360" y="3621024"/>
+            <a:ext cx="7086600" cy="950976"/>
           </a:xfrm>
           <a:prstGeom prst="roundRect">
             <a:avLst>
-              <a:gd name="adj" fmla="val 3521"/>
+              <a:gd name="adj" fmla="val 4808"/>
             </a:avLst>
           </a:prstGeom>
           <a:solidFill>
@@ -24368,7 +23797,7 @@
         </p:nvSpPr>
         <p:spPr>
           <a:xfrm>
-            <a:off x="868680" y="4791456"/>
+            <a:off x="868680" y="3941064"/>
             <a:ext cx="310896" cy="310896"/>
           </a:xfrm>
           <a:prstGeom prst="ellipse">
@@ -24388,7 +23817,7 @@
         </p:nvSpPr>
         <p:spPr>
           <a:xfrm>
-            <a:off x="868680" y="4791456"/>
+            <a:off x="868680" y="3941064"/>
             <a:ext cx="310896" cy="310896"/>
           </a:xfrm>
           <a:prstGeom prst="rect">
@@ -24427,8 +23856,8 @@
         </p:nvSpPr>
         <p:spPr>
           <a:xfrm>
-            <a:off x="1325880" y="4480560"/>
-            <a:ext cx="4572000" cy="384048"/>
+            <a:off x="1325880" y="3749040"/>
+            <a:ext cx="4572000" cy="329184"/>
           </a:xfrm>
           <a:prstGeom prst="rect">
             <a:avLst/>
@@ -24444,15 +23873,186 @@
               <a:buNone/>
             </a:pPr>
             <a:r>
+              <a:rPr lang="en-US" sz="1250" b="1" dirty="0">
+                <a:solidFill>
+                  <a:srgbClr val="1A1A1A"/>
+                </a:solidFill>
+                <a:latin typeface="メイリオ" pitchFamily="34" charset="0"/>
+                <a:ea typeface="メイリオ" pitchFamily="34" charset="-122"/>
+                <a:cs typeface="メイリオ" pitchFamily="34" charset="-120"/>
+              </a:rPr>
+              <a:t>アピシウスM&amp;A仲介（前倒し）</a:t>
+            </a:r>
+            <a:endParaRPr lang="en-US" sz="1250" dirty="0"/>
+          </a:p>
+        </p:txBody>
+      </p:sp>
+      <p:sp>
+        <p:nvSpPr>
+          <p:cNvPr id="20" name="Text 18"/>
+          <p:cNvSpPr/>
+          <p:nvPr/>
+        </p:nvSpPr>
+        <p:spPr>
+          <a:xfrm>
+            <a:off x="1325880" y="4078224"/>
+            <a:ext cx="4572000" cy="420624"/>
+          </a:xfrm>
+          <a:prstGeom prst="rect">
+            <a:avLst/>
+          </a:prstGeom>
+          <a:noFill/>
+          <a:ln/>
+        </p:spPr>
+        <p:txBody>
+          <a:bodyPr wrap="square" lIns="0" tIns="0" rIns="0" bIns="0" rtlCol="0" anchor="t"/>
+          <a:lstStyle/>
+          <a:p>
+            <a:pPr indent="0" marL="0">
+              <a:buNone/>
+            </a:pPr>
+            <a:r>
+              <a:rPr lang="en-US" sz="950" dirty="0">
+                <a:solidFill>
+                  <a:srgbClr val="4A4A4A"/>
+                </a:solidFill>
+                <a:latin typeface="メイリオ" pitchFamily="34" charset="0"/>
+                <a:ea typeface="メイリオ" pitchFamily="34" charset="-122"/>
+                <a:cs typeface="メイリオ" pitchFamily="34" charset="-120"/>
+              </a:rPr>
+              <a:t>FY2027の上乗せ案件として見込んでいたものが当期計上に。</a:t>
+            </a:r>
+            <a:endParaRPr lang="en-US" sz="950" dirty="0"/>
+          </a:p>
+        </p:txBody>
+      </p:sp>
+      <p:sp>
+        <p:nvSpPr>
+          <p:cNvPr id="21" name="Text 19"/>
+          <p:cNvSpPr/>
+          <p:nvPr/>
+        </p:nvSpPr>
+        <p:spPr>
+          <a:xfrm>
+            <a:off x="5989320" y="3867912"/>
+            <a:ext cx="1554480" cy="457200"/>
+          </a:xfrm>
+          <a:prstGeom prst="rect">
+            <a:avLst/>
+          </a:prstGeom>
+          <a:noFill/>
+          <a:ln/>
+        </p:spPr>
+        <p:txBody>
+          <a:bodyPr wrap="square" lIns="0" tIns="0" rIns="0" bIns="0" rtlCol="0" anchor="ctr"/>
+          <a:lstStyle/>
+          <a:p>
+            <a:pPr algn="r" indent="0" marL="0">
+              <a:buNone/>
+            </a:pPr>
+            <a:r>
+              <a:rPr lang="en-US" sz="2000" b="1" dirty="0">
+                <a:solidFill>
+                  <a:srgbClr val="A98442"/>
+                </a:solidFill>
+                <a:latin typeface="メイリオ" pitchFamily="34" charset="0"/>
+                <a:ea typeface="メイリオ" pitchFamily="34" charset="-122"/>
+                <a:cs typeface="メイリオ" pitchFamily="34" charset="-120"/>
+              </a:rPr>
+              <a:t>＋20.0</a:t>
+            </a:r>
+            <a:endParaRPr lang="en-US" sz="2000" dirty="0"/>
+          </a:p>
+        </p:txBody>
+      </p:sp>
+      <p:sp>
+        <p:nvSpPr>
+          <p:cNvPr id="22" name="Shape 20"/>
+          <p:cNvSpPr/>
+          <p:nvPr/>
+        </p:nvSpPr>
+        <p:spPr>
+          <a:xfrm>
+            <a:off x="594360" y="4700016"/>
+            <a:ext cx="7086600" cy="950976"/>
+          </a:xfrm>
+          <a:prstGeom prst="roundRect">
+            <a:avLst>
+              <a:gd name="adj" fmla="val 4808"/>
+            </a:avLst>
+          </a:prstGeom>
+          <a:solidFill>
+            <a:srgbClr val="FFFFFF"/>
+          </a:solidFill>
+          <a:ln w="9525">
+            <a:solidFill>
+              <a:srgbClr val="E2E0DC"/>
+            </a:solidFill>
+            <a:prstDash val="solid"/>
+          </a:ln>
+          <a:effectLst>
+            <a:outerShdw sx="100000" sy="100000" kx="0" ky="0" algn="bl" rotWithShape="0" blurRad="114300" dist="25400" dir="5400000">
+              <a:srgbClr val="000000">
+                <a:alpha val="8000"/>
+              </a:srgbClr>
+            </a:outerShdw>
+          </a:effectLst>
+        </p:spPr>
+      </p:sp>
+      <p:sp>
+        <p:nvSpPr>
+          <p:cNvPr id="23" name="Shape 21"/>
+          <p:cNvSpPr/>
+          <p:nvPr/>
+        </p:nvSpPr>
+        <p:spPr>
+          <a:xfrm>
+            <a:off x="868680" y="5020056"/>
+            <a:ext cx="310896" cy="310896"/>
+          </a:xfrm>
+          <a:prstGeom prst="ellipse">
+            <a:avLst/>
+          </a:prstGeom>
+          <a:solidFill>
+            <a:srgbClr val="1A1A1A"/>
+          </a:solidFill>
+          <a:ln/>
+        </p:spPr>
+      </p:sp>
+      <p:sp>
+        <p:nvSpPr>
+          <p:cNvPr id="24" name="Text 22"/>
+          <p:cNvSpPr/>
+          <p:nvPr/>
+        </p:nvSpPr>
+        <p:spPr>
+          <a:xfrm>
+            <a:off x="868680" y="5020056"/>
+            <a:ext cx="310896" cy="310896"/>
+          </a:xfrm>
+          <a:prstGeom prst="rect">
+            <a:avLst/>
+          </a:prstGeom>
+          <a:noFill/>
+          <a:ln/>
+        </p:spPr>
+        <p:txBody>
+          <a:bodyPr wrap="square" lIns="0" tIns="0" rIns="0" bIns="0" rtlCol="0" anchor="ctr"/>
+          <a:lstStyle/>
+          <a:p>
+            <a:pPr algn="ctr" indent="0" marL="0">
+              <a:buNone/>
+            </a:pPr>
+            <a:r>
               <a:rPr lang="en-US" sz="1300" b="1" dirty="0">
                 <a:solidFill>
-                  <a:srgbClr val="1A1A1A"/>
-                </a:solidFill>
-                <a:latin typeface="メイリオ" pitchFamily="34" charset="0"/>
-                <a:ea typeface="メイリオ" pitchFamily="34" charset="-122"/>
-                <a:cs typeface="メイリオ" pitchFamily="34" charset="-120"/>
-              </a:rPr>
-              <a:t>不採算飲食3店舗の営業赤字</a:t>
+                  <a:srgbClr val="FFFFFF"/>
+                </a:solidFill>
+                <a:latin typeface="メイリオ" pitchFamily="34" charset="0"/>
+                <a:ea typeface="メイリオ" pitchFamily="34" charset="-122"/>
+                <a:cs typeface="メイリオ" pitchFamily="34" charset="-120"/>
+              </a:rPr>
+              <a:t>4</a:t>
             </a:r>
             <a:endParaRPr lang="en-US" sz="1300" dirty="0"/>
           </a:p>
@@ -24460,14 +24060,53 @@
       </p:sp>
       <p:sp>
         <p:nvSpPr>
-          <p:cNvPr id="20" name="Text 18"/>
-          <p:cNvSpPr/>
-          <p:nvPr/>
-        </p:nvSpPr>
-        <p:spPr>
-          <a:xfrm>
-            <a:off x="1325880" y="4882896"/>
-            <a:ext cx="4572000" cy="640080"/>
+          <p:cNvPr id="25" name="Text 23"/>
+          <p:cNvSpPr/>
+          <p:nvPr/>
+        </p:nvSpPr>
+        <p:spPr>
+          <a:xfrm>
+            <a:off x="1325880" y="4828032"/>
+            <a:ext cx="4572000" cy="329184"/>
+          </a:xfrm>
+          <a:prstGeom prst="rect">
+            <a:avLst/>
+          </a:prstGeom>
+          <a:noFill/>
+          <a:ln/>
+        </p:spPr>
+        <p:txBody>
+          <a:bodyPr wrap="square" lIns="0" tIns="0" rIns="0" bIns="0" rtlCol="0" anchor="ctr"/>
+          <a:lstStyle/>
+          <a:p>
+            <a:pPr indent="0" marL="0">
+              <a:buNone/>
+            </a:pPr>
+            <a:r>
+              <a:rPr lang="en-US" sz="1250" b="1" dirty="0">
+                <a:solidFill>
+                  <a:srgbClr val="1A1A1A"/>
+                </a:solidFill>
+                <a:latin typeface="メイリオ" pitchFamily="34" charset="0"/>
+                <a:ea typeface="メイリオ" pitchFamily="34" charset="-122"/>
+                <a:cs typeface="メイリオ" pitchFamily="34" charset="-120"/>
+              </a:rPr>
+              <a:t>コンサルティング料（前倒し）</a:t>
+            </a:r>
+            <a:endParaRPr lang="en-US" sz="1250" dirty="0"/>
+          </a:p>
+        </p:txBody>
+      </p:sp>
+      <p:sp>
+        <p:nvSpPr>
+          <p:cNvPr id="26" name="Text 24"/>
+          <p:cNvSpPr/>
+          <p:nvPr/>
+        </p:nvSpPr>
+        <p:spPr>
+          <a:xfrm>
+            <a:off x="1325880" y="5157216"/>
+            <a:ext cx="4572000" cy="420624"/>
           </a:xfrm>
           <a:prstGeom prst="rect">
             <a:avLst/>
@@ -24491,7 +24130,7 @@
                 <a:ea typeface="メイリオ" pitchFamily="34" charset="-122"/>
                 <a:cs typeface="メイリオ" pitchFamily="34" charset="-120"/>
               </a:rPr>
-              <a:t>前期合併により引き継いだ3店舗。2026年3月に撤退完了。撤退により消滅した固定費は年103百万円（勘定科目レベルで検証済み）。</a:t>
+              <a:t>同上。</a:t>
             </a:r>
             <a:endParaRPr lang="en-US" sz="950" dirty="0"/>
           </a:p>
@@ -24499,14 +24138,14 @@
       </p:sp>
       <p:sp>
         <p:nvSpPr>
-          <p:cNvPr id="21" name="Text 19"/>
-          <p:cNvSpPr/>
-          <p:nvPr/>
-        </p:nvSpPr>
-        <p:spPr>
-          <a:xfrm>
-            <a:off x="5989320" y="4700016"/>
-            <a:ext cx="1554480" cy="502920"/>
+          <p:cNvPr id="27" name="Text 25"/>
+          <p:cNvSpPr/>
+          <p:nvPr/>
+        </p:nvSpPr>
+        <p:spPr>
+          <a:xfrm>
+            <a:off x="5989320" y="4946904"/>
+            <a:ext cx="1554480" cy="457200"/>
           </a:xfrm>
           <a:prstGeom prst="rect">
             <a:avLst/>
@@ -24522,23 +24161,23 @@
               <a:buNone/>
             </a:pPr>
             <a:r>
-              <a:rPr lang="en-US" sz="1300" b="1" dirty="0">
-                <a:solidFill>
-                  <a:srgbClr val="8C8C8C"/>
-                </a:solidFill>
-                <a:latin typeface="メイリオ" pitchFamily="34" charset="0"/>
-                <a:ea typeface="メイリオ" pitchFamily="34" charset="-122"/>
-                <a:cs typeface="メイリオ" pitchFamily="34" charset="-120"/>
-              </a:rPr>
-              <a:t>確定値</a:t>
-            </a:r>
-            <a:endParaRPr lang="en-US" sz="1300" dirty="0"/>
-          </a:p>
-        </p:txBody>
-      </p:sp>
-      <p:sp>
-        <p:nvSpPr>
-          <p:cNvPr id="22" name="Shape 20"/>
+              <a:rPr lang="en-US" sz="2000" b="1" dirty="0">
+                <a:solidFill>
+                  <a:srgbClr val="A98442"/>
+                </a:solidFill>
+                <a:latin typeface="メイリオ" pitchFamily="34" charset="0"/>
+                <a:ea typeface="メイリオ" pitchFamily="34" charset="-122"/>
+                <a:cs typeface="メイリオ" pitchFamily="34" charset="-120"/>
+              </a:rPr>
+              <a:t>＋10.0</a:t>
+            </a:r>
+            <a:endParaRPr lang="en-US" sz="2000" dirty="0"/>
+          </a:p>
+        </p:txBody>
+      </p:sp>
+      <p:sp>
+        <p:nvSpPr>
+          <p:cNvPr id="28" name="Shape 26"/>
           <p:cNvSpPr/>
           <p:nvPr/>
         </p:nvSpPr>
@@ -24572,7 +24211,7 @@
       </p:sp>
       <p:sp>
         <p:nvSpPr>
-          <p:cNvPr id="23" name="Text 21"/>
+          <p:cNvPr id="29" name="Text 27"/>
           <p:cNvSpPr/>
           <p:nvPr/>
         </p:nvSpPr>
@@ -24603,7 +24242,7 @@
                 <a:ea typeface="メイリオ" pitchFamily="34" charset="-122"/>
                 <a:cs typeface="メイリオ" pitchFamily="34" charset="-120"/>
               </a:rPr>
-              <a:t>経常利益への影響</a:t>
+              <a:t>FY2026 営業利益</a:t>
             </a:r>
             <a:endParaRPr lang="en-US" sz="1050" dirty="0"/>
           </a:p>
@@ -24611,7 +24250,7 @@
       </p:sp>
       <p:sp>
         <p:nvSpPr>
-          <p:cNvPr id="24" name="Text 22"/>
+          <p:cNvPr id="30" name="Text 28"/>
           <p:cNvSpPr/>
           <p:nvPr/>
         </p:nvSpPr>
@@ -24642,7 +24281,7 @@
                 <a:ea typeface="メイリオ" pitchFamily="34" charset="-122"/>
                 <a:cs typeface="メイリオ" pitchFamily="34" charset="-120"/>
               </a:rPr>
-              <a:t>FY2026 着地見込</a:t>
+              <a:t>従来見込み</a:t>
             </a:r>
             <a:endParaRPr lang="en-US" sz="1050" dirty="0"/>
           </a:p>
@@ -24650,7 +24289,7 @@
       </p:sp>
       <p:sp>
         <p:nvSpPr>
-          <p:cNvPr id="25" name="Text 23"/>
+          <p:cNvPr id="31" name="Text 29"/>
           <p:cNvSpPr/>
           <p:nvPr/>
         </p:nvSpPr>
@@ -24681,7 +24320,7 @@
                 <a:ea typeface="メイリオ" pitchFamily="34" charset="-122"/>
                 <a:cs typeface="メイリオ" pitchFamily="34" charset="-120"/>
               </a:rPr>
-              <a:t>▲124.8</a:t>
+              <a:t>▲114.8</a:t>
             </a:r>
             <a:endParaRPr lang="en-US" sz="1150" dirty="0"/>
           </a:p>
@@ -24689,13 +24328,13 @@
       </p:sp>
       <p:sp>
         <p:nvSpPr>
-          <p:cNvPr id="26" name="Text 24"/>
-          <p:cNvSpPr/>
-          <p:nvPr/>
-        </p:nvSpPr>
-        <p:spPr>
-          <a:xfrm>
-            <a:off x="8229600" y="2670048"/>
+          <p:cNvPr id="32" name="Text 30"/>
+          <p:cNvSpPr/>
+          <p:nvPr/>
+        </p:nvSpPr>
+        <p:spPr>
+          <a:xfrm>
+            <a:off x="8229600" y="2633472"/>
             <a:ext cx="2103120" cy="384048"/>
           </a:xfrm>
           <a:prstGeom prst="rect">
@@ -24720,7 +24359,7 @@
                 <a:ea typeface="メイリオ" pitchFamily="34" charset="-122"/>
                 <a:cs typeface="メイリオ" pitchFamily="34" charset="-120"/>
               </a:rPr>
-              <a:t>① 公募ファンド遅延</a:t>
+              <a:t>私募3号・4号</a:t>
             </a:r>
             <a:endParaRPr lang="en-US" sz="1050" dirty="0"/>
           </a:p>
@@ -24728,13 +24367,13 @@
       </p:sp>
       <p:sp>
         <p:nvSpPr>
-          <p:cNvPr id="27" name="Text 25"/>
-          <p:cNvSpPr/>
-          <p:nvPr/>
-        </p:nvSpPr>
-        <p:spPr>
-          <a:xfrm>
-            <a:off x="10195560" y="2670048"/>
+          <p:cNvPr id="33" name="Text 31"/>
+          <p:cNvSpPr/>
+          <p:nvPr/>
+        </p:nvSpPr>
+        <p:spPr>
+          <a:xfrm>
+            <a:off x="10195560" y="2633472"/>
             <a:ext cx="1143000" cy="384048"/>
           </a:xfrm>
           <a:prstGeom prst="rect">
@@ -24759,7 +24398,7 @@
                 <a:ea typeface="メイリオ" pitchFamily="34" charset="-122"/>
                 <a:cs typeface="メイリオ" pitchFamily="34" charset="-120"/>
               </a:rPr>
-              <a:t>＋200.0</a:t>
+              <a:t>＋75.0</a:t>
             </a:r>
             <a:endParaRPr lang="en-US" sz="1150" dirty="0"/>
           </a:p>
@@ -24767,13 +24406,13 @@
       </p:sp>
       <p:sp>
         <p:nvSpPr>
-          <p:cNvPr id="28" name="Text 26"/>
-          <p:cNvSpPr/>
-          <p:nvPr/>
-        </p:nvSpPr>
-        <p:spPr>
-          <a:xfrm>
-            <a:off x="8229600" y="3236976"/>
+          <p:cNvPr id="34" name="Text 32"/>
+          <p:cNvSpPr/>
+          <p:nvPr/>
+        </p:nvSpPr>
+        <p:spPr>
+          <a:xfrm>
+            <a:off x="8229600" y="3163824"/>
             <a:ext cx="2103120" cy="384048"/>
           </a:xfrm>
           <a:prstGeom prst="rect">
@@ -24798,7 +24437,7 @@
                 <a:ea typeface="メイリオ" pitchFamily="34" charset="-122"/>
                 <a:cs typeface="メイリオ" pitchFamily="34" charset="-120"/>
               </a:rPr>
-              <a:t>② 私募の期ズレ</a:t>
+              <a:t>前倒し2件</a:t>
             </a:r>
             <a:endParaRPr lang="en-US" sz="1050" dirty="0"/>
           </a:p>
@@ -24806,13 +24445,13 @@
       </p:sp>
       <p:sp>
         <p:nvSpPr>
-          <p:cNvPr id="29" name="Text 27"/>
-          <p:cNvSpPr/>
-          <p:nvPr/>
-        </p:nvSpPr>
-        <p:spPr>
-          <a:xfrm>
-            <a:off x="10195560" y="3236976"/>
+          <p:cNvPr id="35" name="Text 33"/>
+          <p:cNvSpPr/>
+          <p:nvPr/>
+        </p:nvSpPr>
+        <p:spPr>
+          <a:xfrm>
+            <a:off x="10195560" y="3163824"/>
             <a:ext cx="1143000" cy="384048"/>
           </a:xfrm>
           <a:prstGeom prst="rect">
@@ -24845,91 +24484,13 @@
       </p:sp>
       <p:sp>
         <p:nvSpPr>
-          <p:cNvPr id="30" name="Text 28"/>
-          <p:cNvSpPr/>
-          <p:nvPr/>
-        </p:nvSpPr>
-        <p:spPr>
-          <a:xfrm>
-            <a:off x="8229600" y="3803904"/>
-            <a:ext cx="2103120" cy="384048"/>
-          </a:xfrm>
-          <a:prstGeom prst="rect">
-            <a:avLst/>
-          </a:prstGeom>
-          <a:noFill/>
-          <a:ln/>
-        </p:spPr>
-        <p:txBody>
-          <a:bodyPr wrap="square" lIns="0" tIns="0" rIns="0" bIns="0" rtlCol="0" anchor="ctr"/>
-          <a:lstStyle/>
-          <a:p>
-            <a:pPr indent="0" marL="0">
-              <a:buNone/>
-            </a:pPr>
-            <a:r>
-              <a:rPr lang="en-US" sz="1050" dirty="0">
-                <a:solidFill>
-                  <a:srgbClr val="FFFFFF"/>
-                </a:solidFill>
-                <a:latin typeface="メイリオ" pitchFamily="34" charset="0"/>
-                <a:ea typeface="メイリオ" pitchFamily="34" charset="-122"/>
-                <a:cs typeface="メイリオ" pitchFamily="34" charset="-120"/>
-              </a:rPr>
-              <a:t>③ 飲食3店舗の赤字</a:t>
-            </a:r>
-            <a:endParaRPr lang="en-US" sz="1050" dirty="0"/>
-          </a:p>
-        </p:txBody>
-      </p:sp>
-      <p:sp>
-        <p:nvSpPr>
-          <p:cNvPr id="31" name="Text 29"/>
-          <p:cNvSpPr/>
-          <p:nvPr/>
-        </p:nvSpPr>
-        <p:spPr>
-          <a:xfrm>
-            <a:off x="10195560" y="3803904"/>
-            <a:ext cx="1143000" cy="384048"/>
-          </a:xfrm>
-          <a:prstGeom prst="rect">
-            <a:avLst/>
-          </a:prstGeom>
-          <a:noFill/>
-          <a:ln/>
-        </p:spPr>
-        <p:txBody>
-          <a:bodyPr wrap="square" lIns="0" tIns="0" rIns="0" bIns="0" rtlCol="0" anchor="ctr"/>
-          <a:lstStyle/>
-          <a:p>
-            <a:pPr algn="r" indent="0" marL="0">
-              <a:buNone/>
-            </a:pPr>
-            <a:r>
-              <a:rPr lang="en-US" sz="1150" b="1" dirty="0">
-                <a:solidFill>
-                  <a:srgbClr val="A98442"/>
-                </a:solidFill>
-                <a:latin typeface="メイリオ" pitchFamily="34" charset="0"/>
-                <a:ea typeface="メイリオ" pitchFamily="34" charset="-122"/>
-                <a:cs typeface="メイリオ" pitchFamily="34" charset="-120"/>
-              </a:rPr>
-              <a:t>＋確定値</a:t>
-            </a:r>
-            <a:endParaRPr lang="en-US" sz="1150" dirty="0"/>
-          </a:p>
-        </p:txBody>
-      </p:sp>
-      <p:sp>
-        <p:nvSpPr>
-          <p:cNvPr id="32" name="Shape 30"/>
-          <p:cNvSpPr/>
-          <p:nvPr/>
-        </p:nvSpPr>
-        <p:spPr>
-          <a:xfrm>
-            <a:off x="8229600" y="4443984"/>
+          <p:cNvPr id="36" name="Shape 34"/>
+          <p:cNvSpPr/>
+          <p:nvPr/>
+        </p:nvSpPr>
+        <p:spPr>
+          <a:xfrm>
+            <a:off x="8229600" y="3840480"/>
             <a:ext cx="3108960" cy="0"/>
           </a:xfrm>
           <a:prstGeom prst="line">
@@ -24946,13 +24507,13 @@
       </p:sp>
       <p:sp>
         <p:nvSpPr>
-          <p:cNvPr id="33" name="Text 31"/>
-          <p:cNvSpPr/>
-          <p:nvPr/>
-        </p:nvSpPr>
-        <p:spPr>
-          <a:xfrm>
-            <a:off x="8229600" y="4572000"/>
+          <p:cNvPr id="37" name="Text 35"/>
+          <p:cNvSpPr/>
+          <p:nvPr/>
+        </p:nvSpPr>
+        <p:spPr>
+          <a:xfrm>
+            <a:off x="8229600" y="3986784"/>
             <a:ext cx="3108960" cy="274320"/>
           </a:xfrm>
           <a:prstGeom prst="rect">
@@ -24977,7 +24538,7 @@
                 <a:ea typeface="メイリオ" pitchFamily="34" charset="-122"/>
                 <a:cs typeface="メイリオ" pitchFamily="34" charset="-120"/>
               </a:rPr>
-              <a:t>計画どおりであれば</a:t>
+              <a:t>修正後 営業利益</a:t>
             </a:r>
             <a:endParaRPr lang="en-US" sz="1050" dirty="0"/>
           </a:p>
@@ -24985,13 +24546,13 @@
       </p:sp>
       <p:sp>
         <p:nvSpPr>
-          <p:cNvPr id="34" name="Text 32"/>
-          <p:cNvSpPr/>
-          <p:nvPr/>
-        </p:nvSpPr>
-        <p:spPr>
-          <a:xfrm>
-            <a:off x="8229600" y="4864608"/>
+          <p:cNvPr id="38" name="Text 36"/>
+          <p:cNvSpPr/>
+          <p:nvPr/>
+        </p:nvSpPr>
+        <p:spPr>
+          <a:xfrm>
+            <a:off x="8229600" y="4261104"/>
             <a:ext cx="3108960" cy="502920"/>
           </a:xfrm>
           <a:prstGeom prst="rect">
@@ -25008,7 +24569,7 @@
               <a:buNone/>
             </a:pPr>
             <a:r>
-              <a:rPr lang="en-US" sz="2100" b="1" dirty="0">
+              <a:rPr lang="en-US" sz="2300" b="1" dirty="0">
                 <a:solidFill>
                   <a:srgbClr val="A98442"/>
                 </a:solidFill>
@@ -25016,22 +24577,22 @@
                 <a:ea typeface="メイリオ" pitchFamily="34" charset="-122"/>
                 <a:cs typeface="メイリオ" pitchFamily="34" charset="-120"/>
               </a:rPr>
-              <a:t>＋105.2百万円以上</a:t>
-            </a:r>
-            <a:endParaRPr lang="en-US" sz="2100" dirty="0"/>
-          </a:p>
-        </p:txBody>
-      </p:sp>
-      <p:sp>
-        <p:nvSpPr>
-          <p:cNvPr id="35" name="Text 33"/>
-          <p:cNvSpPr/>
-          <p:nvPr/>
-        </p:nvSpPr>
-        <p:spPr>
-          <a:xfrm>
-            <a:off x="8229600" y="5394960"/>
-            <a:ext cx="3108960" cy="274320"/>
+              <a:t>▲9.8百万円</a:t>
+            </a:r>
+            <a:endParaRPr lang="en-US" sz="2300" dirty="0"/>
+          </a:p>
+        </p:txBody>
+      </p:sp>
+      <p:sp>
+        <p:nvSpPr>
+          <p:cNvPr id="39" name="Text 37"/>
+          <p:cNvSpPr/>
+          <p:nvPr/>
+        </p:nvSpPr>
+        <p:spPr>
+          <a:xfrm>
+            <a:off x="8229600" y="4846320"/>
+            <a:ext cx="3108960" cy="777240"/>
           </a:xfrm>
           <a:prstGeom prst="rect">
             <a:avLst/>
@@ -25044,26 +24605,69 @@
           <a:lstStyle/>
           <a:p>
             <a:pPr algn="ctr" indent="0" marL="0">
+              <a:lnSpc>
+                <a:spcPts val="1600"/>
+              </a:lnSpc>
               <a:buNone/>
             </a:pPr>
             <a:r>
               <a:rPr lang="en-US" sz="950" dirty="0">
                 <a:solidFill>
-                  <a:srgbClr val="D9D7D2"/>
-                </a:solidFill>
-                <a:latin typeface="メイリオ" pitchFamily="34" charset="0"/>
-                <a:ea typeface="メイリオ" pitchFamily="34" charset="-122"/>
-                <a:cs typeface="メイリオ" pitchFamily="34" charset="-120"/>
-              </a:rPr>
-              <a:t>（③の確定値を加える前）</a:t>
+                  <a:srgbClr val="FFFFFF"/>
+                </a:solidFill>
+                <a:latin typeface="メイリオ" pitchFamily="34" charset="0"/>
+                <a:ea typeface="メイリオ" pitchFamily="34" charset="-122"/>
+                <a:cs typeface="メイリオ" pitchFamily="34" charset="-120"/>
+              </a:rPr>
+              <a:t>ただし公募ファンドの遅延という</a:t>
             </a:r>
             <a:endParaRPr lang="en-US" sz="950" dirty="0"/>
           </a:p>
-        </p:txBody>
-      </p:sp>
-      <p:sp>
-        <p:nvSpPr>
-          <p:cNvPr id="36" name="Text 34"/>
+          <a:p>
+            <a:pPr algn="ctr" indent="0" marL="0">
+              <a:lnSpc>
+                <a:spcPts val="1600"/>
+              </a:lnSpc>
+              <a:buNone/>
+            </a:pPr>
+            <a:r>
+              <a:rPr lang="en-US" sz="950" dirty="0">
+                <a:solidFill>
+                  <a:srgbClr val="FFFFFF"/>
+                </a:solidFill>
+                <a:latin typeface="メイリオ" pitchFamily="34" charset="0"/>
+                <a:ea typeface="メイリオ" pitchFamily="34" charset="-122"/>
+                <a:cs typeface="メイリオ" pitchFamily="34" charset="-120"/>
+              </a:rPr>
+              <a:t>最大の未達要因は解消していません。</a:t>
+            </a:r>
+            <a:endParaRPr lang="en-US" sz="950" dirty="0"/>
+          </a:p>
+          <a:p>
+            <a:pPr algn="ctr" indent="0" marL="0">
+              <a:lnSpc>
+                <a:spcPts val="1600"/>
+              </a:lnSpc>
+              <a:buNone/>
+            </a:pPr>
+            <a:r>
+              <a:rPr lang="en-US" sz="950" dirty="0">
+                <a:solidFill>
+                  <a:srgbClr val="FFFFFF"/>
+                </a:solidFill>
+                <a:latin typeface="メイリオ" pitchFamily="34" charset="0"/>
+                <a:ea typeface="メイリオ" pitchFamily="34" charset="-122"/>
+                <a:cs typeface="メイリオ" pitchFamily="34" charset="-120"/>
+              </a:rPr>
+              <a:t>計画どおりなら＋190百万円でした。</a:t>
+            </a:r>
+            <a:endParaRPr lang="en-US" sz="950" dirty="0"/>
+          </a:p>
+        </p:txBody>
+      </p:sp>
+      <p:sp>
+        <p:nvSpPr>
+          <p:cNvPr id="40" name="Text 38"/>
           <p:cNvSpPr/>
           <p:nvPr/>
         </p:nvSpPr>
@@ -25094,7 +24698,7 @@
                 <a:ea typeface="メイリオ" pitchFamily="34" charset="-122"/>
                 <a:cs typeface="メイリオ" pitchFamily="34" charset="-120"/>
               </a:rPr>
-              <a:t>出典：事業計画202608（銀行様）全社シート、決算報告書 第54期。①の売上約700百万円・粗利200百万円超は公募ファンド組成時の見込額。</a:t>
+              <a:t>従来見込みの営業利益▲114.8百万円は確定値への差替えが必要です。貴社ご指摘の「0円＋α」に合わせるには▲105百万円程度となります。</a:t>
             </a:r>
             <a:endParaRPr lang="en-US" sz="850" dirty="0"/>
           </a:p>
@@ -25204,7 +24808,7 @@
                 <a:ea typeface="メイリオ" pitchFamily="34" charset="-122"/>
                 <a:cs typeface="メイリオ" pitchFamily="34" charset="-120"/>
               </a:rPr>
-              <a:t>数字が悪かった原因を切り分け、来期の打ち手に落としています。</a:t>
+              <a:t>着地が均衡まで戻った今も、原因の切り分けと来期の打ち手は変えていません。</a:t>
             </a:r>
             <a:endParaRPr lang="en-US" sz="1250" dirty="0"/>
           </a:p>
@@ -25566,7 +25170,7 @@
                 <a:ea typeface="メイリオ" pitchFamily="34" charset="-122"/>
                 <a:cs typeface="メイリオ" pitchFamily="34" charset="-120"/>
               </a:rPr>
-              <a:t>私募ファンドの特殊契約により原価が先行</a:t>
+              <a:t>挽回策が後手に回った</a:t>
             </a:r>
             <a:endParaRPr lang="en-US" sz="1250" dirty="0"/>
           </a:p>
@@ -25605,7 +25209,7 @@
                 <a:ea typeface="メイリオ" pitchFamily="34" charset="-122"/>
                 <a:cs typeface="メイリオ" pitchFamily="34" charset="-120"/>
               </a:rPr>
-              <a:t>当期は粗利率約5%にとどまり、30百万円前後の粗利が来期にずれ込む。</a:t>
+              <a:t>私募ファンドの組成が9月末までずれ込んだ。期初から動けていれば取れた収益を落とした。</a:t>
             </a:r>
             <a:endParaRPr lang="en-US" sz="1050" dirty="0"/>
           </a:p>
@@ -25737,7 +25341,7 @@
                 <a:ea typeface="メイリオ" pitchFamily="34" charset="-122"/>
                 <a:cs typeface="メイリオ" pitchFamily="34" charset="-120"/>
               </a:rPr>
-              <a:t>挽回策が後手に回った</a:t>
+              <a:t>一過性収益への依存</a:t>
             </a:r>
             <a:endParaRPr lang="en-US" sz="1250" dirty="0"/>
           </a:p>
@@ -25776,7 +25380,7 @@
                 <a:ea typeface="メイリオ" pitchFamily="34" charset="-122"/>
                 <a:cs typeface="メイリオ" pitchFamily="34" charset="-120"/>
               </a:rPr>
-              <a:t>私募ファンドで3億円程度を巻き返すにとどまり、遅延分を吸収できなかった。</a:t>
+              <a:t>FY2026の均衡回復は私募2本と前倒し計上によるもので、いずれもFY2027には残らない。</a:t>
             </a:r>
             <a:endParaRPr lang="en-US" sz="1050" dirty="0"/>
           </a:p>
@@ -29839,7 +29443,7 @@
                 <a:ea typeface="メイリオ" pitchFamily="34" charset="-122"/>
                 <a:cs typeface="メイリオ" pitchFamily="34" charset="-120"/>
               </a:rPr>
-              <a:t>FY2026 → FY2027 営業利益ブリッジ（プランD）</a:t>
+              <a:t>FY2026 → FY2027 営業利益ブリッジ</a:t>
             </a:r>
             <a:endParaRPr lang="en-US" sz="2900" dirty="0"/>
           </a:p>
@@ -29878,7 +29482,7 @@
                 <a:ea typeface="メイリオ" pitchFamily="34" charset="-122"/>
                 <a:cs typeface="メイリオ" pitchFamily="34" charset="-120"/>
               </a:rPr>
-              <a:t>固定費削減・売上回復・上乗せ案件の3つで、営業損益は250.2百万円改善します。</a:t>
+              <a:t>FY2026（修正後）を起点に、一過性収益が剥落してなお売上回復と上乗せ案件で＋105.4百万円に届きます。プランD。</a:t>
             </a:r>
             <a:endParaRPr lang="en-US" sz="1250" dirty="0"/>
           </a:p>
@@ -29892,7 +29496,7 @@
         </p:nvSpPr>
         <p:spPr>
           <a:xfrm>
-            <a:off x="1051560" y="3026664"/>
+            <a:off x="960120" y="3026664"/>
             <a:ext cx="10058400" cy="0"/>
           </a:xfrm>
           <a:prstGeom prst="line">
@@ -29915,7 +29519,7 @@
         </p:nvSpPr>
         <p:spPr>
           <a:xfrm>
-            <a:off x="667512" y="2907792"/>
+            <a:off x="576072" y="2907792"/>
             <a:ext cx="329184" cy="237744"/>
           </a:xfrm>
           <a:prstGeom prst="rect">
@@ -29954,8 +29558,8 @@
         </p:nvSpPr>
         <p:spPr>
           <a:xfrm>
-            <a:off x="1051560" y="3026664"/>
-            <a:ext cx="1481328" cy="1043111"/>
+            <a:off x="960120" y="3026664"/>
+            <a:ext cx="1280160" cy="88991"/>
           </a:xfrm>
           <a:prstGeom prst="rect">
             <a:avLst/>
@@ -29974,8 +29578,8 @@
         </p:nvSpPr>
         <p:spPr>
           <a:xfrm>
-            <a:off x="941832" y="4106351"/>
-            <a:ext cx="1700784" cy="292608"/>
+            <a:off x="850392" y="3152231"/>
+            <a:ext cx="1499616" cy="292608"/>
           </a:xfrm>
           <a:prstGeom prst="rect">
             <a:avLst/>
@@ -29999,7 +29603,7 @@
                 <a:ea typeface="メイリオ" pitchFamily="34" charset="-122"/>
                 <a:cs typeface="メイリオ" pitchFamily="34" charset="-120"/>
               </a:rPr>
-              <a:t>▲114.8</a:t>
+              <a:t>▲9.8</a:t>
             </a:r>
             <a:endParaRPr lang="en-US" sz="1200" dirty="0"/>
           </a:p>
@@ -30013,8 +29617,8 @@
         </p:nvSpPr>
         <p:spPr>
           <a:xfrm>
-            <a:off x="868680" y="4736592"/>
-            <a:ext cx="1847088" cy="713232"/>
+            <a:off x="777240" y="4736592"/>
+            <a:ext cx="1645920" cy="713232"/>
           </a:xfrm>
           <a:prstGeom prst="rect">
             <a:avLst/>
@@ -30059,6 +29663,23 @@
             </a:r>
             <a:endParaRPr lang="en-US" sz="900" dirty="0"/>
           </a:p>
+          <a:p>
+            <a:pPr algn="ctr" indent="0" marL="0">
+              <a:buNone/>
+            </a:pPr>
+            <a:r>
+              <a:rPr lang="en-US" sz="900" dirty="0">
+                <a:solidFill>
+                  <a:srgbClr val="1A1A1A"/>
+                </a:solidFill>
+                <a:latin typeface="メイリオ" pitchFamily="34" charset="0"/>
+                <a:ea typeface="メイリオ" pitchFamily="34" charset="-122"/>
+                <a:cs typeface="メイリオ" pitchFamily="34" charset="-120"/>
+              </a:rPr>
+              <a:t>（修正後）</a:t>
+            </a:r>
+            <a:endParaRPr lang="en-US" sz="900" dirty="0"/>
+          </a:p>
         </p:txBody>
       </p:sp>
       <p:sp>
@@ -30069,8 +29690,8 @@
         </p:nvSpPr>
         <p:spPr>
           <a:xfrm>
-            <a:off x="2916936" y="4069775"/>
-            <a:ext cx="1481328" cy="259316"/>
+            <a:off x="2569464" y="3115655"/>
+            <a:ext cx="1280160" cy="681514"/>
           </a:xfrm>
           <a:prstGeom prst="rect">
             <a:avLst/>
@@ -30089,8 +29710,8 @@
         </p:nvSpPr>
         <p:spPr>
           <a:xfrm>
-            <a:off x="2807208" y="4365666"/>
-            <a:ext cx="1700784" cy="292608"/>
+            <a:off x="2459736" y="3833745"/>
+            <a:ext cx="1499616" cy="292608"/>
           </a:xfrm>
           <a:prstGeom prst="rect">
             <a:avLst/>
@@ -30114,6 +29735,121 @@
                 <a:ea typeface="メイリオ" pitchFamily="34" charset="-122"/>
                 <a:cs typeface="メイリオ" pitchFamily="34" charset="-120"/>
               </a:rPr>
+              <a:t>▲75.0</a:t>
+            </a:r>
+            <a:endParaRPr lang="en-US" sz="1200" dirty="0"/>
+          </a:p>
+        </p:txBody>
+      </p:sp>
+      <p:sp>
+        <p:nvSpPr>
+          <p:cNvPr id="11" name="Text 9"/>
+          <p:cNvSpPr/>
+          <p:nvPr/>
+        </p:nvSpPr>
+        <p:spPr>
+          <a:xfrm>
+            <a:off x="2386584" y="4736592"/>
+            <a:ext cx="1645920" cy="713232"/>
+          </a:xfrm>
+          <a:prstGeom prst="rect">
+            <a:avLst/>
+          </a:prstGeom>
+          <a:noFill/>
+          <a:ln/>
+        </p:spPr>
+        <p:txBody>
+          <a:bodyPr wrap="square" lIns="0" tIns="0" rIns="0" bIns="0" rtlCol="0" anchor="ctr"/>
+          <a:lstStyle/>
+          <a:p>
+            <a:pPr algn="ctr" indent="0" marL="0">
+              <a:buNone/>
+            </a:pPr>
+            <a:r>
+              <a:rPr lang="en-US" sz="900" dirty="0">
+                <a:solidFill>
+                  <a:srgbClr val="1A1A1A"/>
+                </a:solidFill>
+                <a:latin typeface="メイリオ" pitchFamily="34" charset="0"/>
+                <a:ea typeface="メイリオ" pitchFamily="34" charset="-122"/>
+                <a:cs typeface="メイリオ" pitchFamily="34" charset="-120"/>
+              </a:rPr>
+              <a:t>① 私募ファンド</a:t>
+            </a:r>
+            <a:endParaRPr lang="en-US" sz="900" dirty="0"/>
+          </a:p>
+          <a:p>
+            <a:pPr algn="ctr" indent="0" marL="0">
+              <a:buNone/>
+            </a:pPr>
+            <a:r>
+              <a:rPr lang="en-US" sz="900" dirty="0">
+                <a:solidFill>
+                  <a:srgbClr val="1A1A1A"/>
+                </a:solidFill>
+                <a:latin typeface="メイリオ" pitchFamily="34" charset="0"/>
+                <a:ea typeface="メイリオ" pitchFamily="34" charset="-122"/>
+                <a:cs typeface="メイリオ" pitchFamily="34" charset="-120"/>
+              </a:rPr>
+              <a:t>の剥落</a:t>
+            </a:r>
+            <a:endParaRPr lang="en-US" sz="900" dirty="0"/>
+          </a:p>
+        </p:txBody>
+      </p:sp>
+      <p:sp>
+        <p:nvSpPr>
+          <p:cNvPr id="12" name="Shape 10"/>
+          <p:cNvSpPr/>
+          <p:nvPr/>
+        </p:nvSpPr>
+        <p:spPr>
+          <a:xfrm>
+            <a:off x="4178808" y="3797169"/>
+            <a:ext cx="1280160" cy="259316"/>
+          </a:xfrm>
+          <a:prstGeom prst="rect">
+            <a:avLst/>
+          </a:prstGeom>
+          <a:solidFill>
+            <a:srgbClr val="6E6E6E"/>
+          </a:solidFill>
+          <a:ln/>
+        </p:spPr>
+      </p:sp>
+      <p:sp>
+        <p:nvSpPr>
+          <p:cNvPr id="13" name="Text 11"/>
+          <p:cNvSpPr/>
+          <p:nvPr/>
+        </p:nvSpPr>
+        <p:spPr>
+          <a:xfrm>
+            <a:off x="4069080" y="4093061"/>
+            <a:ext cx="1499616" cy="292608"/>
+          </a:xfrm>
+          <a:prstGeom prst="rect">
+            <a:avLst/>
+          </a:prstGeom>
+          <a:noFill/>
+          <a:ln/>
+        </p:spPr>
+        <p:txBody>
+          <a:bodyPr wrap="square" lIns="0" tIns="0" rIns="0" bIns="0" rtlCol="0" anchor="ctr"/>
+          <a:lstStyle/>
+          <a:p>
+            <a:pPr algn="ctr" indent="0" marL="0">
+              <a:buNone/>
+            </a:pPr>
+            <a:r>
+              <a:rPr lang="en-US" sz="1200" b="1" dirty="0">
+                <a:solidFill>
+                  <a:srgbClr val="6E6E6E"/>
+                </a:solidFill>
+                <a:latin typeface="メイリオ" pitchFamily="34" charset="0"/>
+                <a:ea typeface="メイリオ" pitchFamily="34" charset="-122"/>
+                <a:cs typeface="メイリオ" pitchFamily="34" charset="-120"/>
+              </a:rPr>
               <a:t>▲28.5</a:t>
             </a:r>
             <a:endParaRPr lang="en-US" sz="1200" dirty="0"/>
@@ -30122,14 +29858,14 @@
       </p:sp>
       <p:sp>
         <p:nvSpPr>
-          <p:cNvPr id="11" name="Text 9"/>
-          <p:cNvSpPr/>
-          <p:nvPr/>
-        </p:nvSpPr>
-        <p:spPr>
-          <a:xfrm>
-            <a:off x="2734056" y="4736592"/>
-            <a:ext cx="1847088" cy="713232"/>
+          <p:cNvPr id="14" name="Text 12"/>
+          <p:cNvSpPr/>
+          <p:nvPr/>
+        </p:nvSpPr>
+        <p:spPr>
+          <a:xfrm>
+            <a:off x="3995928" y="4736592"/>
+            <a:ext cx="1645920" cy="713232"/>
           </a:xfrm>
           <a:prstGeom prst="rect">
             <a:avLst/>
@@ -30153,7 +29889,7 @@
                 <a:ea typeface="メイリオ" pitchFamily="34" charset="-122"/>
                 <a:cs typeface="メイリオ" pitchFamily="34" charset="-120"/>
               </a:rPr>
-              <a:t>① 既存事業</a:t>
+              <a:t>② 既存事業</a:t>
             </a:r>
             <a:endParaRPr lang="en-US" sz="900" dirty="0"/>
           </a:p>
@@ -30178,14 +29914,14 @@
       </p:sp>
       <p:sp>
         <p:nvSpPr>
-          <p:cNvPr id="12" name="Shape 10"/>
-          <p:cNvSpPr/>
-          <p:nvPr/>
-        </p:nvSpPr>
-        <p:spPr>
-          <a:xfrm>
-            <a:off x="4782312" y="3931343"/>
-            <a:ext cx="1481328" cy="397748"/>
+          <p:cNvPr id="15" name="Shape 13"/>
+          <p:cNvSpPr/>
+          <p:nvPr/>
+        </p:nvSpPr>
+        <p:spPr>
+          <a:xfrm>
+            <a:off x="5788152" y="3125825"/>
+            <a:ext cx="1280160" cy="930660"/>
           </a:xfrm>
           <a:prstGeom prst="rect">
             <a:avLst/>
@@ -30198,14 +29934,14 @@
       </p:sp>
       <p:sp>
         <p:nvSpPr>
-          <p:cNvPr id="13" name="Text 11"/>
-          <p:cNvSpPr/>
-          <p:nvPr/>
-        </p:nvSpPr>
-        <p:spPr>
-          <a:xfrm>
-            <a:off x="4672584" y="3602159"/>
-            <a:ext cx="1700784" cy="292608"/>
+          <p:cNvPr id="16" name="Text 14"/>
+          <p:cNvSpPr/>
+          <p:nvPr/>
+        </p:nvSpPr>
+        <p:spPr>
+          <a:xfrm>
+            <a:off x="5678424" y="2796641"/>
+            <a:ext cx="1499616" cy="292608"/>
           </a:xfrm>
           <a:prstGeom prst="rect">
             <a:avLst/>
@@ -30229,7 +29965,7 @@
                 <a:ea typeface="メイリオ" pitchFamily="34" charset="-122"/>
                 <a:cs typeface="メイリオ" pitchFamily="34" charset="-120"/>
               </a:rPr>
-              <a:t>+43.8</a:t>
+              <a:t>+102.4</a:t>
             </a:r>
             <a:endParaRPr lang="en-US" sz="1200" dirty="0"/>
           </a:p>
@@ -30237,14 +29973,14 @@
       </p:sp>
       <p:sp>
         <p:nvSpPr>
-          <p:cNvPr id="14" name="Text 12"/>
-          <p:cNvSpPr/>
-          <p:nvPr/>
-        </p:nvSpPr>
-        <p:spPr>
-          <a:xfrm>
-            <a:off x="4599432" y="4736592"/>
-            <a:ext cx="1847088" cy="713232"/>
+          <p:cNvPr id="17" name="Text 15"/>
+          <p:cNvSpPr/>
+          <p:nvPr/>
+        </p:nvSpPr>
+        <p:spPr>
+          <a:xfrm>
+            <a:off x="5605272" y="4736592"/>
+            <a:ext cx="1645920" cy="713232"/>
           </a:xfrm>
           <a:prstGeom prst="rect">
             <a:avLst/>
@@ -30268,7 +30004,7 @@
                 <a:ea typeface="メイリオ" pitchFamily="34" charset="-122"/>
                 <a:cs typeface="メイリオ" pitchFamily="34" charset="-120"/>
               </a:rPr>
-              <a:t>② 販管費</a:t>
+              <a:t>③ 差額売上の粗利</a:t>
             </a:r>
             <a:endParaRPr lang="en-US" sz="900" dirty="0"/>
           </a:p>
@@ -30285,7 +30021,7 @@
                 <a:ea typeface="メイリオ" pitchFamily="34" charset="-122"/>
                 <a:cs typeface="メイリオ" pitchFamily="34" charset="-120"/>
               </a:rPr>
-              <a:t>の削減</a:t>
+              <a:t>（売上平均へ回復）</a:t>
             </a:r>
             <a:endParaRPr lang="en-US" sz="900" dirty="0"/>
           </a:p>
@@ -30293,14 +30029,14 @@
       </p:sp>
       <p:sp>
         <p:nvSpPr>
-          <p:cNvPr id="15" name="Shape 13"/>
-          <p:cNvSpPr/>
-          <p:nvPr/>
-        </p:nvSpPr>
-        <p:spPr>
-          <a:xfrm>
-            <a:off x="6647688" y="3000682"/>
-            <a:ext cx="1481328" cy="930660"/>
+          <p:cNvPr id="18" name="Shape 16"/>
+          <p:cNvSpPr/>
+          <p:nvPr/>
+        </p:nvSpPr>
+        <p:spPr>
+          <a:xfrm>
+            <a:off x="7397496" y="2728077"/>
+            <a:ext cx="1280160" cy="397748"/>
           </a:xfrm>
           <a:prstGeom prst="rect">
             <a:avLst/>
@@ -30313,14 +30049,14 @@
       </p:sp>
       <p:sp>
         <p:nvSpPr>
-          <p:cNvPr id="16" name="Text 14"/>
-          <p:cNvSpPr/>
-          <p:nvPr/>
-        </p:nvSpPr>
-        <p:spPr>
-          <a:xfrm>
-            <a:off x="6537960" y="2671498"/>
-            <a:ext cx="1700784" cy="292608"/>
+          <p:cNvPr id="19" name="Text 17"/>
+          <p:cNvSpPr/>
+          <p:nvPr/>
+        </p:nvSpPr>
+        <p:spPr>
+          <a:xfrm>
+            <a:off x="7287768" y="2398893"/>
+            <a:ext cx="1499616" cy="292608"/>
           </a:xfrm>
           <a:prstGeom prst="rect">
             <a:avLst/>
@@ -30344,7 +30080,7 @@
                 <a:ea typeface="メイリオ" pitchFamily="34" charset="-122"/>
                 <a:cs typeface="メイリオ" pitchFamily="34" charset="-120"/>
               </a:rPr>
-              <a:t>+102.4</a:t>
+              <a:t>+43.8</a:t>
             </a:r>
             <a:endParaRPr lang="en-US" sz="1200" dirty="0"/>
           </a:p>
@@ -30352,14 +30088,14 @@
       </p:sp>
       <p:sp>
         <p:nvSpPr>
-          <p:cNvPr id="17" name="Text 15"/>
-          <p:cNvSpPr/>
-          <p:nvPr/>
-        </p:nvSpPr>
-        <p:spPr>
-          <a:xfrm>
-            <a:off x="6464808" y="4736592"/>
-            <a:ext cx="1847088" cy="713232"/>
+          <p:cNvPr id="20" name="Text 18"/>
+          <p:cNvSpPr/>
+          <p:nvPr/>
+        </p:nvSpPr>
+        <p:spPr>
+          <a:xfrm>
+            <a:off x="7214616" y="4736592"/>
+            <a:ext cx="1645920" cy="713232"/>
           </a:xfrm>
           <a:prstGeom prst="rect">
             <a:avLst/>
@@ -30383,7 +30119,7 @@
                 <a:ea typeface="メイリオ" pitchFamily="34" charset="-122"/>
                 <a:cs typeface="メイリオ" pitchFamily="34" charset="-120"/>
               </a:rPr>
-              <a:t>③ 差額売上の粗利</a:t>
+              <a:t>④ 販管費</a:t>
             </a:r>
             <a:endParaRPr lang="en-US" sz="900" dirty="0"/>
           </a:p>
@@ -30400,7 +30136,7 @@
                 <a:ea typeface="メイリオ" pitchFamily="34" charset="-122"/>
                 <a:cs typeface="メイリオ" pitchFamily="34" charset="-120"/>
               </a:rPr>
-              <a:t>（売上平均へ回復）</a:t>
+              <a:t>の削減</a:t>
             </a:r>
             <a:endParaRPr lang="en-US" sz="900" dirty="0"/>
           </a:p>
@@ -30408,14 +30144,14 @@
       </p:sp>
       <p:sp>
         <p:nvSpPr>
-          <p:cNvPr id="18" name="Shape 16"/>
-          <p:cNvSpPr/>
-          <p:nvPr/>
-        </p:nvSpPr>
-        <p:spPr>
-          <a:xfrm>
-            <a:off x="8513064" y="1796675"/>
-            <a:ext cx="1481328" cy="1204008"/>
+          <p:cNvPr id="21" name="Shape 19"/>
+          <p:cNvSpPr/>
+          <p:nvPr/>
+        </p:nvSpPr>
+        <p:spPr>
+          <a:xfrm>
+            <a:off x="9006840" y="2069280"/>
+            <a:ext cx="1280160" cy="658797"/>
           </a:xfrm>
           <a:prstGeom prst="rect">
             <a:avLst/>
@@ -30428,14 +30164,14 @@
       </p:sp>
       <p:sp>
         <p:nvSpPr>
-          <p:cNvPr id="19" name="Text 17"/>
-          <p:cNvSpPr/>
-          <p:nvPr/>
-        </p:nvSpPr>
-        <p:spPr>
-          <a:xfrm>
-            <a:off x="8403336" y="1467491"/>
-            <a:ext cx="1700784" cy="292608"/>
+          <p:cNvPr id="22" name="Text 20"/>
+          <p:cNvSpPr/>
+          <p:nvPr/>
+        </p:nvSpPr>
+        <p:spPr>
+          <a:xfrm>
+            <a:off x="8897112" y="1740096"/>
+            <a:ext cx="1499616" cy="292608"/>
           </a:xfrm>
           <a:prstGeom prst="rect">
             <a:avLst/>
@@ -30459,7 +30195,7 @@
                 <a:ea typeface="メイリオ" pitchFamily="34" charset="-122"/>
                 <a:cs typeface="メイリオ" pitchFamily="34" charset="-120"/>
               </a:rPr>
-              <a:t>+132.5</a:t>
+              <a:t>+72.5</a:t>
             </a:r>
             <a:endParaRPr lang="en-US" sz="1200" dirty="0"/>
           </a:p>
@@ -30467,14 +30203,14 @@
       </p:sp>
       <p:sp>
         <p:nvSpPr>
-          <p:cNvPr id="20" name="Text 18"/>
-          <p:cNvSpPr/>
-          <p:nvPr/>
-        </p:nvSpPr>
-        <p:spPr>
-          <a:xfrm>
-            <a:off x="8330184" y="4736592"/>
-            <a:ext cx="1847088" cy="713232"/>
+          <p:cNvPr id="23" name="Text 21"/>
+          <p:cNvSpPr/>
+          <p:nvPr/>
+        </p:nvSpPr>
+        <p:spPr>
+          <a:xfrm>
+            <a:off x="8823960" y="4736592"/>
+            <a:ext cx="1645920" cy="713232"/>
           </a:xfrm>
           <a:prstGeom prst="rect">
             <a:avLst/>
@@ -30498,7 +30234,7 @@
                 <a:ea typeface="メイリオ" pitchFamily="34" charset="-122"/>
                 <a:cs typeface="メイリオ" pitchFamily="34" charset="-120"/>
               </a:rPr>
-              <a:t>④ 上乗せ案件</a:t>
+              <a:t>⑤ 上乗せ案件</a:t>
             </a:r>
             <a:endParaRPr lang="en-US" sz="900" dirty="0"/>
           </a:p>
@@ -30515,7 +30251,7 @@
                 <a:ea typeface="メイリオ" pitchFamily="34" charset="-122"/>
                 <a:cs typeface="メイリオ" pitchFamily="34" charset="-120"/>
               </a:rPr>
-              <a:t>（営業収益）</a:t>
+              <a:t>の増加</a:t>
             </a:r>
             <a:endParaRPr lang="en-US" sz="900" dirty="0"/>
           </a:p>
@@ -30523,14 +30259,14 @@
       </p:sp>
       <p:sp>
         <p:nvSpPr>
-          <p:cNvPr id="21" name="Shape 19"/>
-          <p:cNvSpPr/>
-          <p:nvPr/>
-        </p:nvSpPr>
-        <p:spPr>
-          <a:xfrm>
-            <a:off x="10378440" y="1796675"/>
-            <a:ext cx="1481328" cy="1229989"/>
+          <p:cNvPr id="24" name="Shape 22"/>
+          <p:cNvSpPr/>
+          <p:nvPr/>
+        </p:nvSpPr>
+        <p:spPr>
+          <a:xfrm>
+            <a:off x="10616184" y="2069280"/>
+            <a:ext cx="1280160" cy="957384"/>
           </a:xfrm>
           <a:prstGeom prst="rect">
             <a:avLst/>
@@ -30543,14 +30279,14 @@
       </p:sp>
       <p:sp>
         <p:nvSpPr>
-          <p:cNvPr id="22" name="Text 20"/>
-          <p:cNvSpPr/>
-          <p:nvPr/>
-        </p:nvSpPr>
-        <p:spPr>
-          <a:xfrm>
-            <a:off x="10268712" y="1467491"/>
-            <a:ext cx="1700784" cy="292608"/>
+          <p:cNvPr id="25" name="Text 23"/>
+          <p:cNvSpPr/>
+          <p:nvPr/>
+        </p:nvSpPr>
+        <p:spPr>
+          <a:xfrm>
+            <a:off x="10506456" y="1740096"/>
+            <a:ext cx="1499616" cy="292608"/>
           </a:xfrm>
           <a:prstGeom prst="rect">
             <a:avLst/>
@@ -30574,7 +30310,7 @@
                 <a:ea typeface="メイリオ" pitchFamily="34" charset="-122"/>
                 <a:cs typeface="メイリオ" pitchFamily="34" charset="-120"/>
               </a:rPr>
-              <a:t>+135.4</a:t>
+              <a:t>+105.4</a:t>
             </a:r>
             <a:endParaRPr lang="en-US" sz="1200" dirty="0"/>
           </a:p>
@@ -30582,14 +30318,14 @@
       </p:sp>
       <p:sp>
         <p:nvSpPr>
-          <p:cNvPr id="23" name="Text 21"/>
-          <p:cNvSpPr/>
-          <p:nvPr/>
-        </p:nvSpPr>
-        <p:spPr>
-          <a:xfrm>
-            <a:off x="10195560" y="4736592"/>
-            <a:ext cx="1847088" cy="713232"/>
+          <p:cNvPr id="26" name="Text 24"/>
+          <p:cNvSpPr/>
+          <p:nvPr/>
+        </p:nvSpPr>
+        <p:spPr>
+          <a:xfrm>
+            <a:off x="10433304" y="4736592"/>
+            <a:ext cx="1645920" cy="713232"/>
           </a:xfrm>
           <a:prstGeom prst="rect">
             <a:avLst/>
@@ -30638,7 +30374,7 @@
       </p:sp>
       <p:sp>
         <p:nvSpPr>
-          <p:cNvPr id="24" name="Text 22"/>
+          <p:cNvPr id="27" name="Text 25"/>
           <p:cNvSpPr/>
           <p:nvPr/>
         </p:nvSpPr>
@@ -30677,7 +30413,7 @@
       </p:sp>
       <p:sp>
         <p:nvSpPr>
-          <p:cNvPr id="25" name="Shape 23"/>
+          <p:cNvPr id="28" name="Shape 26"/>
           <p:cNvSpPr/>
           <p:nvPr/>
         </p:nvSpPr>
@@ -30711,7 +30447,7 @@
       </p:sp>
       <p:sp>
         <p:nvSpPr>
-          <p:cNvPr id="26" name="Text 24"/>
+          <p:cNvPr id="29" name="Text 27"/>
           <p:cNvSpPr/>
           <p:nvPr/>
         </p:nvSpPr>
@@ -30742,7 +30478,7 @@
                 <a:ea typeface="メイリオ" pitchFamily="34" charset="-122"/>
                 <a:cs typeface="メイリオ" pitchFamily="34" charset="-120"/>
               </a:rPr>
-              <a:t>FY2026 ▲114.8百万円　→　FY2027 ＋135.4百万円。③は既存事業を前期・今期の売上平均730.5百万円に戻すだけの回復です。</a:t>
+              <a:t>FY2026 ▲9.8百万円　→　FY2027 ＋105.4百万円。①②で103.5百万円を落としたうえでの数字です。</a:t>
             </a:r>
             <a:endParaRPr lang="en-US" sz="1150" dirty="0"/>
           </a:p>
@@ -30750,7 +30486,7 @@
       </p:sp>
       <p:sp>
         <p:nvSpPr>
-          <p:cNvPr id="27" name="Text 25"/>
+          <p:cNvPr id="30" name="Text 28"/>
           <p:cNvSpPr/>
           <p:nvPr/>
         </p:nvSpPr>
@@ -30781,7 +30517,7 @@
                 <a:ea typeface="メイリオ" pitchFamily="34" charset="-122"/>
                 <a:cs typeface="メイリオ" pitchFamily="34" charset="-120"/>
               </a:rPr>
-              <a:t>①はFY2026に含まれる大口案件（2025/11・2026/09）を保守的にゼロと置いたことによる減少。③の差額売上341.4百万円の粗利率は保守的に30%。</a:t>
+              <a:t>①は私募3号70.0＋4号5.0。②はFY2026の大口案件を保守的にゼロと置いたことによる減少。⑤はFY2027の102.5とFY2026に前倒し計上される30.0との差。</a:t>
             </a:r>
             <a:endParaRPr lang="en-US" sz="850" dirty="0"/>
           </a:p>
@@ -31082,7 +30818,7 @@
         <p:spPr>
           <a:xfrm>
             <a:off x="594360" y="1901952"/>
-            <a:ext cx="10963656" cy="338328"/>
+            <a:ext cx="10963656" cy="310896"/>
           </a:xfrm>
           <a:prstGeom prst="rect">
             <a:avLst/>
@@ -31107,7 +30843,7 @@
         <p:spPr>
           <a:xfrm>
             <a:off x="704088" y="1901952"/>
-            <a:ext cx="3438144" cy="338328"/>
+            <a:ext cx="3438144" cy="310896"/>
           </a:xfrm>
           <a:prstGeom prst="rect">
             <a:avLst/>
@@ -31146,7 +30882,7 @@
         <p:spPr>
           <a:xfrm>
             <a:off x="4361688" y="1901952"/>
-            <a:ext cx="2157984" cy="338328"/>
+            <a:ext cx="2157984" cy="310896"/>
           </a:xfrm>
           <a:prstGeom prst="rect">
             <a:avLst/>
@@ -31185,7 +30921,7 @@
         <p:spPr>
           <a:xfrm>
             <a:off x="6739128" y="1901952"/>
-            <a:ext cx="2249424" cy="338328"/>
+            <a:ext cx="2249424" cy="310896"/>
           </a:xfrm>
           <a:prstGeom prst="rect">
             <a:avLst/>
@@ -31209,7 +30945,7 @@
                 <a:ea typeface="メイリオ" pitchFamily="34" charset="-122"/>
                 <a:cs typeface="メイリオ" pitchFamily="34" charset="-120"/>
               </a:rPr>
-              <a:t>863.0</a:t>
+              <a:t>833.0</a:t>
             </a:r>
             <a:endParaRPr lang="en-US" sz="1050" dirty="0"/>
           </a:p>
@@ -31224,7 +30960,7 @@
         <p:spPr>
           <a:xfrm>
             <a:off x="9208008" y="1901952"/>
-            <a:ext cx="2240280" cy="338328"/>
+            <a:ext cx="2240280" cy="310896"/>
           </a:xfrm>
           <a:prstGeom prst="rect">
             <a:avLst/>
@@ -31248,7 +30984,7 @@
                 <a:ea typeface="メイリオ" pitchFamily="34" charset="-122"/>
                 <a:cs typeface="メイリオ" pitchFamily="34" charset="-120"/>
               </a:rPr>
-              <a:t>1,163.0</a:t>
+              <a:t>1,133.0</a:t>
             </a:r>
             <a:endParaRPr lang="en-US" sz="1050" dirty="0"/>
           </a:p>
@@ -31262,8 +30998,8 @@
         </p:nvSpPr>
         <p:spPr>
           <a:xfrm>
-            <a:off x="594360" y="2240280"/>
-            <a:ext cx="10963656" cy="338328"/>
+            <a:off x="594360" y="2212848"/>
+            <a:ext cx="10963656" cy="310896"/>
           </a:xfrm>
           <a:prstGeom prst="rect">
             <a:avLst/>
@@ -31287,8 +31023,8 @@
         </p:nvSpPr>
         <p:spPr>
           <a:xfrm>
-            <a:off x="704088" y="2240280"/>
-            <a:ext cx="3438144" cy="338328"/>
+            <a:off x="704088" y="2212848"/>
+            <a:ext cx="3438144" cy="310896"/>
           </a:xfrm>
           <a:prstGeom prst="rect">
             <a:avLst/>
@@ -31326,8 +31062,8 @@
         </p:nvSpPr>
         <p:spPr>
           <a:xfrm>
-            <a:off x="4361688" y="2240280"/>
-            <a:ext cx="2157984" cy="338328"/>
+            <a:off x="4361688" y="2212848"/>
+            <a:ext cx="2157984" cy="310896"/>
           </a:xfrm>
           <a:prstGeom prst="rect">
             <a:avLst/>
@@ -31365,8 +31101,8 @@
         </p:nvSpPr>
         <p:spPr>
           <a:xfrm>
-            <a:off x="6739128" y="2240280"/>
-            <a:ext cx="2249424" cy="338328"/>
+            <a:off x="6739128" y="2212848"/>
+            <a:ext cx="2249424" cy="310896"/>
           </a:xfrm>
           <a:prstGeom prst="rect">
             <a:avLst/>
@@ -31404,8 +31140,8 @@
         </p:nvSpPr>
         <p:spPr>
           <a:xfrm>
-            <a:off x="9208008" y="2240280"/>
-            <a:ext cx="2240280" cy="338328"/>
+            <a:off x="9208008" y="2212848"/>
+            <a:ext cx="2240280" cy="310896"/>
           </a:xfrm>
           <a:prstGeom prst="rect">
             <a:avLst/>
@@ -31443,8 +31179,8 @@
         </p:nvSpPr>
         <p:spPr>
           <a:xfrm>
-            <a:off x="594360" y="2578608"/>
-            <a:ext cx="10963656" cy="338328"/>
+            <a:off x="594360" y="2523744"/>
+            <a:ext cx="10963656" cy="310896"/>
           </a:xfrm>
           <a:prstGeom prst="rect">
             <a:avLst/>
@@ -31468,8 +31204,8 @@
         </p:nvSpPr>
         <p:spPr>
           <a:xfrm>
-            <a:off x="704088" y="2578608"/>
-            <a:ext cx="3438144" cy="338328"/>
+            <a:off x="704088" y="2523744"/>
+            <a:ext cx="3438144" cy="310896"/>
           </a:xfrm>
           <a:prstGeom prst="rect">
             <a:avLst/>
@@ -31507,8 +31243,8 @@
         </p:nvSpPr>
         <p:spPr>
           <a:xfrm>
-            <a:off x="4361688" y="2578608"/>
-            <a:ext cx="2157984" cy="338328"/>
+            <a:off x="4361688" y="2523744"/>
+            <a:ext cx="2157984" cy="310896"/>
           </a:xfrm>
           <a:prstGeom prst="rect">
             <a:avLst/>
@@ -31546,8 +31282,8 @@
         </p:nvSpPr>
         <p:spPr>
           <a:xfrm>
-            <a:off x="6739128" y="2578608"/>
-            <a:ext cx="2249424" cy="338328"/>
+            <a:off x="6739128" y="2523744"/>
+            <a:ext cx="2249424" cy="310896"/>
           </a:xfrm>
           <a:prstGeom prst="rect">
             <a:avLst/>
@@ -31571,7 +31307,7 @@
                 <a:ea typeface="メイリオ" pitchFamily="34" charset="-122"/>
                 <a:cs typeface="メイリオ" pitchFamily="34" charset="-120"/>
               </a:rPr>
-              <a:t>132.5</a:t>
+              <a:t>102.5</a:t>
             </a:r>
             <a:endParaRPr lang="en-US" sz="1050" dirty="0"/>
           </a:p>
@@ -31585,8 +31321,8 @@
         </p:nvSpPr>
         <p:spPr>
           <a:xfrm>
-            <a:off x="9208008" y="2578608"/>
-            <a:ext cx="2240280" cy="338328"/>
+            <a:off x="9208008" y="2523744"/>
+            <a:ext cx="2240280" cy="310896"/>
           </a:xfrm>
           <a:prstGeom prst="rect">
             <a:avLst/>
@@ -31610,7 +31346,7 @@
                 <a:ea typeface="メイリオ" pitchFamily="34" charset="-122"/>
                 <a:cs typeface="メイリオ" pitchFamily="34" charset="-120"/>
               </a:rPr>
-              <a:t>132.5</a:t>
+              <a:t>102.5</a:t>
             </a:r>
             <a:endParaRPr lang="en-US" sz="1050" dirty="0"/>
           </a:p>
@@ -31624,8 +31360,8 @@
         </p:nvSpPr>
         <p:spPr>
           <a:xfrm>
-            <a:off x="594360" y="2916936"/>
-            <a:ext cx="10963656" cy="338328"/>
+            <a:off x="594360" y="2834640"/>
+            <a:ext cx="10963656" cy="310896"/>
           </a:xfrm>
           <a:prstGeom prst="rect">
             <a:avLst/>
@@ -31649,8 +31385,8 @@
         </p:nvSpPr>
         <p:spPr>
           <a:xfrm>
-            <a:off x="704088" y="2916936"/>
-            <a:ext cx="3438144" cy="338328"/>
+            <a:off x="704088" y="2834640"/>
+            <a:ext cx="3438144" cy="310896"/>
           </a:xfrm>
           <a:prstGeom prst="rect">
             <a:avLst/>
@@ -31688,8 +31424,8 @@
         </p:nvSpPr>
         <p:spPr>
           <a:xfrm>
-            <a:off x="4361688" y="2916936"/>
-            <a:ext cx="2157984" cy="338328"/>
+            <a:off x="4361688" y="2834640"/>
+            <a:ext cx="2157984" cy="310896"/>
           </a:xfrm>
           <a:prstGeom prst="rect">
             <a:avLst/>
@@ -31727,8 +31463,8 @@
         </p:nvSpPr>
         <p:spPr>
           <a:xfrm>
-            <a:off x="6739128" y="2916936"/>
-            <a:ext cx="2249424" cy="338328"/>
+            <a:off x="6739128" y="2834640"/>
+            <a:ext cx="2249424" cy="310896"/>
           </a:xfrm>
           <a:prstGeom prst="rect">
             <a:avLst/>
@@ -31752,7 +31488,7 @@
                 <a:ea typeface="メイリオ" pitchFamily="34" charset="-122"/>
                 <a:cs typeface="メイリオ" pitchFamily="34" charset="-120"/>
               </a:rPr>
-              <a:t>435.5</a:t>
+              <a:t>405.5</a:t>
             </a:r>
             <a:endParaRPr lang="en-US" sz="1050" dirty="0"/>
           </a:p>
@@ -31766,8 +31502,8 @@
         </p:nvSpPr>
         <p:spPr>
           <a:xfrm>
-            <a:off x="9208008" y="2916936"/>
-            <a:ext cx="2240280" cy="338328"/>
+            <a:off x="9208008" y="2834640"/>
+            <a:ext cx="2240280" cy="310896"/>
           </a:xfrm>
           <a:prstGeom prst="rect">
             <a:avLst/>
@@ -31791,7 +31527,7 @@
                 <a:ea typeface="メイリオ" pitchFamily="34" charset="-122"/>
                 <a:cs typeface="メイリオ" pitchFamily="34" charset="-120"/>
               </a:rPr>
-              <a:t>525.5</a:t>
+              <a:t>495.5</a:t>
             </a:r>
             <a:endParaRPr lang="en-US" sz="1050" dirty="0"/>
           </a:p>
@@ -31805,8 +31541,8 @@
         </p:nvSpPr>
         <p:spPr>
           <a:xfrm>
-            <a:off x="594360" y="3255264"/>
-            <a:ext cx="10963656" cy="338328"/>
+            <a:off x="594360" y="3145536"/>
+            <a:ext cx="10963656" cy="310896"/>
           </a:xfrm>
           <a:prstGeom prst="rect">
             <a:avLst/>
@@ -31830,8 +31566,8 @@
         </p:nvSpPr>
         <p:spPr>
           <a:xfrm>
-            <a:off x="704088" y="3255264"/>
-            <a:ext cx="3438144" cy="338328"/>
+            <a:off x="704088" y="3145536"/>
+            <a:ext cx="3438144" cy="310896"/>
           </a:xfrm>
           <a:prstGeom prst="rect">
             <a:avLst/>
@@ -31869,8 +31605,8 @@
         </p:nvSpPr>
         <p:spPr>
           <a:xfrm>
-            <a:off x="4361688" y="3255264"/>
-            <a:ext cx="2157984" cy="338328"/>
+            <a:off x="4361688" y="3145536"/>
+            <a:ext cx="2157984" cy="310896"/>
           </a:xfrm>
           <a:prstGeom prst="rect">
             <a:avLst/>
@@ -31908,8 +31644,8 @@
         </p:nvSpPr>
         <p:spPr>
           <a:xfrm>
-            <a:off x="6739128" y="3255264"/>
-            <a:ext cx="2249424" cy="338328"/>
+            <a:off x="6739128" y="3145536"/>
+            <a:ext cx="2249424" cy="310896"/>
           </a:xfrm>
           <a:prstGeom prst="rect">
             <a:avLst/>
@@ -31933,7 +31669,7 @@
                 <a:ea typeface="メイリオ" pitchFamily="34" charset="-122"/>
                 <a:cs typeface="メイリオ" pitchFamily="34" charset="-120"/>
               </a:rPr>
-              <a:t>50.5%</a:t>
+              <a:t>48.7%</a:t>
             </a:r>
             <a:endParaRPr lang="en-US" sz="1050" dirty="0"/>
           </a:p>
@@ -31947,8 +31683,8 @@
         </p:nvSpPr>
         <p:spPr>
           <a:xfrm>
-            <a:off x="9208008" y="3255264"/>
-            <a:ext cx="2240280" cy="338328"/>
+            <a:off x="9208008" y="3145536"/>
+            <a:ext cx="2240280" cy="310896"/>
           </a:xfrm>
           <a:prstGeom prst="rect">
             <a:avLst/>
@@ -31972,7 +31708,7 @@
                 <a:ea typeface="メイリオ" pitchFamily="34" charset="-122"/>
                 <a:cs typeface="メイリオ" pitchFamily="34" charset="-120"/>
               </a:rPr>
-              <a:t>45.2%</a:t>
+              <a:t>43.7%</a:t>
             </a:r>
             <a:endParaRPr lang="en-US" sz="1050" dirty="0"/>
           </a:p>
@@ -31986,8 +31722,8 @@
         </p:nvSpPr>
         <p:spPr>
           <a:xfrm>
-            <a:off x="594360" y="3593592"/>
-            <a:ext cx="10963656" cy="338328"/>
+            <a:off x="594360" y="3456432"/>
+            <a:ext cx="10963656" cy="310896"/>
           </a:xfrm>
           <a:prstGeom prst="rect">
             <a:avLst/>
@@ -32011,8 +31747,8 @@
         </p:nvSpPr>
         <p:spPr>
           <a:xfrm>
-            <a:off x="704088" y="3593592"/>
-            <a:ext cx="3438144" cy="338328"/>
+            <a:off x="704088" y="3456432"/>
+            <a:ext cx="3438144" cy="310896"/>
           </a:xfrm>
           <a:prstGeom prst="rect">
             <a:avLst/>
@@ -32050,8 +31786,8 @@
         </p:nvSpPr>
         <p:spPr>
           <a:xfrm>
-            <a:off x="4361688" y="3593592"/>
-            <a:ext cx="2157984" cy="338328"/>
+            <a:off x="4361688" y="3456432"/>
+            <a:ext cx="2157984" cy="310896"/>
           </a:xfrm>
           <a:prstGeom prst="rect">
             <a:avLst/>
@@ -32089,8 +31825,8 @@
         </p:nvSpPr>
         <p:spPr>
           <a:xfrm>
-            <a:off x="6739128" y="3593592"/>
-            <a:ext cx="2249424" cy="338328"/>
+            <a:off x="6739128" y="3456432"/>
+            <a:ext cx="2249424" cy="310896"/>
           </a:xfrm>
           <a:prstGeom prst="rect">
             <a:avLst/>
@@ -32128,8 +31864,8 @@
         </p:nvSpPr>
         <p:spPr>
           <a:xfrm>
-            <a:off x="9208008" y="3593592"/>
-            <a:ext cx="2240280" cy="338328"/>
+            <a:off x="9208008" y="3456432"/>
+            <a:ext cx="2240280" cy="310896"/>
           </a:xfrm>
           <a:prstGeom prst="rect">
             <a:avLst/>
@@ -32167,8 +31903,8 @@
         </p:nvSpPr>
         <p:spPr>
           <a:xfrm>
-            <a:off x="594360" y="3931920"/>
-            <a:ext cx="10963656" cy="338328"/>
+            <a:off x="594360" y="3767328"/>
+            <a:ext cx="10963656" cy="310896"/>
           </a:xfrm>
           <a:prstGeom prst="rect">
             <a:avLst/>
@@ -32192,8 +31928,8 @@
         </p:nvSpPr>
         <p:spPr>
           <a:xfrm>
-            <a:off x="704088" y="3931920"/>
-            <a:ext cx="3438144" cy="338328"/>
+            <a:off x="704088" y="3767328"/>
+            <a:ext cx="3438144" cy="310896"/>
           </a:xfrm>
           <a:prstGeom prst="rect">
             <a:avLst/>
@@ -32231,8 +31967,8 @@
         </p:nvSpPr>
         <p:spPr>
           <a:xfrm>
-            <a:off x="4361688" y="3931920"/>
-            <a:ext cx="2157984" cy="338328"/>
+            <a:off x="4361688" y="3767328"/>
+            <a:ext cx="2157984" cy="310896"/>
           </a:xfrm>
           <a:prstGeom prst="rect">
             <a:avLst/>
@@ -32270,8 +32006,8 @@
         </p:nvSpPr>
         <p:spPr>
           <a:xfrm>
-            <a:off x="6739128" y="3931920"/>
-            <a:ext cx="2249424" cy="338328"/>
+            <a:off x="6739128" y="3767328"/>
+            <a:ext cx="2249424" cy="310896"/>
           </a:xfrm>
           <a:prstGeom prst="rect">
             <a:avLst/>
@@ -32295,7 +32031,7 @@
                 <a:ea typeface="メイリオ" pitchFamily="34" charset="-122"/>
                 <a:cs typeface="メイリオ" pitchFamily="34" charset="-120"/>
               </a:rPr>
-              <a:t>＋135.4</a:t>
+              <a:t>＋105.4</a:t>
             </a:r>
             <a:endParaRPr lang="en-US" sz="1050" dirty="0"/>
           </a:p>
@@ -32309,8 +32045,8 @@
         </p:nvSpPr>
         <p:spPr>
           <a:xfrm>
-            <a:off x="9208008" y="3931920"/>
-            <a:ext cx="2240280" cy="338328"/>
+            <a:off x="9208008" y="3767328"/>
+            <a:ext cx="2240280" cy="310896"/>
           </a:xfrm>
           <a:prstGeom prst="rect">
             <a:avLst/>
@@ -32334,7 +32070,7 @@
                 <a:ea typeface="メイリオ" pitchFamily="34" charset="-122"/>
                 <a:cs typeface="メイリオ" pitchFamily="34" charset="-120"/>
               </a:rPr>
-              <a:t>＋225.4</a:t>
+              <a:t>＋195.4</a:t>
             </a:r>
             <a:endParaRPr lang="en-US" sz="1050" dirty="0"/>
           </a:p>
@@ -32348,8 +32084,8 @@
         </p:nvSpPr>
         <p:spPr>
           <a:xfrm>
-            <a:off x="594360" y="4270248"/>
-            <a:ext cx="10963656" cy="338328"/>
+            <a:off x="594360" y="4078224"/>
+            <a:ext cx="10963656" cy="310896"/>
           </a:xfrm>
           <a:prstGeom prst="rect">
             <a:avLst/>
@@ -32373,8 +32109,8 @@
         </p:nvSpPr>
         <p:spPr>
           <a:xfrm>
-            <a:off x="704088" y="4270248"/>
-            <a:ext cx="3438144" cy="338328"/>
+            <a:off x="704088" y="4078224"/>
+            <a:ext cx="3438144" cy="310896"/>
           </a:xfrm>
           <a:prstGeom prst="rect">
             <a:avLst/>
@@ -32412,8 +32148,8 @@
         </p:nvSpPr>
         <p:spPr>
           <a:xfrm>
-            <a:off x="4361688" y="4270248"/>
-            <a:ext cx="2157984" cy="338328"/>
+            <a:off x="4361688" y="4078224"/>
+            <a:ext cx="2157984" cy="310896"/>
           </a:xfrm>
           <a:prstGeom prst="rect">
             <a:avLst/>
@@ -32451,8 +32187,8 @@
         </p:nvSpPr>
         <p:spPr>
           <a:xfrm>
-            <a:off x="6739128" y="4270248"/>
-            <a:ext cx="2249424" cy="338328"/>
+            <a:off x="6739128" y="4078224"/>
+            <a:ext cx="2249424" cy="310896"/>
           </a:xfrm>
           <a:prstGeom prst="rect">
             <a:avLst/>
@@ -32476,7 +32212,7 @@
                 <a:ea typeface="メイリオ" pitchFamily="34" charset="-122"/>
                 <a:cs typeface="メイリオ" pitchFamily="34" charset="-120"/>
               </a:rPr>
-              <a:t>＋120.4</a:t>
+              <a:t>＋90.4</a:t>
             </a:r>
             <a:endParaRPr lang="en-US" sz="1050" dirty="0"/>
           </a:p>
@@ -32490,8 +32226,8 @@
         </p:nvSpPr>
         <p:spPr>
           <a:xfrm>
-            <a:off x="9208008" y="4270248"/>
-            <a:ext cx="2240280" cy="338328"/>
+            <a:off x="9208008" y="4078224"/>
+            <a:ext cx="2240280" cy="310896"/>
           </a:xfrm>
           <a:prstGeom prst="rect">
             <a:avLst/>
@@ -32515,7 +32251,7 @@
                 <a:ea typeface="メイリオ" pitchFamily="34" charset="-122"/>
                 <a:cs typeface="メイリオ" pitchFamily="34" charset="-120"/>
               </a:rPr>
-              <a:t>＋210.4</a:t>
+              <a:t>＋180.4</a:t>
             </a:r>
             <a:endParaRPr lang="en-US" sz="1050" dirty="0"/>
           </a:p>
@@ -32529,8 +32265,8 @@
         </p:nvSpPr>
         <p:spPr>
           <a:xfrm>
-            <a:off x="594360" y="4608576"/>
-            <a:ext cx="10963656" cy="338328"/>
+            <a:off x="594360" y="4389120"/>
+            <a:ext cx="10963656" cy="310896"/>
           </a:xfrm>
           <a:prstGeom prst="rect">
             <a:avLst/>
@@ -32554,8 +32290,8 @@
         </p:nvSpPr>
         <p:spPr>
           <a:xfrm>
-            <a:off x="704088" y="4608576"/>
-            <a:ext cx="3438144" cy="338328"/>
+            <a:off x="704088" y="4389120"/>
+            <a:ext cx="3438144" cy="310896"/>
           </a:xfrm>
           <a:prstGeom prst="rect">
             <a:avLst/>
@@ -32579,6 +32315,187 @@
                 <a:ea typeface="メイリオ" pitchFamily="34" charset="-122"/>
                 <a:cs typeface="メイリオ" pitchFamily="34" charset="-120"/>
               </a:rPr>
+              <a:t>当期純利益</a:t>
+            </a:r>
+            <a:endParaRPr lang="en-US" sz="1050" dirty="0"/>
+          </a:p>
+        </p:txBody>
+      </p:sp>
+      <p:sp>
+        <p:nvSpPr>
+          <p:cNvPr id="51" name="Text 49"/>
+          <p:cNvSpPr/>
+          <p:nvPr/>
+        </p:nvSpPr>
+        <p:spPr>
+          <a:xfrm>
+            <a:off x="4361688" y="4389120"/>
+            <a:ext cx="2157984" cy="310896"/>
+          </a:xfrm>
+          <a:prstGeom prst="rect">
+            <a:avLst/>
+          </a:prstGeom>
+          <a:noFill/>
+          <a:ln/>
+        </p:spPr>
+        <p:txBody>
+          <a:bodyPr wrap="square" lIns="0" tIns="0" rIns="0" bIns="0" rtlCol="0" anchor="ctr"/>
+          <a:lstStyle/>
+          <a:p>
+            <a:pPr algn="r" indent="0" marL="0">
+              <a:buNone/>
+            </a:pPr>
+            <a:r>
+              <a:rPr lang="en-US" sz="1050" b="1" dirty="0">
+                <a:solidFill>
+                  <a:srgbClr val="6E6E6E"/>
+                </a:solidFill>
+                <a:latin typeface="メイリオ" pitchFamily="34" charset="0"/>
+                <a:ea typeface="メイリオ" pitchFamily="34" charset="-122"/>
+                <a:cs typeface="メイリオ" pitchFamily="34" charset="-120"/>
+              </a:rPr>
+              <a:t>▲114.6</a:t>
+            </a:r>
+            <a:endParaRPr lang="en-US" sz="1050" dirty="0"/>
+          </a:p>
+        </p:txBody>
+      </p:sp>
+      <p:sp>
+        <p:nvSpPr>
+          <p:cNvPr id="52" name="Text 50"/>
+          <p:cNvSpPr/>
+          <p:nvPr/>
+        </p:nvSpPr>
+        <p:spPr>
+          <a:xfrm>
+            <a:off x="6739128" y="4389120"/>
+            <a:ext cx="2249424" cy="310896"/>
+          </a:xfrm>
+          <a:prstGeom prst="rect">
+            <a:avLst/>
+          </a:prstGeom>
+          <a:noFill/>
+          <a:ln/>
+        </p:spPr>
+        <p:txBody>
+          <a:bodyPr wrap="square" lIns="0" tIns="0" rIns="0" bIns="0" rtlCol="0" anchor="ctr"/>
+          <a:lstStyle/>
+          <a:p>
+            <a:pPr algn="r" indent="0" marL="0">
+              <a:buNone/>
+            </a:pPr>
+            <a:r>
+              <a:rPr lang="en-US" sz="1050" b="1" dirty="0">
+                <a:solidFill>
+                  <a:srgbClr val="1A1A1A"/>
+                </a:solidFill>
+                <a:latin typeface="メイリオ" pitchFamily="34" charset="0"/>
+                <a:ea typeface="メイリオ" pitchFamily="34" charset="-122"/>
+                <a:cs typeface="メイリオ" pitchFamily="34" charset="-120"/>
+              </a:rPr>
+              <a:t>＋90.4</a:t>
+            </a:r>
+            <a:endParaRPr lang="en-US" sz="1050" dirty="0"/>
+          </a:p>
+        </p:txBody>
+      </p:sp>
+      <p:sp>
+        <p:nvSpPr>
+          <p:cNvPr id="53" name="Text 51"/>
+          <p:cNvSpPr/>
+          <p:nvPr/>
+        </p:nvSpPr>
+        <p:spPr>
+          <a:xfrm>
+            <a:off x="9208008" y="4389120"/>
+            <a:ext cx="2240280" cy="310896"/>
+          </a:xfrm>
+          <a:prstGeom prst="rect">
+            <a:avLst/>
+          </a:prstGeom>
+          <a:noFill/>
+          <a:ln/>
+        </p:spPr>
+        <p:txBody>
+          <a:bodyPr wrap="square" lIns="0" tIns="0" rIns="0" bIns="0" rtlCol="0" anchor="ctr"/>
+          <a:lstStyle/>
+          <a:p>
+            <a:pPr algn="r" indent="0" marL="0">
+              <a:buNone/>
+            </a:pPr>
+            <a:r>
+              <a:rPr lang="en-US" sz="1050" b="1" dirty="0">
+                <a:solidFill>
+                  <a:srgbClr val="1A1A1A"/>
+                </a:solidFill>
+                <a:latin typeface="メイリオ" pitchFamily="34" charset="0"/>
+                <a:ea typeface="メイリオ" pitchFamily="34" charset="-122"/>
+                <a:cs typeface="メイリオ" pitchFamily="34" charset="-120"/>
+              </a:rPr>
+              <a:t>＋169.1</a:t>
+            </a:r>
+            <a:endParaRPr lang="en-US" sz="1050" dirty="0"/>
+          </a:p>
+        </p:txBody>
+      </p:sp>
+      <p:sp>
+        <p:nvSpPr>
+          <p:cNvPr id="54" name="Shape 52"/>
+          <p:cNvSpPr/>
+          <p:nvPr/>
+        </p:nvSpPr>
+        <p:spPr>
+          <a:xfrm>
+            <a:off x="594360" y="4700016"/>
+            <a:ext cx="10963656" cy="310896"/>
+          </a:xfrm>
+          <a:prstGeom prst="rect">
+            <a:avLst/>
+          </a:prstGeom>
+          <a:solidFill>
+            <a:srgbClr val="FAF3E2"/>
+          </a:solidFill>
+          <a:ln w="6350">
+            <a:solidFill>
+              <a:srgbClr val="E2E0DC"/>
+            </a:solidFill>
+            <a:prstDash val="solid"/>
+          </a:ln>
+        </p:spPr>
+      </p:sp>
+      <p:sp>
+        <p:nvSpPr>
+          <p:cNvPr id="55" name="Text 53"/>
+          <p:cNvSpPr/>
+          <p:nvPr/>
+        </p:nvSpPr>
+        <p:spPr>
+          <a:xfrm>
+            <a:off x="704088" y="4700016"/>
+            <a:ext cx="3438144" cy="310896"/>
+          </a:xfrm>
+          <a:prstGeom prst="rect">
+            <a:avLst/>
+          </a:prstGeom>
+          <a:noFill/>
+          <a:ln/>
+        </p:spPr>
+        <p:txBody>
+          <a:bodyPr wrap="square" lIns="0" tIns="0" rIns="0" bIns="0" rtlCol="0" anchor="ctr"/>
+          <a:lstStyle/>
+          <a:p>
+            <a:pPr algn="l" indent="0" marL="0">
+              <a:buNone/>
+            </a:pPr>
+            <a:r>
+              <a:rPr lang="en-US" sz="1050" b="1" dirty="0">
+                <a:solidFill>
+                  <a:srgbClr val="1A1A1A"/>
+                </a:solidFill>
+                <a:latin typeface="メイリオ" pitchFamily="34" charset="0"/>
+                <a:ea typeface="メイリオ" pitchFamily="34" charset="-122"/>
+                <a:cs typeface="メイリオ" pitchFamily="34" charset="-120"/>
+              </a:rPr>
               <a:t>期中 最低現預金</a:t>
             </a:r>
             <a:endParaRPr lang="en-US" sz="1050" dirty="0"/>
@@ -32587,14 +32504,14 @@
       </p:sp>
       <p:sp>
         <p:nvSpPr>
-          <p:cNvPr id="51" name="Text 49"/>
-          <p:cNvSpPr/>
-          <p:nvPr/>
-        </p:nvSpPr>
-        <p:spPr>
-          <a:xfrm>
-            <a:off x="4361688" y="4608576"/>
-            <a:ext cx="2157984" cy="338328"/>
+          <p:cNvPr id="56" name="Text 54"/>
+          <p:cNvSpPr/>
+          <p:nvPr/>
+        </p:nvSpPr>
+        <p:spPr>
+          <a:xfrm>
+            <a:off x="4361688" y="4700016"/>
+            <a:ext cx="2157984" cy="310896"/>
           </a:xfrm>
           <a:prstGeom prst="rect">
             <a:avLst/>
@@ -32626,14 +32543,14 @@
       </p:sp>
       <p:sp>
         <p:nvSpPr>
-          <p:cNvPr id="52" name="Text 50"/>
-          <p:cNvSpPr/>
-          <p:nvPr/>
-        </p:nvSpPr>
-        <p:spPr>
-          <a:xfrm>
-            <a:off x="6739128" y="4608576"/>
-            <a:ext cx="2249424" cy="338328"/>
+          <p:cNvPr id="57" name="Text 55"/>
+          <p:cNvSpPr/>
+          <p:nvPr/>
+        </p:nvSpPr>
+        <p:spPr>
+          <a:xfrm>
+            <a:off x="6739128" y="4700016"/>
+            <a:ext cx="2249424" cy="310896"/>
           </a:xfrm>
           <a:prstGeom prst="rect">
             <a:avLst/>
@@ -32657,7 +32574,7 @@
                 <a:ea typeface="メイリオ" pitchFamily="34" charset="-122"/>
                 <a:cs typeface="メイリオ" pitchFamily="34" charset="-120"/>
               </a:rPr>
-              <a:t>＋40.3</a:t>
+              <a:t>＋34.2</a:t>
             </a:r>
             <a:endParaRPr lang="en-US" sz="1050" dirty="0"/>
           </a:p>
@@ -32665,14 +32582,14 @@
       </p:sp>
       <p:sp>
         <p:nvSpPr>
-          <p:cNvPr id="53" name="Text 51"/>
-          <p:cNvSpPr/>
-          <p:nvPr/>
-        </p:nvSpPr>
-        <p:spPr>
-          <a:xfrm>
-            <a:off x="9208008" y="4608576"/>
-            <a:ext cx="2240280" cy="338328"/>
+          <p:cNvPr id="58" name="Text 56"/>
+          <p:cNvSpPr/>
+          <p:nvPr/>
+        </p:nvSpPr>
+        <p:spPr>
+          <a:xfrm>
+            <a:off x="9208008" y="4700016"/>
+            <a:ext cx="2240280" cy="310896"/>
           </a:xfrm>
           <a:prstGeom prst="rect">
             <a:avLst/>
@@ -32696,7 +32613,7 @@
                 <a:ea typeface="メイリオ" pitchFamily="34" charset="-122"/>
                 <a:cs typeface="メイリオ" pitchFamily="34" charset="-120"/>
               </a:rPr>
-              <a:t>＋370.3</a:t>
+              <a:t>＋364.2</a:t>
             </a:r>
             <a:endParaRPr lang="en-US" sz="1050" dirty="0"/>
           </a:p>
@@ -32704,18 +32621,18 @@
       </p:sp>
       <p:sp>
         <p:nvSpPr>
-          <p:cNvPr id="54" name="Shape 52"/>
-          <p:cNvSpPr/>
-          <p:nvPr/>
-        </p:nvSpPr>
-        <p:spPr>
-          <a:xfrm>
-            <a:off x="594360" y="4983480"/>
-            <a:ext cx="5349240" cy="1298448"/>
+          <p:cNvPr id="59" name="Shape 57"/>
+          <p:cNvSpPr/>
+          <p:nvPr/>
+        </p:nvSpPr>
+        <p:spPr>
+          <a:xfrm>
+            <a:off x="594360" y="5102352"/>
+            <a:ext cx="5349240" cy="1170432"/>
           </a:xfrm>
           <a:prstGeom prst="roundRect">
             <a:avLst>
-              <a:gd name="adj" fmla="val 3521"/>
+              <a:gd name="adj" fmla="val 3906"/>
             </a:avLst>
           </a:prstGeom>
           <a:solidFill>
@@ -32738,13 +32655,13 @@
       </p:sp>
       <p:sp>
         <p:nvSpPr>
-          <p:cNvPr id="55" name="Text 53"/>
-          <p:cNvSpPr/>
-          <p:nvPr/>
-        </p:nvSpPr>
-        <p:spPr>
-          <a:xfrm>
-            <a:off x="868680" y="5138928"/>
+          <p:cNvPr id="60" name="Text 58"/>
+          <p:cNvSpPr/>
+          <p:nvPr/>
+        </p:nvSpPr>
+        <p:spPr>
+          <a:xfrm>
+            <a:off x="868680" y="5230368"/>
             <a:ext cx="4800600" cy="274320"/>
           </a:xfrm>
           <a:prstGeom prst="rect">
@@ -32777,14 +32694,14 @@
       </p:sp>
       <p:sp>
         <p:nvSpPr>
-          <p:cNvPr id="56" name="Text 54"/>
-          <p:cNvSpPr/>
-          <p:nvPr/>
-        </p:nvSpPr>
-        <p:spPr>
-          <a:xfrm>
-            <a:off x="868680" y="5422392"/>
-            <a:ext cx="4800600" cy="777240"/>
+          <p:cNvPr id="61" name="Text 59"/>
+          <p:cNvSpPr/>
+          <p:nvPr/>
+        </p:nvSpPr>
+        <p:spPr>
+          <a:xfrm>
+            <a:off x="868680" y="5504688"/>
+            <a:ext cx="4800600" cy="713232"/>
           </a:xfrm>
           <a:prstGeom prst="rect">
             <a:avLst/>
@@ -32800,7 +32717,7 @@
               <a:buNone/>
             </a:pPr>
             <a:r>
-              <a:rPr lang="en-US" sz="1050" dirty="0">
+              <a:rPr lang="en-US" sz="1000" dirty="0">
                 <a:solidFill>
                   <a:srgbClr val="FFFFFF"/>
                 </a:solidFill>
@@ -32808,26 +32725,26 @@
                 <a:ea typeface="メイリオ" pitchFamily="34" charset="-122"/>
                 <a:cs typeface="メイリオ" pitchFamily="34" charset="-120"/>
               </a:rPr>
-              <a:t>既存事業730.5百万円は前期・今期の売上平均で、新規の前提を置いていません。ここに契約ベースの上乗せ案件を外数で加算しています。</a:t>
-            </a:r>
-            <a:endParaRPr lang="en-US" sz="1050" dirty="0"/>
-          </a:p>
-        </p:txBody>
-      </p:sp>
-      <p:sp>
-        <p:nvSpPr>
-          <p:cNvPr id="57" name="Shape 55"/>
-          <p:cNvSpPr/>
-          <p:nvPr/>
-        </p:nvSpPr>
-        <p:spPr>
-          <a:xfrm>
-            <a:off x="6217920" y="4983480"/>
-            <a:ext cx="5349240" cy="1298448"/>
+              <a:t>既存事業730.5百万円は前期・今期の売上平均（私募を除いた実力値ベース）。ここに上乗せ案件102.5百万円を外数で加算しています。</a:t>
+            </a:r>
+            <a:endParaRPr lang="en-US" sz="1000" dirty="0"/>
+          </a:p>
+        </p:txBody>
+      </p:sp>
+      <p:sp>
+        <p:nvSpPr>
+          <p:cNvPr id="62" name="Shape 60"/>
+          <p:cNvSpPr/>
+          <p:nvPr/>
+        </p:nvSpPr>
+        <p:spPr>
+          <a:xfrm>
+            <a:off x="6217920" y="5102352"/>
+            <a:ext cx="5349240" cy="1170432"/>
           </a:xfrm>
           <a:prstGeom prst="roundRect">
             <a:avLst>
-              <a:gd name="adj" fmla="val 3521"/>
+              <a:gd name="adj" fmla="val 3906"/>
             </a:avLst>
           </a:prstGeom>
           <a:solidFill>
@@ -32850,13 +32767,13 @@
       </p:sp>
       <p:sp>
         <p:nvSpPr>
-          <p:cNvPr id="58" name="Text 56"/>
-          <p:cNvSpPr/>
-          <p:nvPr/>
-        </p:nvSpPr>
-        <p:spPr>
-          <a:xfrm>
-            <a:off x="6492240" y="5138928"/>
+          <p:cNvPr id="63" name="Text 61"/>
+          <p:cNvSpPr/>
+          <p:nvPr/>
+        </p:nvSpPr>
+        <p:spPr>
+          <a:xfrm>
+            <a:off x="6492240" y="5230368"/>
             <a:ext cx="4800600" cy="274320"/>
           </a:xfrm>
           <a:prstGeom prst="rect">
@@ -32889,14 +32806,14 @@
       </p:sp>
       <p:sp>
         <p:nvSpPr>
-          <p:cNvPr id="59" name="Text 57"/>
-          <p:cNvSpPr/>
-          <p:nvPr/>
-        </p:nvSpPr>
-        <p:spPr>
-          <a:xfrm>
-            <a:off x="6492240" y="5422392"/>
-            <a:ext cx="4800600" cy="777240"/>
+          <p:cNvPr id="64" name="Text 62"/>
+          <p:cNvSpPr/>
+          <p:nvPr/>
+        </p:nvSpPr>
+        <p:spPr>
+          <a:xfrm>
+            <a:off x="6492240" y="5504688"/>
+            <a:ext cx="4800600" cy="713232"/>
           </a:xfrm>
           <a:prstGeom prst="rect">
             <a:avLst/>
@@ -32912,23 +32829,23 @@
               <a:buNone/>
             </a:pPr>
             <a:r>
-              <a:rPr lang="en-US" sz="1050" dirty="0">
-                <a:solidFill>
-                  <a:srgbClr val="1A1A1A"/>
-                </a:solidFill>
-                <a:latin typeface="メイリオ" pitchFamily="34" charset="0"/>
-                <a:ea typeface="メイリオ" pitchFamily="34" charset="-122"/>
-                <a:cs typeface="メイリオ" pitchFamily="34" charset="-120"/>
-              </a:rPr>
-              <a:t>追加売上300百万円・粗利率30%。FY2026に私募で約300百万円を巻き返した実績と同水準を、来期の主軸として置き直したものです。</a:t>
-            </a:r>
-            <a:endParaRPr lang="en-US" sz="1050" dirty="0"/>
-          </a:p>
-        </p:txBody>
-      </p:sp>
-      <p:sp>
-        <p:nvSpPr>
-          <p:cNvPr id="60" name="Text 58"/>
+              <a:rPr lang="en-US" sz="1000" dirty="0">
+                <a:solidFill>
+                  <a:srgbClr val="1A1A1A"/>
+                </a:solidFill>
+                <a:latin typeface="メイリオ" pitchFamily="34" charset="0"/>
+                <a:ea typeface="メイリオ" pitchFamily="34" charset="-122"/>
+                <a:cs typeface="メイリオ" pitchFamily="34" charset="-120"/>
+              </a:rPr>
+              <a:t>追加売上300百万円・粗利率30%。FY2026に私募2本で実際に組成した規模と同水準を、来期の主軸として置き直したものです。</a:t>
+            </a:r>
+            <a:endParaRPr lang="en-US" sz="1000" dirty="0"/>
+          </a:p>
+        </p:txBody>
+      </p:sp>
+      <p:sp>
+        <p:nvSpPr>
+          <p:cNvPr id="65" name="Text 63"/>
           <p:cNvSpPr/>
           <p:nvPr/>
         </p:nvSpPr>
@@ -32959,7 +32876,7 @@
                 <a:ea typeface="メイリオ" pitchFamily="34" charset="-122"/>
                 <a:cs typeface="メイリオ" pitchFamily="34" charset="-120"/>
               </a:rPr>
-              <a:t>上場関連コストは計上せず、期首現預金30百万円（2026/09末のみずほ銀行200百万円返済後）を前提。上乗せ案件132.5百万円は原価なしのため総合粗利率を押し上げます。</a:t>
+              <a:t>期首現預金30百万円（2026/09末のみずほ銀行200百万円返済後）を前提。Eは繰越欠損金（FY2026末147.2百万円）を超える所得に法人税11.3百万円が生じます。</a:t>
             </a:r>
             <a:endParaRPr lang="en-US" sz="850" dirty="0"/>
           </a:p>
